--- a/pptx/Module07_Normalisation_1NF_2NF_3NF.pptx
+++ b/pptx/Module07_Normalisation_1NF_2NF_3NF.pptx
@@ -14,9 +14,10 @@
     <p:sldId id="262" r:id="rId8"/>
     <p:sldId id="263" r:id="rId9"/>
     <p:sldId id="264" r:id="rId10"/>
+    <p:sldId id="265" r:id="rId11"/>
   </p:sldIdLst>
   <p:notesMasterIdLst>
-    <p:notesMasterId r:id="rId11"/>
+    <p:notesMasterId r:id="rId12"/>
   </p:notesMasterIdLst>
   <p:sldSz cx="9144000" cy="5143500"/>
   <p:notesSz cx="5143500" cy="9144000"/>
@@ -552,6 +553,94 @@
 </p:notes>
 </file>
 
+<file path=ppt/notesSlides/notesSlide10.xml><?xml version="1.0" encoding="utf-8"?>
+<p:notes xmlns:a="http://schemas.openxmlformats.org/drawingml/2006/main" xmlns:r="http://schemas.openxmlformats.org/officeDocument/2006/relationships" xmlns:p="http://schemas.openxmlformats.org/presentationml/2006/main">
+  <p:cSld>
+    <p:spTree>
+      <p:nvGrpSpPr>
+        <p:cNvPr id="1" name=""/>
+        <p:cNvGrpSpPr/>
+        <p:nvPr/>
+      </p:nvGrpSpPr>
+      <p:grpSpPr>
+        <a:xfrm>
+          <a:off x="0" y="0"/>
+          <a:ext cx="0" cy="0"/>
+          <a:chOff x="0" y="0"/>
+          <a:chExt cx="0" cy="0"/>
+        </a:xfrm>
+      </p:grpSpPr>
+      <p:sp>
+        <p:nvSpPr>
+          <p:cNvPr id="2" name="Slide Image Placeholder 1"/>
+          <p:cNvSpPr>
+            <a:spLocks noGrp="1" noRot="1" noChangeAspect="1"/>
+          </p:cNvSpPr>
+          <p:nvPr>
+            <p:ph type="sldImg"/>
+          </p:nvPr>
+        </p:nvSpPr>
+        <p:spPr/>
+      </p:sp>
+      <p:sp>
+        <p:nvSpPr>
+          <p:cNvPr id="3" name="Notes Placeholder 2"/>
+          <p:cNvSpPr>
+            <a:spLocks noGrp="1"/>
+          </p:cNvSpPr>
+          <p:nvPr>
+            <p:ph type="body" idx="1"/>
+          </p:nvPr>
+        </p:nvSpPr>
+        <p:spPr/>
+        <p:txBody>
+          <a:bodyPr/>
+          <a:lstStyle/>
+          <a:p>
+            <a:r>
+              <a:rPr lang="en-US" dirty="0"/>
+              <a:t/>
+            </a:r>
+            <a:endParaRPr lang="en-US" dirty="0"/>
+          </a:p>
+        </p:txBody>
+      </p:sp>
+      <p:sp>
+        <p:nvSpPr>
+          <p:cNvPr id="4" name="Slide Number Placeholder 3"/>
+          <p:cNvSpPr>
+            <a:spLocks noGrp="1"/>
+          </p:cNvSpPr>
+          <p:nvPr>
+            <p:ph type="sldNum" sz="quarter" idx="10"/>
+          </p:nvPr>
+        </p:nvSpPr>
+        <p:spPr/>
+        <p:txBody>
+          <a:bodyPr/>
+          <a:lstStyle/>
+          <a:p>
+            <a:fld id="{F7021451-1387-4CA6-816F-3879F97B5CBC}" type="slidenum">
+              <a:rPr lang="en-US"/>
+              <a:t>10</a:t>
+            </a:fld>
+            <a:endParaRPr lang="en-US"/>
+          </a:p>
+        </p:txBody>
+      </p:sp>
+    </p:spTree>
+    <p:extLst>
+      <p:ext uri="{BB962C8B-B14F-4D97-AF65-F5344CB8AC3E}">
+        <p14:creationId xmlns:p14="http://schemas.microsoft.com/office/powerpoint/2010/main" val="1024086991"/>
+      </p:ext>
+    </p:extLst>
+  </p:cSld>
+  <p:clrMapOvr>
+    <a:masterClrMapping/>
+  </p:clrMapOvr>
+</p:notes>
+</file>
+
 <file path=ppt/notesSlides/notesSlide2.xml><?xml version="1.0" encoding="utf-8"?>
 <p:notes xmlns:a="http://schemas.openxmlformats.org/drawingml/2006/main" xmlns:r="http://schemas.openxmlformats.org/officeDocument/2006/relationships" xmlns:p="http://schemas.openxmlformats.org/presentationml/2006/main">
   <p:cSld>
@@ -598,7 +687,7 @@
           <a:p>
             <a:r>
               <a:rPr lang="en-US" dirty="0"/>
-              <a:t>Montrer un contre-exemple : une table unique 'tout_en_un' avec artiste+album+session mélangés. Demander aux étudiants de trouver les anomalies.</a:t>
+              <a:t>Montrer un contre-exemple : table unique 'tout_en_un' → demander de trouver les anomalies.</a:t>
             </a:r>
             <a:endParaRPr lang="en-US" dirty="0"/>
           </a:p>
@@ -686,7 +775,7 @@
           <a:p>
             <a:r>
               <a:rPr lang="en-US" dirty="0"/>
-              <a:t>PIÈGE CLASSIQUE que les étudiants confondent : atomicité 1NF (valeur indivisible dans une cellule) vs atomicité ACID (transaction tout-ou-rien). DEUX CONCEPTS DIFFÉRENTS.</a:t>
+              <a:t>Insister : 1NF = chaque cellule = 1 valeur. Si on peut decomposer, c'est pas atomique.</a:t>
             </a:r>
             <a:endParaRPr lang="en-US" dirty="0"/>
           </a:p>
@@ -774,7 +863,7 @@
           <a:p>
             <a:r>
               <a:rPr lang="en-US" dirty="0"/>
-              <a:t>La 2NF est souvent triviale car la plupart des tables ont une PK simple (AUTO_INCREMENT). Elle ne concerne que les tables associatives.</a:t>
+              <a:t>PIEGE CLASSIQUE. Ecrire les 2 definitions au tableau cote a cote. Faire repeter.</a:t>
             </a:r>
             <a:endParaRPr lang="en-US" dirty="0"/>
           </a:p>
@@ -862,7 +951,7 @@
           <a:p>
             <a:r>
               <a:rPr lang="en-US" dirty="0"/>
-              <a:t>La règle mnémotechnique est de Codd. L'écrire au tableau et la faire répéter.</a:t>
+              <a:t>La 2NF est souvent triviale car la plupart des tables ont une PK simple.</a:t>
             </a:r>
             <a:endParaRPr lang="en-US" dirty="0"/>
           </a:p>
@@ -950,7 +1039,7 @@
           <a:p>
             <a:r>
               <a:rPr lang="en-US" dirty="0"/>
-              <a:t>La dénormalisation est un concept avancé. Pour les étudiants visant D1, c'est un bon sujet d'argumentation.</a:t>
+              <a:t>La regle de Codd est fondamentale. L'ecrire au tableau et la faire repeter.</a:t>
             </a:r>
             <a:endParaRPr lang="en-US" dirty="0"/>
           </a:p>
@@ -1038,7 +1127,7 @@
           <a:p>
             <a:r>
               <a:rPr lang="en-US" dirty="0"/>
-              <a:t>Exercice fondamental. Le fichier Excel 'tout_en_un' est fourni avec des données SwissSound mélangées.</a:t>
+              <a:t>La denormalisation est un concept avance pour D1.</a:t>
             </a:r>
             <a:endParaRPr lang="en-US" dirty="0"/>
           </a:p>
@@ -1126,7 +1215,7 @@
           <a:p>
             <a:r>
               <a:rPr lang="en-US" dirty="0"/>
-              <a:t/>
+              <a:t>Fichier Excel 'tout_en_un' fourni avec donnees SwissSound melangees.</a:t>
             </a:r>
             <a:endParaRPr lang="en-US" dirty="0"/>
           </a:p>
@@ -1695,7 +1784,7 @@
               <a:buNone/>
             </a:pPr>
             <a:r>
-              <a:rPr lang="en-US" sz="3200" b="1" dirty="0">
+              <a:rPr lang="en-US" sz="2800" b="1" dirty="0">
                 <a:solidFill>
                   <a:srgbClr val="FFFFFF"/>
                 </a:solidFill>
@@ -1705,7 +1794,7 @@
               </a:rPr>
               <a:t>Normalisation 1NF 2NF 3NF</a:t>
             </a:r>
-            <a:endParaRPr lang="en-US" sz="3200" dirty="0"/>
+            <a:endParaRPr lang="en-US" sz="2800" dirty="0"/>
           </a:p>
         </p:txBody>
       </p:sp>
@@ -1734,7 +1823,7 @@
               <a:buNone/>
             </a:pPr>
             <a:r>
-              <a:rPr lang="en-US" sz="1500" dirty="0">
+              <a:rPr lang="en-US" sz="1400" dirty="0">
                 <a:solidFill>
                   <a:srgbClr val="CCCCCC"/>
                 </a:solidFill>
@@ -1742,9 +1831,9 @@
                 <a:ea typeface="Calibri" pitchFamily="34" charset="-122"/>
                 <a:cs typeface="Calibri" pitchFamily="34" charset="-120"/>
               </a:rPr>
-              <a:t>Anomalies · Formes normales · Dénormalisation</a:t>
-            </a:r>
-            <a:endParaRPr lang="en-US" sz="1500" dirty="0"/>
+              <a:t>Anomalies, formes normales, atomicite 1NF vs ACID, denormalisation</a:t>
+            </a:r>
+            <a:endParaRPr lang="en-US" sz="1400" dirty="0"/>
           </a:p>
         </p:txBody>
       </p:sp>
@@ -1787,16 +1876,48 @@
           </a:p>
         </p:txBody>
       </p:sp>
-      <p:sp>
-        <p:nvSpPr>
-          <p:cNvPr id="8" name="Text 5"/>
-          <p:cNvSpPr/>
-          <p:nvPr/>
-        </p:nvSpPr>
-        <p:spPr>
-          <a:xfrm>
-            <a:off x="457200" y="4434840"/>
-            <a:ext cx="8229600" cy="274320"/>
+    </p:spTree>
+  </p:cSld>
+  <p:clrMapOvr>
+    <a:masterClrMapping/>
+  </p:clrMapOvr>
+</p:sld>
+</file>
+
+<file path=ppt/slides/slide10.xml><?xml version="1.0" encoding="utf-8"?>
+<p:sld xmlns:a="http://schemas.openxmlformats.org/drawingml/2006/main" xmlns:r="http://schemas.openxmlformats.org/officeDocument/2006/relationships" xmlns:p="http://schemas.openxmlformats.org/presentationml/2006/main">
+  <p:cSld name="Slide 10">
+    <p:bg>
+      <p:bgPr>
+        <a:solidFill>
+          <a:srgbClr val="F5F7FA"/>
+        </a:solidFill>
+      </p:bgPr>
+    </p:bg>
+    <p:spTree>
+      <p:nvGrpSpPr>
+        <p:cNvPr id="1" name=""/>
+        <p:cNvGrpSpPr/>
+        <p:nvPr/>
+      </p:nvGrpSpPr>
+      <p:grpSpPr>
+        <a:xfrm>
+          <a:off x="0" y="0"/>
+          <a:ext cx="0" cy="0"/>
+          <a:chOff x="0" y="0"/>
+          <a:chExt cx="0" cy="0"/>
+        </a:xfrm>
+      </p:grpSpPr>
+      <p:sp>
+        <p:nvSpPr>
+          <p:cNvPr id="2" name="Text 0"/>
+          <p:cNvSpPr/>
+          <p:nvPr/>
+        </p:nvSpPr>
+        <p:spPr>
+          <a:xfrm>
+            <a:off x="457200" y="137160"/>
+            <a:ext cx="5486400" cy="365760"/>
           </a:xfrm>
           <a:prstGeom prst="rect">
             <a:avLst/>
@@ -1808,21 +1929,847 @@
           <a:bodyPr wrap="square" lIns="0" tIns="0" rIns="0" bIns="0" rtlCol="0" anchor="ctr"/>
           <a:lstStyle/>
           <a:p>
-            <a:pPr algn="ctr" indent="0" marL="0">
+            <a:pPr indent="0" marL="0">
               <a:buNone/>
             </a:pPr>
             <a:r>
-              <a:rPr lang="en-US" sz="1000" dirty="0">
+              <a:rPr lang="en-US" sz="1600" b="1" dirty="0">
                 <a:solidFill>
-                  <a:srgbClr val="887799"/>
+                  <a:srgbClr val="1B5E20"/>
+                </a:solidFill>
+                <a:latin typeface="Trebuchet MS" pitchFamily="34" charset="0"/>
+                <a:ea typeface="Trebuchet MS" pitchFamily="34" charset="-122"/>
+                <a:cs typeface="Trebuchet MS" pitchFamily="34" charset="-120"/>
+              </a:rPr>
+              <a:t>Memo Module 7</a:t>
+            </a:r>
+            <a:endParaRPr lang="en-US" sz="1600" dirty="0"/>
+          </a:p>
+        </p:txBody>
+      </p:sp>
+      <p:sp>
+        <p:nvSpPr>
+          <p:cNvPr id="3" name="Shape 1"/>
+          <p:cNvSpPr/>
+          <p:nvPr/>
+        </p:nvSpPr>
+        <p:spPr>
+          <a:xfrm>
+            <a:off x="457200" y="594360"/>
+            <a:ext cx="2286000" cy="411480"/>
+          </a:xfrm>
+          <a:prstGeom prst="rect">
+            <a:avLst/>
+          </a:prstGeom>
+          <a:solidFill>
+            <a:srgbClr val="E8F5E9"/>
+          </a:solidFill>
+          <a:ln/>
+        </p:spPr>
+      </p:sp>
+      <p:sp>
+        <p:nvSpPr>
+          <p:cNvPr id="4" name="Text 2"/>
+          <p:cNvSpPr/>
+          <p:nvPr/>
+        </p:nvSpPr>
+        <p:spPr>
+          <a:xfrm>
+            <a:off x="548640" y="594360"/>
+            <a:ext cx="2103120" cy="411480"/>
+          </a:xfrm>
+          <a:prstGeom prst="rect">
+            <a:avLst/>
+          </a:prstGeom>
+          <a:noFill/>
+          <a:ln/>
+        </p:spPr>
+        <p:txBody>
+          <a:bodyPr wrap="square" lIns="0" tIns="0" rIns="0" bIns="0" rtlCol="0" anchor="ctr"/>
+          <a:lstStyle/>
+          <a:p>
+            <a:pPr indent="0" marL="0">
+              <a:buNone/>
+            </a:pPr>
+            <a:r>
+              <a:rPr lang="en-US" sz="900" b="1" dirty="0">
+                <a:solidFill>
+                  <a:srgbClr val="1B5E20"/>
+                </a:solidFill>
+                <a:latin typeface="Trebuchet MS" pitchFamily="34" charset="0"/>
+                <a:ea typeface="Trebuchet MS" pitchFamily="34" charset="-122"/>
+                <a:cs typeface="Trebuchet MS" pitchFamily="34" charset="-120"/>
+              </a:rPr>
+              <a:t>1NF</a:t>
+            </a:r>
+            <a:endParaRPr lang="en-US" sz="900" dirty="0"/>
+          </a:p>
+        </p:txBody>
+      </p:sp>
+      <p:sp>
+        <p:nvSpPr>
+          <p:cNvPr id="5" name="Shape 3"/>
+          <p:cNvSpPr/>
+          <p:nvPr/>
+        </p:nvSpPr>
+        <p:spPr>
+          <a:xfrm>
+            <a:off x="2743200" y="594360"/>
+            <a:ext cx="5943600" cy="411480"/>
+          </a:xfrm>
+          <a:prstGeom prst="rect">
+            <a:avLst/>
+          </a:prstGeom>
+          <a:solidFill>
+            <a:srgbClr val="E8F5E9"/>
+          </a:solidFill>
+          <a:ln/>
+        </p:spPr>
+      </p:sp>
+      <p:sp>
+        <p:nvSpPr>
+          <p:cNvPr id="6" name="Text 4"/>
+          <p:cNvSpPr/>
+          <p:nvPr/>
+        </p:nvSpPr>
+        <p:spPr>
+          <a:xfrm>
+            <a:off x="2834640" y="594360"/>
+            <a:ext cx="5760720" cy="411480"/>
+          </a:xfrm>
+          <a:prstGeom prst="rect">
+            <a:avLst/>
+          </a:prstGeom>
+          <a:noFill/>
+          <a:ln/>
+        </p:spPr>
+        <p:txBody>
+          <a:bodyPr wrap="square" lIns="0" tIns="0" rIns="0" bIns="0" rtlCol="0" anchor="ctr"/>
+          <a:lstStyle/>
+          <a:p>
+            <a:pPr indent="0" marL="0">
+              <a:buNone/>
+            </a:pPr>
+            <a:r>
+              <a:rPr lang="en-US" sz="900" dirty="0">
+                <a:solidFill>
+                  <a:srgbClr val="333333"/>
                 </a:solidFill>
                 <a:latin typeface="Calibri" pitchFamily="34" charset="0"/>
                 <a:ea typeface="Calibri" pitchFamily="34" charset="-122"/>
                 <a:cs typeface="Calibri" pitchFamily="34" charset="-120"/>
               </a:rPr>
-              <a:t>🎵 Unit 4 — Database Design &amp; Development</a:t>
-            </a:r>
-            <a:endParaRPr lang="en-US" sz="1000" dirty="0"/>
+              <a:t>Valeurs atomiques : 1 cellule = 1 valeur (≠ ACID !)</a:t>
+            </a:r>
+            <a:endParaRPr lang="en-US" sz="900" dirty="0"/>
+          </a:p>
+        </p:txBody>
+      </p:sp>
+      <p:sp>
+        <p:nvSpPr>
+          <p:cNvPr id="7" name="Shape 5"/>
+          <p:cNvSpPr/>
+          <p:nvPr/>
+        </p:nvSpPr>
+        <p:spPr>
+          <a:xfrm>
+            <a:off x="457200" y="1033272"/>
+            <a:ext cx="2286000" cy="411480"/>
+          </a:xfrm>
+          <a:prstGeom prst="rect">
+            <a:avLst/>
+          </a:prstGeom>
+          <a:solidFill>
+            <a:srgbClr val="F0F0F0"/>
+          </a:solidFill>
+          <a:ln/>
+        </p:spPr>
+      </p:sp>
+      <p:sp>
+        <p:nvSpPr>
+          <p:cNvPr id="8" name="Text 6"/>
+          <p:cNvSpPr/>
+          <p:nvPr/>
+        </p:nvSpPr>
+        <p:spPr>
+          <a:xfrm>
+            <a:off x="548640" y="1033272"/>
+            <a:ext cx="2103120" cy="411480"/>
+          </a:xfrm>
+          <a:prstGeom prst="rect">
+            <a:avLst/>
+          </a:prstGeom>
+          <a:noFill/>
+          <a:ln/>
+        </p:spPr>
+        <p:txBody>
+          <a:bodyPr wrap="square" lIns="0" tIns="0" rIns="0" bIns="0" rtlCol="0" anchor="ctr"/>
+          <a:lstStyle/>
+          <a:p>
+            <a:pPr indent="0" marL="0">
+              <a:buNone/>
+            </a:pPr>
+            <a:r>
+              <a:rPr lang="en-US" sz="900" b="1" dirty="0">
+                <a:solidFill>
+                  <a:srgbClr val="1B5E20"/>
+                </a:solidFill>
+                <a:latin typeface="Trebuchet MS" pitchFamily="34" charset="0"/>
+                <a:ea typeface="Trebuchet MS" pitchFamily="34" charset="-122"/>
+                <a:cs typeface="Trebuchet MS" pitchFamily="34" charset="-120"/>
+              </a:rPr>
+              <a:t>2NF</a:t>
+            </a:r>
+            <a:endParaRPr lang="en-US" sz="900" dirty="0"/>
+          </a:p>
+        </p:txBody>
+      </p:sp>
+      <p:sp>
+        <p:nvSpPr>
+          <p:cNvPr id="9" name="Shape 7"/>
+          <p:cNvSpPr/>
+          <p:nvPr/>
+        </p:nvSpPr>
+        <p:spPr>
+          <a:xfrm>
+            <a:off x="2743200" y="1033272"/>
+            <a:ext cx="5943600" cy="411480"/>
+          </a:xfrm>
+          <a:prstGeom prst="rect">
+            <a:avLst/>
+          </a:prstGeom>
+          <a:solidFill>
+            <a:srgbClr val="F0F0F0"/>
+          </a:solidFill>
+          <a:ln/>
+        </p:spPr>
+      </p:sp>
+      <p:sp>
+        <p:nvSpPr>
+          <p:cNvPr id="10" name="Text 8"/>
+          <p:cNvSpPr/>
+          <p:nvPr/>
+        </p:nvSpPr>
+        <p:spPr>
+          <a:xfrm>
+            <a:off x="2834640" y="1033272"/>
+            <a:ext cx="5760720" cy="411480"/>
+          </a:xfrm>
+          <a:prstGeom prst="rect">
+            <a:avLst/>
+          </a:prstGeom>
+          <a:noFill/>
+          <a:ln/>
+        </p:spPr>
+        <p:txBody>
+          <a:bodyPr wrap="square" lIns="0" tIns="0" rIns="0" bIns="0" rtlCol="0" anchor="ctr"/>
+          <a:lstStyle/>
+          <a:p>
+            <a:pPr indent="0" marL="0">
+              <a:buNone/>
+            </a:pPr>
+            <a:r>
+              <a:rPr lang="en-US" sz="900" dirty="0">
+                <a:solidFill>
+                  <a:srgbClr val="333333"/>
+                </a:solidFill>
+                <a:latin typeface="Calibri" pitchFamily="34" charset="0"/>
+                <a:ea typeface="Calibri" pitchFamily="34" charset="-122"/>
+                <a:cs typeface="Calibri" pitchFamily="34" charset="-120"/>
+              </a:rPr>
+              <a:t>Dependance totale a la PK composee (PK simple → auto OK)</a:t>
+            </a:r>
+            <a:endParaRPr lang="en-US" sz="900" dirty="0"/>
+          </a:p>
+        </p:txBody>
+      </p:sp>
+      <p:sp>
+        <p:nvSpPr>
+          <p:cNvPr id="11" name="Shape 9"/>
+          <p:cNvSpPr/>
+          <p:nvPr/>
+        </p:nvSpPr>
+        <p:spPr>
+          <a:xfrm>
+            <a:off x="457200" y="1472184"/>
+            <a:ext cx="2286000" cy="411480"/>
+          </a:xfrm>
+          <a:prstGeom prst="rect">
+            <a:avLst/>
+          </a:prstGeom>
+          <a:solidFill>
+            <a:srgbClr val="E8F5E9"/>
+          </a:solidFill>
+          <a:ln/>
+        </p:spPr>
+      </p:sp>
+      <p:sp>
+        <p:nvSpPr>
+          <p:cNvPr id="12" name="Text 10"/>
+          <p:cNvSpPr/>
+          <p:nvPr/>
+        </p:nvSpPr>
+        <p:spPr>
+          <a:xfrm>
+            <a:off x="548640" y="1472184"/>
+            <a:ext cx="2103120" cy="411480"/>
+          </a:xfrm>
+          <a:prstGeom prst="rect">
+            <a:avLst/>
+          </a:prstGeom>
+          <a:noFill/>
+          <a:ln/>
+        </p:spPr>
+        <p:txBody>
+          <a:bodyPr wrap="square" lIns="0" tIns="0" rIns="0" bIns="0" rtlCol="0" anchor="ctr"/>
+          <a:lstStyle/>
+          <a:p>
+            <a:pPr indent="0" marL="0">
+              <a:buNone/>
+            </a:pPr>
+            <a:r>
+              <a:rPr lang="en-US" sz="900" b="1" dirty="0">
+                <a:solidFill>
+                  <a:srgbClr val="1B5E20"/>
+                </a:solidFill>
+                <a:latin typeface="Trebuchet MS" pitchFamily="34" charset="0"/>
+                <a:ea typeface="Trebuchet MS" pitchFamily="34" charset="-122"/>
+                <a:cs typeface="Trebuchet MS" pitchFamily="34" charset="-120"/>
+              </a:rPr>
+              <a:t>3NF</a:t>
+            </a:r>
+            <a:endParaRPr lang="en-US" sz="900" dirty="0"/>
+          </a:p>
+        </p:txBody>
+      </p:sp>
+      <p:sp>
+        <p:nvSpPr>
+          <p:cNvPr id="13" name="Shape 11"/>
+          <p:cNvSpPr/>
+          <p:nvPr/>
+        </p:nvSpPr>
+        <p:spPr>
+          <a:xfrm>
+            <a:off x="2743200" y="1472184"/>
+            <a:ext cx="5943600" cy="411480"/>
+          </a:xfrm>
+          <a:prstGeom prst="rect">
+            <a:avLst/>
+          </a:prstGeom>
+          <a:solidFill>
+            <a:srgbClr val="E8F5E9"/>
+          </a:solidFill>
+          <a:ln/>
+        </p:spPr>
+      </p:sp>
+      <p:sp>
+        <p:nvSpPr>
+          <p:cNvPr id="14" name="Text 12"/>
+          <p:cNvSpPr/>
+          <p:nvPr/>
+        </p:nvSpPr>
+        <p:spPr>
+          <a:xfrm>
+            <a:off x="2834640" y="1472184"/>
+            <a:ext cx="5760720" cy="411480"/>
+          </a:xfrm>
+          <a:prstGeom prst="rect">
+            <a:avLst/>
+          </a:prstGeom>
+          <a:noFill/>
+          <a:ln/>
+        </p:spPr>
+        <p:txBody>
+          <a:bodyPr wrap="square" lIns="0" tIns="0" rIns="0" bIns="0" rtlCol="0" anchor="ctr"/>
+          <a:lstStyle/>
+          <a:p>
+            <a:pPr indent="0" marL="0">
+              <a:buNone/>
+            </a:pPr>
+            <a:r>
+              <a:rPr lang="en-US" sz="900" dirty="0">
+                <a:solidFill>
+                  <a:srgbClr val="333333"/>
+                </a:solidFill>
+                <a:latin typeface="Calibri" pitchFamily="34" charset="0"/>
+                <a:ea typeface="Calibri" pitchFamily="34" charset="-122"/>
+                <a:cs typeface="Calibri" pitchFamily="34" charset="-120"/>
+              </a:rPr>
+              <a:t>Pas de DF transitive : cle, toute la cle, rien que la cle</a:t>
+            </a:r>
+            <a:endParaRPr lang="en-US" sz="900" dirty="0"/>
+          </a:p>
+        </p:txBody>
+      </p:sp>
+      <p:sp>
+        <p:nvSpPr>
+          <p:cNvPr id="15" name="Shape 13"/>
+          <p:cNvSpPr/>
+          <p:nvPr/>
+        </p:nvSpPr>
+        <p:spPr>
+          <a:xfrm>
+            <a:off x="457200" y="1911096"/>
+            <a:ext cx="2286000" cy="411480"/>
+          </a:xfrm>
+          <a:prstGeom prst="rect">
+            <a:avLst/>
+          </a:prstGeom>
+          <a:solidFill>
+            <a:srgbClr val="F0F0F0"/>
+          </a:solidFill>
+          <a:ln/>
+        </p:spPr>
+      </p:sp>
+      <p:sp>
+        <p:nvSpPr>
+          <p:cNvPr id="16" name="Text 14"/>
+          <p:cNvSpPr/>
+          <p:nvPr/>
+        </p:nvSpPr>
+        <p:spPr>
+          <a:xfrm>
+            <a:off x="548640" y="1911096"/>
+            <a:ext cx="2103120" cy="411480"/>
+          </a:xfrm>
+          <a:prstGeom prst="rect">
+            <a:avLst/>
+          </a:prstGeom>
+          <a:noFill/>
+          <a:ln/>
+        </p:spPr>
+        <p:txBody>
+          <a:bodyPr wrap="square" lIns="0" tIns="0" rIns="0" bIns="0" rtlCol="0" anchor="ctr"/>
+          <a:lstStyle/>
+          <a:p>
+            <a:pPr indent="0" marL="0">
+              <a:buNone/>
+            </a:pPr>
+            <a:r>
+              <a:rPr lang="en-US" sz="900" b="1" dirty="0">
+                <a:solidFill>
+                  <a:srgbClr val="1B5E20"/>
+                </a:solidFill>
+                <a:latin typeface="Trebuchet MS" pitchFamily="34" charset="0"/>
+                <a:ea typeface="Trebuchet MS" pitchFamily="34" charset="-122"/>
+                <a:cs typeface="Trebuchet MS" pitchFamily="34" charset="-120"/>
+              </a:rPr>
+              <a:t>Atomicite 1NF</a:t>
+            </a:r>
+            <a:endParaRPr lang="en-US" sz="900" dirty="0"/>
+          </a:p>
+        </p:txBody>
+      </p:sp>
+      <p:sp>
+        <p:nvSpPr>
+          <p:cNvPr id="17" name="Shape 15"/>
+          <p:cNvSpPr/>
+          <p:nvPr/>
+        </p:nvSpPr>
+        <p:spPr>
+          <a:xfrm>
+            <a:off x="2743200" y="1911096"/>
+            <a:ext cx="5943600" cy="411480"/>
+          </a:xfrm>
+          <a:prstGeom prst="rect">
+            <a:avLst/>
+          </a:prstGeom>
+          <a:solidFill>
+            <a:srgbClr val="F0F0F0"/>
+          </a:solidFill>
+          <a:ln/>
+        </p:spPr>
+      </p:sp>
+      <p:sp>
+        <p:nvSpPr>
+          <p:cNvPr id="18" name="Text 16"/>
+          <p:cNvSpPr/>
+          <p:nvPr/>
+        </p:nvSpPr>
+        <p:spPr>
+          <a:xfrm>
+            <a:off x="2834640" y="1911096"/>
+            <a:ext cx="5760720" cy="411480"/>
+          </a:xfrm>
+          <a:prstGeom prst="rect">
+            <a:avLst/>
+          </a:prstGeom>
+          <a:noFill/>
+          <a:ln/>
+        </p:spPr>
+        <p:txBody>
+          <a:bodyPr wrap="square" lIns="0" tIns="0" rIns="0" bIns="0" rtlCol="0" anchor="ctr"/>
+          <a:lstStyle/>
+          <a:p>
+            <a:pPr indent="0" marL="0">
+              <a:buNone/>
+            </a:pPr>
+            <a:r>
+              <a:rPr lang="en-US" sz="900" dirty="0">
+                <a:solidFill>
+                  <a:srgbClr val="333333"/>
+                </a:solidFill>
+                <a:latin typeface="Calibri" pitchFamily="34" charset="0"/>
+                <a:ea typeface="Calibri" pitchFamily="34" charset="-122"/>
+                <a:cs typeface="Calibri" pitchFamily="34" charset="-120"/>
+              </a:rPr>
+              <a:t>Valeur INDIVISIBLE dans une cellule</a:t>
+            </a:r>
+            <a:endParaRPr lang="en-US" sz="900" dirty="0"/>
+          </a:p>
+        </p:txBody>
+      </p:sp>
+      <p:sp>
+        <p:nvSpPr>
+          <p:cNvPr id="19" name="Shape 17"/>
+          <p:cNvSpPr/>
+          <p:nvPr/>
+        </p:nvSpPr>
+        <p:spPr>
+          <a:xfrm>
+            <a:off x="457200" y="2350008"/>
+            <a:ext cx="2286000" cy="411480"/>
+          </a:xfrm>
+          <a:prstGeom prst="rect">
+            <a:avLst/>
+          </a:prstGeom>
+          <a:solidFill>
+            <a:srgbClr val="E8F5E9"/>
+          </a:solidFill>
+          <a:ln/>
+        </p:spPr>
+      </p:sp>
+      <p:sp>
+        <p:nvSpPr>
+          <p:cNvPr id="20" name="Text 18"/>
+          <p:cNvSpPr/>
+          <p:nvPr/>
+        </p:nvSpPr>
+        <p:spPr>
+          <a:xfrm>
+            <a:off x="548640" y="2350008"/>
+            <a:ext cx="2103120" cy="411480"/>
+          </a:xfrm>
+          <a:prstGeom prst="rect">
+            <a:avLst/>
+          </a:prstGeom>
+          <a:noFill/>
+          <a:ln/>
+        </p:spPr>
+        <p:txBody>
+          <a:bodyPr wrap="square" lIns="0" tIns="0" rIns="0" bIns="0" rtlCol="0" anchor="ctr"/>
+          <a:lstStyle/>
+          <a:p>
+            <a:pPr indent="0" marL="0">
+              <a:buNone/>
+            </a:pPr>
+            <a:r>
+              <a:rPr lang="en-US" sz="900" b="1" dirty="0">
+                <a:solidFill>
+                  <a:srgbClr val="1B5E20"/>
+                </a:solidFill>
+                <a:latin typeface="Trebuchet MS" pitchFamily="34" charset="0"/>
+                <a:ea typeface="Trebuchet MS" pitchFamily="34" charset="-122"/>
+                <a:cs typeface="Trebuchet MS" pitchFamily="34" charset="-120"/>
+              </a:rPr>
+              <a:t>Atomicite ACID</a:t>
+            </a:r>
+            <a:endParaRPr lang="en-US" sz="900" dirty="0"/>
+          </a:p>
+        </p:txBody>
+      </p:sp>
+      <p:sp>
+        <p:nvSpPr>
+          <p:cNvPr id="21" name="Shape 19"/>
+          <p:cNvSpPr/>
+          <p:nvPr/>
+        </p:nvSpPr>
+        <p:spPr>
+          <a:xfrm>
+            <a:off x="2743200" y="2350008"/>
+            <a:ext cx="5943600" cy="411480"/>
+          </a:xfrm>
+          <a:prstGeom prst="rect">
+            <a:avLst/>
+          </a:prstGeom>
+          <a:solidFill>
+            <a:srgbClr val="E8F5E9"/>
+          </a:solidFill>
+          <a:ln/>
+        </p:spPr>
+      </p:sp>
+      <p:sp>
+        <p:nvSpPr>
+          <p:cNvPr id="22" name="Text 20"/>
+          <p:cNvSpPr/>
+          <p:nvPr/>
+        </p:nvSpPr>
+        <p:spPr>
+          <a:xfrm>
+            <a:off x="2834640" y="2350008"/>
+            <a:ext cx="5760720" cy="411480"/>
+          </a:xfrm>
+          <a:prstGeom prst="rect">
+            <a:avLst/>
+          </a:prstGeom>
+          <a:noFill/>
+          <a:ln/>
+        </p:spPr>
+        <p:txBody>
+          <a:bodyPr wrap="square" lIns="0" tIns="0" rIns="0" bIns="0" rtlCol="0" anchor="ctr"/>
+          <a:lstStyle/>
+          <a:p>
+            <a:pPr indent="0" marL="0">
+              <a:buNone/>
+            </a:pPr>
+            <a:r>
+              <a:rPr lang="en-US" sz="900" dirty="0">
+                <a:solidFill>
+                  <a:srgbClr val="333333"/>
+                </a:solidFill>
+                <a:latin typeface="Calibri" pitchFamily="34" charset="0"/>
+                <a:ea typeface="Calibri" pitchFamily="34" charset="-122"/>
+                <a:cs typeface="Calibri" pitchFamily="34" charset="-120"/>
+              </a:rPr>
+              <a:t>Transaction TOUT-OU-RIEN (BEGIN/COMMIT/ROLLBACK)</a:t>
+            </a:r>
+            <a:endParaRPr lang="en-US" sz="900" dirty="0"/>
+          </a:p>
+        </p:txBody>
+      </p:sp>
+      <p:sp>
+        <p:nvSpPr>
+          <p:cNvPr id="23" name="Shape 21"/>
+          <p:cNvSpPr/>
+          <p:nvPr/>
+        </p:nvSpPr>
+        <p:spPr>
+          <a:xfrm>
+            <a:off x="457200" y="2788920"/>
+            <a:ext cx="2286000" cy="411480"/>
+          </a:xfrm>
+          <a:prstGeom prst="rect">
+            <a:avLst/>
+          </a:prstGeom>
+          <a:solidFill>
+            <a:srgbClr val="F0F0F0"/>
+          </a:solidFill>
+          <a:ln/>
+        </p:spPr>
+      </p:sp>
+      <p:sp>
+        <p:nvSpPr>
+          <p:cNvPr id="24" name="Text 22"/>
+          <p:cNvSpPr/>
+          <p:nvPr/>
+        </p:nvSpPr>
+        <p:spPr>
+          <a:xfrm>
+            <a:off x="548640" y="2788920"/>
+            <a:ext cx="2103120" cy="411480"/>
+          </a:xfrm>
+          <a:prstGeom prst="rect">
+            <a:avLst/>
+          </a:prstGeom>
+          <a:noFill/>
+          <a:ln/>
+        </p:spPr>
+        <p:txBody>
+          <a:bodyPr wrap="square" lIns="0" tIns="0" rIns="0" bIns="0" rtlCol="0" anchor="ctr"/>
+          <a:lstStyle/>
+          <a:p>
+            <a:pPr indent="0" marL="0">
+              <a:buNone/>
+            </a:pPr>
+            <a:r>
+              <a:rPr lang="en-US" sz="900" b="1" dirty="0">
+                <a:solidFill>
+                  <a:srgbClr val="1B5E20"/>
+                </a:solidFill>
+                <a:latin typeface="Trebuchet MS" pitchFamily="34" charset="0"/>
+                <a:ea typeface="Trebuchet MS" pitchFamily="34" charset="-122"/>
+                <a:cs typeface="Trebuchet MS" pitchFamily="34" charset="-120"/>
+              </a:rPr>
+              <a:t>Anomalies</a:t>
+            </a:r>
+            <a:endParaRPr lang="en-US" sz="900" dirty="0"/>
+          </a:p>
+        </p:txBody>
+      </p:sp>
+      <p:sp>
+        <p:nvSpPr>
+          <p:cNvPr id="25" name="Shape 23"/>
+          <p:cNvSpPr/>
+          <p:nvPr/>
+        </p:nvSpPr>
+        <p:spPr>
+          <a:xfrm>
+            <a:off x="2743200" y="2788920"/>
+            <a:ext cx="5943600" cy="411480"/>
+          </a:xfrm>
+          <a:prstGeom prst="rect">
+            <a:avLst/>
+          </a:prstGeom>
+          <a:solidFill>
+            <a:srgbClr val="F0F0F0"/>
+          </a:solidFill>
+          <a:ln/>
+        </p:spPr>
+      </p:sp>
+      <p:sp>
+        <p:nvSpPr>
+          <p:cNvPr id="26" name="Text 24"/>
+          <p:cNvSpPr/>
+          <p:nvPr/>
+        </p:nvSpPr>
+        <p:spPr>
+          <a:xfrm>
+            <a:off x="2834640" y="2788920"/>
+            <a:ext cx="5760720" cy="411480"/>
+          </a:xfrm>
+          <a:prstGeom prst="rect">
+            <a:avLst/>
+          </a:prstGeom>
+          <a:noFill/>
+          <a:ln/>
+        </p:spPr>
+        <p:txBody>
+          <a:bodyPr wrap="square" lIns="0" tIns="0" rIns="0" bIns="0" rtlCol="0" anchor="ctr"/>
+          <a:lstStyle/>
+          <a:p>
+            <a:pPr indent="0" marL="0">
+              <a:buNone/>
+            </a:pPr>
+            <a:r>
+              <a:rPr lang="en-US" sz="900" dirty="0">
+                <a:solidFill>
+                  <a:srgbClr val="333333"/>
+                </a:solidFill>
+                <a:latin typeface="Calibri" pitchFamily="34" charset="0"/>
+                <a:ea typeface="Calibri" pitchFamily="34" charset="-122"/>
+                <a:cs typeface="Calibri" pitchFamily="34" charset="-120"/>
+              </a:rPr>
+              <a:t>Insertion, mise a jour, suppression</a:t>
+            </a:r>
+            <a:endParaRPr lang="en-US" sz="900" dirty="0"/>
+          </a:p>
+        </p:txBody>
+      </p:sp>
+      <p:sp>
+        <p:nvSpPr>
+          <p:cNvPr id="27" name="Shape 25"/>
+          <p:cNvSpPr/>
+          <p:nvPr/>
+        </p:nvSpPr>
+        <p:spPr>
+          <a:xfrm>
+            <a:off x="457200" y="3227832"/>
+            <a:ext cx="2286000" cy="411480"/>
+          </a:xfrm>
+          <a:prstGeom prst="rect">
+            <a:avLst/>
+          </a:prstGeom>
+          <a:solidFill>
+            <a:srgbClr val="E8F5E9"/>
+          </a:solidFill>
+          <a:ln/>
+        </p:spPr>
+      </p:sp>
+      <p:sp>
+        <p:nvSpPr>
+          <p:cNvPr id="28" name="Text 26"/>
+          <p:cNvSpPr/>
+          <p:nvPr/>
+        </p:nvSpPr>
+        <p:spPr>
+          <a:xfrm>
+            <a:off x="548640" y="3227832"/>
+            <a:ext cx="2103120" cy="411480"/>
+          </a:xfrm>
+          <a:prstGeom prst="rect">
+            <a:avLst/>
+          </a:prstGeom>
+          <a:noFill/>
+          <a:ln/>
+        </p:spPr>
+        <p:txBody>
+          <a:bodyPr wrap="square" lIns="0" tIns="0" rIns="0" bIns="0" rtlCol="0" anchor="ctr"/>
+          <a:lstStyle/>
+          <a:p>
+            <a:pPr indent="0" marL="0">
+              <a:buNone/>
+            </a:pPr>
+            <a:r>
+              <a:rPr lang="en-US" sz="900" b="1" dirty="0">
+                <a:solidFill>
+                  <a:srgbClr val="1B5E20"/>
+                </a:solidFill>
+                <a:latin typeface="Trebuchet MS" pitchFamily="34" charset="0"/>
+                <a:ea typeface="Trebuchet MS" pitchFamily="34" charset="-122"/>
+                <a:cs typeface="Trebuchet MS" pitchFamily="34" charset="-120"/>
+              </a:rPr>
+              <a:t>Denormalisation</a:t>
+            </a:r>
+            <a:endParaRPr lang="en-US" sz="900" dirty="0"/>
+          </a:p>
+        </p:txBody>
+      </p:sp>
+      <p:sp>
+        <p:nvSpPr>
+          <p:cNvPr id="29" name="Shape 27"/>
+          <p:cNvSpPr/>
+          <p:nvPr/>
+        </p:nvSpPr>
+        <p:spPr>
+          <a:xfrm>
+            <a:off x="2743200" y="3227832"/>
+            <a:ext cx="5943600" cy="411480"/>
+          </a:xfrm>
+          <a:prstGeom prst="rect">
+            <a:avLst/>
+          </a:prstGeom>
+          <a:solidFill>
+            <a:srgbClr val="E8F5E9"/>
+          </a:solidFill>
+          <a:ln/>
+        </p:spPr>
+      </p:sp>
+      <p:sp>
+        <p:nvSpPr>
+          <p:cNvPr id="30" name="Text 28"/>
+          <p:cNvSpPr/>
+          <p:nvPr/>
+        </p:nvSpPr>
+        <p:spPr>
+          <a:xfrm>
+            <a:off x="2834640" y="3227832"/>
+            <a:ext cx="5760720" cy="411480"/>
+          </a:xfrm>
+          <a:prstGeom prst="rect">
+            <a:avLst/>
+          </a:prstGeom>
+          <a:noFill/>
+          <a:ln/>
+        </p:spPr>
+        <p:txBody>
+          <a:bodyPr wrap="square" lIns="0" tIns="0" rIns="0" bIns="0" rtlCol="0" anchor="ctr"/>
+          <a:lstStyle/>
+          <a:p>
+            <a:pPr indent="0" marL="0">
+              <a:buNone/>
+            </a:pPr>
+            <a:r>
+              <a:rPr lang="en-US" sz="900" dirty="0">
+                <a:solidFill>
+                  <a:srgbClr val="333333"/>
+                </a:solidFill>
+                <a:latin typeface="Calibri" pitchFamily="34" charset="0"/>
+                <a:ea typeface="Calibri" pitchFamily="34" charset="-122"/>
+                <a:cs typeface="Calibri" pitchFamily="34" charset="-120"/>
+              </a:rPr>
+              <a:t>Violation volontaire pour performance (choix documente)</a:t>
+            </a:r>
+            <a:endParaRPr lang="en-US" sz="900" dirty="0"/>
           </a:p>
         </p:txBody>
       </p:sp>
@@ -1887,7 +2834,7 @@
         <p:spPr>
           <a:xfrm>
             <a:off x="457200" y="182880"/>
-            <a:ext cx="8229600" cy="594360"/>
+            <a:ext cx="8229600" cy="502920"/>
           </a:xfrm>
           <a:prstGeom prst="rect">
             <a:avLst/>
@@ -1903,7 +2850,7 @@
               <a:buNone/>
             </a:pPr>
             <a:r>
-              <a:rPr lang="en-US" sz="2400" b="1" dirty="0">
+              <a:rPr lang="en-US" sz="2100" b="1" dirty="0">
                 <a:solidFill>
                   <a:srgbClr val="1B5E20"/>
                 </a:solidFill>
@@ -1913,7 +2860,7 @@
               </a:rPr>
               <a:t>Pourquoi normaliser ?</a:t>
             </a:r>
-            <a:endParaRPr lang="en-US" sz="2400" dirty="0"/>
+            <a:endParaRPr lang="en-US" sz="2100" dirty="0"/>
           </a:p>
         </p:txBody>
       </p:sp>
@@ -1925,8 +2872,8 @@
         </p:nvSpPr>
         <p:spPr>
           <a:xfrm>
-            <a:off x="457200" y="914400"/>
-            <a:ext cx="8229600" cy="566928"/>
+            <a:off x="457200" y="777240"/>
+            <a:ext cx="8229600" cy="448056"/>
           </a:xfrm>
           <a:prstGeom prst="rect">
             <a:avLst/>
@@ -1935,13 +2882,6 @@
             <a:srgbClr val="FFFFFF"/>
           </a:solidFill>
           <a:ln/>
-          <a:effectLst>
-            <a:outerShdw sx="100000" sy="100000" kx="0" ky="0" algn="bl" rotWithShape="0" blurRad="50800" dist="25400" dir="8100000">
-              <a:srgbClr val="000000">
-                <a:alpha val="12000"/>
-              </a:srgbClr>
-            </a:outerShdw>
-          </a:effectLst>
         </p:spPr>
       </p:sp>
       <p:sp>
@@ -1952,8 +2892,8 @@
         </p:nvSpPr>
         <p:spPr>
           <a:xfrm>
-            <a:off x="457200" y="914400"/>
-            <a:ext cx="45720" cy="566928"/>
+            <a:off x="457200" y="777240"/>
+            <a:ext cx="45720" cy="448056"/>
           </a:xfrm>
           <a:prstGeom prst="rect">
             <a:avLst/>
@@ -1972,8 +2912,8 @@
         </p:nvSpPr>
         <p:spPr>
           <a:xfrm>
-            <a:off x="685800" y="914400"/>
-            <a:ext cx="7818120" cy="566928"/>
+            <a:off x="640080" y="777240"/>
+            <a:ext cx="7863840" cy="448056"/>
           </a:xfrm>
           <a:prstGeom prst="rect">
             <a:avLst/>
@@ -1989,7 +2929,7 @@
               <a:buNone/>
             </a:pPr>
             <a:r>
-              <a:rPr lang="en-US" sz="1200" dirty="0">
+              <a:rPr lang="en-US" sz="1100" dirty="0">
                 <a:solidFill>
                   <a:srgbClr val="1A1A2E"/>
                 </a:solidFill>
@@ -1997,9 +2937,9 @@
                 <a:ea typeface="Calibri" pitchFamily="34" charset="-122"/>
                 <a:cs typeface="Calibri" pitchFamily="34" charset="-120"/>
               </a:rPr>
-              <a:t>Anomalie d'INSERTION : impossible d'ajouter un genre sans artiste (si tout est dans une table)</a:t>
-            </a:r>
-            <a:endParaRPr lang="en-US" sz="1200" dirty="0"/>
+              <a:t>Anomalie d'INSERTION : impossible d'ajouter un genre sans artiste</a:t>
+            </a:r>
+            <a:endParaRPr lang="en-US" sz="1100" dirty="0"/>
           </a:p>
         </p:txBody>
       </p:sp>
@@ -2011,8 +2951,8 @@
         </p:nvSpPr>
         <p:spPr>
           <a:xfrm>
-            <a:off x="457200" y="1508760"/>
-            <a:ext cx="8229600" cy="566928"/>
+            <a:off x="457200" y="1252728"/>
+            <a:ext cx="8229600" cy="448056"/>
           </a:xfrm>
           <a:prstGeom prst="rect">
             <a:avLst/>
@@ -2021,13 +2961,6 @@
             <a:srgbClr val="E8F5E9"/>
           </a:solidFill>
           <a:ln/>
-          <a:effectLst>
-            <a:outerShdw sx="100000" sy="100000" kx="0" ky="0" algn="bl" rotWithShape="0" blurRad="50800" dist="25400" dir="8100000">
-              <a:srgbClr val="000000">
-                <a:alpha val="12000"/>
-              </a:srgbClr>
-            </a:outerShdw>
-          </a:effectLst>
         </p:spPr>
       </p:sp>
       <p:sp>
@@ -2038,8 +2971,8 @@
         </p:nvSpPr>
         <p:spPr>
           <a:xfrm>
-            <a:off x="457200" y="1508760"/>
-            <a:ext cx="45720" cy="566928"/>
+            <a:off x="457200" y="1252728"/>
+            <a:ext cx="45720" cy="448056"/>
           </a:xfrm>
           <a:prstGeom prst="rect">
             <a:avLst/>
@@ -2058,8 +2991,8 @@
         </p:nvSpPr>
         <p:spPr>
           <a:xfrm>
-            <a:off x="685800" y="1508760"/>
-            <a:ext cx="7818120" cy="566928"/>
+            <a:off x="640080" y="1252728"/>
+            <a:ext cx="7863840" cy="448056"/>
           </a:xfrm>
           <a:prstGeom prst="rect">
             <a:avLst/>
@@ -2075,7 +3008,7 @@
               <a:buNone/>
             </a:pPr>
             <a:r>
-              <a:rPr lang="en-US" sz="1200" dirty="0">
+              <a:rPr lang="en-US" sz="1100" dirty="0">
                 <a:solidFill>
                   <a:srgbClr val="1A1A2E"/>
                 </a:solidFill>
@@ -2083,9 +3016,9 @@
                 <a:ea typeface="Calibri" pitchFamily="34" charset="-122"/>
                 <a:cs typeface="Calibri" pitchFamily="34" charset="-120"/>
               </a:rPr>
-              <a:t>Anomalie de MISE À JOUR : modifier le nom d'une salle dans 100 sessions</a:t>
-            </a:r>
-            <a:endParaRPr lang="en-US" sz="1200" dirty="0"/>
+              <a:t>Anomalie de MISE A JOUR : modifier le nom d'une salle dans 100 sessions</a:t>
+            </a:r>
+            <a:endParaRPr lang="en-US" sz="1100" dirty="0"/>
           </a:p>
         </p:txBody>
       </p:sp>
@@ -2097,8 +3030,8 @@
         </p:nvSpPr>
         <p:spPr>
           <a:xfrm>
-            <a:off x="457200" y="2103120"/>
-            <a:ext cx="8229600" cy="566928"/>
+            <a:off x="457200" y="1728216"/>
+            <a:ext cx="8229600" cy="448056"/>
           </a:xfrm>
           <a:prstGeom prst="rect">
             <a:avLst/>
@@ -2107,13 +3040,6 @@
             <a:srgbClr val="FFFFFF"/>
           </a:solidFill>
           <a:ln/>
-          <a:effectLst>
-            <a:outerShdw sx="100000" sy="100000" kx="0" ky="0" algn="bl" rotWithShape="0" blurRad="50800" dist="25400" dir="8100000">
-              <a:srgbClr val="000000">
-                <a:alpha val="12000"/>
-              </a:srgbClr>
-            </a:outerShdw>
-          </a:effectLst>
         </p:spPr>
       </p:sp>
       <p:sp>
@@ -2124,8 +3050,8 @@
         </p:nvSpPr>
         <p:spPr>
           <a:xfrm>
-            <a:off x="457200" y="2103120"/>
-            <a:ext cx="45720" cy="566928"/>
+            <a:off x="457200" y="1728216"/>
+            <a:ext cx="45720" cy="448056"/>
           </a:xfrm>
           <a:prstGeom prst="rect">
             <a:avLst/>
@@ -2144,8 +3070,8 @@
         </p:nvSpPr>
         <p:spPr>
           <a:xfrm>
-            <a:off x="685800" y="2103120"/>
-            <a:ext cx="7818120" cy="566928"/>
+            <a:off x="640080" y="1728216"/>
+            <a:ext cx="7863840" cy="448056"/>
           </a:xfrm>
           <a:prstGeom prst="rect">
             <a:avLst/>
@@ -2161,7 +3087,7 @@
               <a:buNone/>
             </a:pPr>
             <a:r>
-              <a:rPr lang="en-US" sz="1200" dirty="0">
+              <a:rPr lang="en-US" sz="1100" dirty="0">
                 <a:solidFill>
                   <a:srgbClr val="1A1A2E"/>
                 </a:solidFill>
@@ -2169,9 +3095,9 @@
                 <a:ea typeface="Calibri" pitchFamily="34" charset="-122"/>
                 <a:cs typeface="Calibri" pitchFamily="34" charset="-120"/>
               </a:rPr>
-              <a:t>Anomalie de SUPPRESSION : supprimer la dernière session d'un artiste supprime aussi l'artiste</a:t>
-            </a:r>
-            <a:endParaRPr lang="en-US" sz="1200" dirty="0"/>
+              <a:t>Anomalie de SUPPRESSION : supprimer la derniere session = perte artiste</a:t>
+            </a:r>
+            <a:endParaRPr lang="en-US" sz="1100" dirty="0"/>
           </a:p>
         </p:txBody>
       </p:sp>
@@ -2183,8 +3109,8 @@
         </p:nvSpPr>
         <p:spPr>
           <a:xfrm>
-            <a:off x="457200" y="2697480"/>
-            <a:ext cx="8229600" cy="566928"/>
+            <a:off x="457200" y="2203704"/>
+            <a:ext cx="8229600" cy="448056"/>
           </a:xfrm>
           <a:prstGeom prst="rect">
             <a:avLst/>
@@ -2193,13 +3119,6 @@
             <a:srgbClr val="E8F5E9"/>
           </a:solidFill>
           <a:ln/>
-          <a:effectLst>
-            <a:outerShdw sx="100000" sy="100000" kx="0" ky="0" algn="bl" rotWithShape="0" blurRad="50800" dist="25400" dir="8100000">
-              <a:srgbClr val="000000">
-                <a:alpha val="12000"/>
-              </a:srgbClr>
-            </a:outerShdw>
-          </a:effectLst>
         </p:spPr>
       </p:sp>
       <p:sp>
@@ -2210,8 +3129,8 @@
         </p:nvSpPr>
         <p:spPr>
           <a:xfrm>
-            <a:off x="457200" y="2697480"/>
-            <a:ext cx="45720" cy="566928"/>
+            <a:off x="457200" y="2203704"/>
+            <a:ext cx="45720" cy="448056"/>
           </a:xfrm>
           <a:prstGeom prst="rect">
             <a:avLst/>
@@ -2230,8 +3149,8 @@
         </p:nvSpPr>
         <p:spPr>
           <a:xfrm>
-            <a:off x="685800" y="2697480"/>
-            <a:ext cx="7818120" cy="566928"/>
+            <a:off x="640080" y="2203704"/>
+            <a:ext cx="7863840" cy="448056"/>
           </a:xfrm>
           <a:prstGeom prst="rect">
             <a:avLst/>
@@ -2247,7 +3166,7 @@
               <a:buNone/>
             </a:pPr>
             <a:r>
-              <a:rPr lang="en-US" sz="1200" dirty="0">
+              <a:rPr lang="en-US" sz="1100" dirty="0">
                 <a:solidFill>
                   <a:srgbClr val="1A1A2E"/>
                 </a:solidFill>
@@ -2255,9 +3174,9 @@
                 <a:ea typeface="Calibri" pitchFamily="34" charset="-122"/>
                 <a:cs typeface="Calibri" pitchFamily="34" charset="-120"/>
               </a:rPr>
-              <a:t>La normalisation ÉLIMINE ces anomalies en structurant correctement</a:t>
-            </a:r>
-            <a:endParaRPr lang="en-US" sz="1200" dirty="0"/>
+              <a:t>Cours Merise : 'Si un client ne demande qu'un devis et qu'on le supprime...'</a:t>
+            </a:r>
+            <a:endParaRPr lang="en-US" sz="1100" dirty="0"/>
           </a:p>
         </p:txBody>
       </p:sp>
@@ -2269,8 +3188,8 @@
         </p:nvSpPr>
         <p:spPr>
           <a:xfrm>
-            <a:off x="457200" y="3291840"/>
-            <a:ext cx="8229600" cy="566928"/>
+            <a:off x="457200" y="2679192"/>
+            <a:ext cx="8229600" cy="448056"/>
           </a:xfrm>
           <a:prstGeom prst="rect">
             <a:avLst/>
@@ -2279,13 +3198,6 @@
             <a:srgbClr val="FFFFFF"/>
           </a:solidFill>
           <a:ln/>
-          <a:effectLst>
-            <a:outerShdw sx="100000" sy="100000" kx="0" ky="0" algn="bl" rotWithShape="0" blurRad="50800" dist="25400" dir="8100000">
-              <a:srgbClr val="000000">
-                <a:alpha val="12000"/>
-              </a:srgbClr>
-            </a:outerShdw>
-          </a:effectLst>
         </p:spPr>
       </p:sp>
       <p:sp>
@@ -2296,8 +3208,8 @@
         </p:nvSpPr>
         <p:spPr>
           <a:xfrm>
-            <a:off x="457200" y="3291840"/>
-            <a:ext cx="45720" cy="566928"/>
+            <a:off x="457200" y="2679192"/>
+            <a:ext cx="45720" cy="448056"/>
           </a:xfrm>
           <a:prstGeom prst="rect">
             <a:avLst/>
@@ -2316,8 +3228,8 @@
         </p:nvSpPr>
         <p:spPr>
           <a:xfrm>
-            <a:off x="685800" y="3291840"/>
-            <a:ext cx="7818120" cy="566928"/>
+            <a:off x="640080" y="2679192"/>
+            <a:ext cx="7863840" cy="448056"/>
           </a:xfrm>
           <a:prstGeom prst="rect">
             <a:avLst/>
@@ -2333,7 +3245,7 @@
               <a:buNone/>
             </a:pPr>
             <a:r>
-              <a:rPr lang="en-US" sz="1200" dirty="0">
+              <a:rPr lang="en-US" sz="1100" dirty="0">
                 <a:solidFill>
                   <a:srgbClr val="1A1A2E"/>
                 </a:solidFill>
@@ -2341,9 +3253,9 @@
                 <a:ea typeface="Calibri" pitchFamily="34" charset="-122"/>
                 <a:cs typeface="Calibri" pitchFamily="34" charset="-120"/>
               </a:rPr>
-              <a:t>3 formes normales : 1NF, 2NF, 3NF (suffisant pour la plupart des cas)</a:t>
-            </a:r>
-            <a:endParaRPr lang="en-US" sz="1200" dirty="0"/>
+              <a:t>→ La normalisation ELIMINE ces anomalies</a:t>
+            </a:r>
+            <a:endParaRPr lang="en-US" sz="1100" dirty="0"/>
           </a:p>
         </p:txBody>
       </p:sp>
@@ -2355,8 +3267,8 @@
         </p:nvSpPr>
         <p:spPr>
           <a:xfrm>
-            <a:off x="457200" y="3886200"/>
-            <a:ext cx="8229600" cy="566928"/>
+            <a:off x="457200" y="3154680"/>
+            <a:ext cx="8229600" cy="448056"/>
           </a:xfrm>
           <a:prstGeom prst="rect">
             <a:avLst/>
@@ -2365,13 +3277,6 @@
             <a:srgbClr val="E8F5E9"/>
           </a:solidFill>
           <a:ln/>
-          <a:effectLst>
-            <a:outerShdw sx="100000" sy="100000" kx="0" ky="0" algn="bl" rotWithShape="0" blurRad="50800" dist="25400" dir="8100000">
-              <a:srgbClr val="000000">
-                <a:alpha val="12000"/>
-              </a:srgbClr>
-            </a:outerShdw>
-          </a:effectLst>
         </p:spPr>
       </p:sp>
       <p:sp>
@@ -2382,8 +3287,8 @@
         </p:nvSpPr>
         <p:spPr>
           <a:xfrm>
-            <a:off x="457200" y="3886200"/>
-            <a:ext cx="45720" cy="566928"/>
+            <a:off x="457200" y="3154680"/>
+            <a:ext cx="45720" cy="448056"/>
           </a:xfrm>
           <a:prstGeom prst="rect">
             <a:avLst/>
@@ -2402,8 +3307,8 @@
         </p:nvSpPr>
         <p:spPr>
           <a:xfrm>
-            <a:off x="685800" y="3886200"/>
-            <a:ext cx="7818120" cy="566928"/>
+            <a:off x="640080" y="3154680"/>
+            <a:ext cx="7863840" cy="448056"/>
           </a:xfrm>
           <a:prstGeom prst="rect">
             <a:avLst/>
@@ -2419,7 +3324,7 @@
               <a:buNone/>
             </a:pPr>
             <a:r>
-              <a:rPr lang="en-US" sz="1200" dirty="0">
+              <a:rPr lang="en-US" sz="1100" dirty="0">
                 <a:solidFill>
                   <a:srgbClr val="1A1A2E"/>
                 </a:solidFill>
@@ -2427,9 +3332,88 @@
                 <a:ea typeface="Calibri" pitchFamily="34" charset="-122"/>
                 <a:cs typeface="Calibri" pitchFamily="34" charset="-120"/>
               </a:rPr>
-              <a:t>Le MLD de SwissSound devrait déjà être en 3NF si les DF sont respectées</a:t>
-            </a:r>
-            <a:endParaRPr lang="en-US" sz="1200" dirty="0"/>
+              <a:t>3 formes normales : 1NF, 2NF, 3NF (suffisant pour 99% des cas)</a:t>
+            </a:r>
+            <a:endParaRPr lang="en-US" sz="1100" dirty="0"/>
+          </a:p>
+        </p:txBody>
+      </p:sp>
+      <p:sp>
+        <p:nvSpPr>
+          <p:cNvPr id="22" name="Shape 20"/>
+          <p:cNvSpPr/>
+          <p:nvPr/>
+        </p:nvSpPr>
+        <p:spPr>
+          <a:xfrm>
+            <a:off x="457200" y="3630168"/>
+            <a:ext cx="8229600" cy="448056"/>
+          </a:xfrm>
+          <a:prstGeom prst="rect">
+            <a:avLst/>
+          </a:prstGeom>
+          <a:solidFill>
+            <a:srgbClr val="FFFFFF"/>
+          </a:solidFill>
+          <a:ln/>
+        </p:spPr>
+      </p:sp>
+      <p:sp>
+        <p:nvSpPr>
+          <p:cNvPr id="23" name="Shape 21"/>
+          <p:cNvSpPr/>
+          <p:nvPr/>
+        </p:nvSpPr>
+        <p:spPr>
+          <a:xfrm>
+            <a:off x="457200" y="3630168"/>
+            <a:ext cx="45720" cy="448056"/>
+          </a:xfrm>
+          <a:prstGeom prst="rect">
+            <a:avLst/>
+          </a:prstGeom>
+          <a:solidFill>
+            <a:srgbClr val="2E7D32"/>
+          </a:solidFill>
+          <a:ln/>
+        </p:spPr>
+      </p:sp>
+      <p:sp>
+        <p:nvSpPr>
+          <p:cNvPr id="24" name="Text 22"/>
+          <p:cNvSpPr/>
+          <p:nvPr/>
+        </p:nvSpPr>
+        <p:spPr>
+          <a:xfrm>
+            <a:off x="640080" y="3630168"/>
+            <a:ext cx="7863840" cy="448056"/>
+          </a:xfrm>
+          <a:prstGeom prst="rect">
+            <a:avLst/>
+          </a:prstGeom>
+          <a:noFill/>
+          <a:ln/>
+        </p:spPr>
+        <p:txBody>
+          <a:bodyPr wrap="square" lIns="0" tIns="0" rIns="0" bIns="0" rtlCol="0" anchor="ctr"/>
+          <a:lstStyle/>
+          <a:p>
+            <a:pPr indent="0" marL="0">
+              <a:buNone/>
+            </a:pPr>
+            <a:r>
+              <a:rPr lang="en-US" sz="1100" dirty="0">
+                <a:solidFill>
+                  <a:srgbClr val="1A1A2E"/>
+                </a:solidFill>
+                <a:latin typeface="Calibri" pitchFamily="34" charset="0"/>
+                <a:ea typeface="Calibri" pitchFamily="34" charset="-122"/>
+                <a:cs typeface="Calibri" pitchFamily="34" charset="-120"/>
+              </a:rPr>
+              <a:t>Le MLD de SwissSound DEVRAIT deja etre en 3NF si les DF sont respectees</a:t>
+            </a:r>
+            <a:endParaRPr lang="en-US" sz="1100" dirty="0"/>
           </a:p>
         </p:txBody>
       </p:sp>
@@ -2494,7 +3478,7 @@
         <p:spPr>
           <a:xfrm>
             <a:off x="457200" y="182880"/>
-            <a:ext cx="8229600" cy="548640"/>
+            <a:ext cx="8229600" cy="502920"/>
           </a:xfrm>
           <a:prstGeom prst="rect">
             <a:avLst/>
@@ -2510,7 +3494,7 @@
               <a:buNone/>
             </a:pPr>
             <a:r>
-              <a:rPr lang="en-US" sz="2400" b="1" dirty="0">
+              <a:rPr lang="en-US" sz="2100" b="1" dirty="0">
                 <a:solidFill>
                   <a:srgbClr val="1B5E20"/>
                 </a:solidFill>
@@ -2520,7 +3504,7 @@
               </a:rPr>
               <a:t>1NF : Valeurs atomiques</a:t>
             </a:r>
-            <a:endParaRPr lang="en-US" sz="2400" dirty="0"/>
+            <a:endParaRPr lang="en-US" sz="2100" dirty="0"/>
           </a:p>
         </p:txBody>
       </p:sp>
@@ -2532,8 +3516,8 @@
         </p:nvSpPr>
         <p:spPr>
           <a:xfrm>
-            <a:off x="274320" y="914400"/>
-            <a:ext cx="4206240" cy="3840480"/>
+            <a:off x="457200" y="777240"/>
+            <a:ext cx="8229600" cy="448056"/>
           </a:xfrm>
           <a:prstGeom prst="rect">
             <a:avLst/>
@@ -2542,13 +3526,6 @@
             <a:srgbClr val="FFFFFF"/>
           </a:solidFill>
           <a:ln/>
-          <a:effectLst>
-            <a:outerShdw sx="100000" sy="100000" kx="0" ky="0" algn="bl" rotWithShape="0" blurRad="50800" dist="25400" dir="8100000">
-              <a:srgbClr val="000000">
-                <a:alpha val="12000"/>
-              </a:srgbClr>
-            </a:outerShdw>
-          </a:effectLst>
         </p:spPr>
       </p:sp>
       <p:sp>
@@ -2559,8 +3536,8 @@
         </p:nvSpPr>
         <p:spPr>
           <a:xfrm>
-            <a:off x="274320" y="914400"/>
-            <a:ext cx="4206240" cy="457200"/>
+            <a:off x="457200" y="777240"/>
+            <a:ext cx="45720" cy="448056"/>
           </a:xfrm>
           <a:prstGeom prst="rect">
             <a:avLst/>
@@ -2579,8 +3556,8 @@
         </p:nvSpPr>
         <p:spPr>
           <a:xfrm>
-            <a:off x="457200" y="914400"/>
-            <a:ext cx="3840480" cy="457200"/>
+            <a:off x="640080" y="777240"/>
+            <a:ext cx="7863840" cy="448056"/>
           </a:xfrm>
           <a:prstGeom prst="rect">
             <a:avLst/>
@@ -2596,54 +3573,15 @@
               <a:buNone/>
             </a:pPr>
             <a:r>
-              <a:rPr lang="en-US" sz="1400" b="1" dirty="0">
-                <a:solidFill>
-                  <a:srgbClr val="FFFFFF"/>
-                </a:solidFill>
-                <a:latin typeface="Trebuchet MS" pitchFamily="34" charset="0"/>
-                <a:ea typeface="Trebuchet MS" pitchFamily="34" charset="-122"/>
-                <a:cs typeface="Trebuchet MS" pitchFamily="34" charset="-120"/>
-              </a:rPr>
-              <a:t>❌ Violation 1NF</a:t>
-            </a:r>
-            <a:endParaRPr lang="en-US" sz="1400" dirty="0"/>
-          </a:p>
-        </p:txBody>
-      </p:sp>
-      <p:sp>
-        <p:nvSpPr>
-          <p:cNvPr id="7" name="Text 5"/>
-          <p:cNvSpPr/>
-          <p:nvPr/>
-        </p:nvSpPr>
-        <p:spPr>
-          <a:xfrm>
-            <a:off x="457200" y="1463040"/>
-            <a:ext cx="3840480" cy="411480"/>
-          </a:xfrm>
-          <a:prstGeom prst="rect">
-            <a:avLst/>
-          </a:prstGeom>
-          <a:noFill/>
-          <a:ln/>
-        </p:spPr>
-        <p:txBody>
-          <a:bodyPr wrap="square" lIns="0" tIns="0" rIns="0" bIns="0" rtlCol="0" anchor="ctr"/>
-          <a:lstStyle/>
-          <a:p>
-            <a:pPr indent="0" marL="0">
-              <a:buNone/>
-            </a:pPr>
-            <a:r>
               <a:rPr lang="en-US" sz="1100" dirty="0">
                 <a:solidFill>
-                  <a:srgbClr val="333333"/>
+                  <a:srgbClr val="1A1A2E"/>
                 </a:solidFill>
                 <a:latin typeface="Calibri" pitchFamily="34" charset="0"/>
                 <a:ea typeface="Calibri" pitchFamily="34" charset="-122"/>
                 <a:cs typeface="Calibri" pitchFamily="34" charset="-120"/>
               </a:rPr>
-              <a:t>→ genres: 'rock, jazz, pop'</a:t>
+              <a:t>Chaque cellule contient UNE SEULE valeur indivisible</a:t>
             </a:r>
             <a:endParaRPr lang="en-US" sz="1100" dirty="0"/>
           </a:p>
@@ -2651,14 +3589,54 @@
       </p:sp>
       <p:sp>
         <p:nvSpPr>
-          <p:cNvPr id="8" name="Text 6"/>
-          <p:cNvSpPr/>
-          <p:nvPr/>
-        </p:nvSpPr>
-        <p:spPr>
-          <a:xfrm>
-            <a:off x="457200" y="1920240"/>
-            <a:ext cx="3840480" cy="411480"/>
+          <p:cNvPr id="7" name="Shape 5"/>
+          <p:cNvSpPr/>
+          <p:nvPr/>
+        </p:nvSpPr>
+        <p:spPr>
+          <a:xfrm>
+            <a:off x="457200" y="1252728"/>
+            <a:ext cx="8229600" cy="448056"/>
+          </a:xfrm>
+          <a:prstGeom prst="rect">
+            <a:avLst/>
+          </a:prstGeom>
+          <a:solidFill>
+            <a:srgbClr val="E8F5E9"/>
+          </a:solidFill>
+          <a:ln/>
+        </p:spPr>
+      </p:sp>
+      <p:sp>
+        <p:nvSpPr>
+          <p:cNvPr id="8" name="Shape 6"/>
+          <p:cNvSpPr/>
+          <p:nvPr/>
+        </p:nvSpPr>
+        <p:spPr>
+          <a:xfrm>
+            <a:off x="457200" y="1252728"/>
+            <a:ext cx="45720" cy="448056"/>
+          </a:xfrm>
+          <a:prstGeom prst="rect">
+            <a:avLst/>
+          </a:prstGeom>
+          <a:solidFill>
+            <a:srgbClr val="2E7D32"/>
+          </a:solidFill>
+          <a:ln/>
+        </p:spPr>
+      </p:sp>
+      <p:sp>
+        <p:nvSpPr>
+          <p:cNvPr id="9" name="Text 7"/>
+          <p:cNvSpPr/>
+          <p:nvPr/>
+        </p:nvSpPr>
+        <p:spPr>
+          <a:xfrm>
+            <a:off x="640080" y="1252728"/>
+            <a:ext cx="7863840" cy="448056"/>
           </a:xfrm>
           <a:prstGeom prst="rect">
             <a:avLst/>
@@ -2676,13 +3654,13 @@
             <a:r>
               <a:rPr lang="en-US" sz="1100" dirty="0">
                 <a:solidFill>
-                  <a:srgbClr val="333333"/>
+                  <a:srgbClr val="1A1A2E"/>
                 </a:solidFill>
                 <a:latin typeface="Calibri" pitchFamily="34" charset="0"/>
                 <a:ea typeface="Calibri" pitchFamily="34" charset="-122"/>
                 <a:cs typeface="Calibri" pitchFamily="34" charset="-120"/>
               </a:rPr>
-              <a:t>→ telephones: '079..., 078...'</a:t>
+              <a:t>VIOLATION : genres = 'rock, jazz, pop' (liste dans 1 cellule)</a:t>
             </a:r>
             <a:endParaRPr lang="en-US" sz="1100" dirty="0"/>
           </a:p>
@@ -2690,14 +3668,54 @@
       </p:sp>
       <p:sp>
         <p:nvSpPr>
-          <p:cNvPr id="9" name="Text 7"/>
-          <p:cNvSpPr/>
-          <p:nvPr/>
-        </p:nvSpPr>
-        <p:spPr>
-          <a:xfrm>
-            <a:off x="457200" y="2377440"/>
-            <a:ext cx="3840480" cy="411480"/>
+          <p:cNvPr id="10" name="Shape 8"/>
+          <p:cNvSpPr/>
+          <p:nvPr/>
+        </p:nvSpPr>
+        <p:spPr>
+          <a:xfrm>
+            <a:off x="457200" y="1728216"/>
+            <a:ext cx="8229600" cy="448056"/>
+          </a:xfrm>
+          <a:prstGeom prst="rect">
+            <a:avLst/>
+          </a:prstGeom>
+          <a:solidFill>
+            <a:srgbClr val="FFFFFF"/>
+          </a:solidFill>
+          <a:ln/>
+        </p:spPr>
+      </p:sp>
+      <p:sp>
+        <p:nvSpPr>
+          <p:cNvPr id="11" name="Shape 9"/>
+          <p:cNvSpPr/>
+          <p:nvPr/>
+        </p:nvSpPr>
+        <p:spPr>
+          <a:xfrm>
+            <a:off x="457200" y="1728216"/>
+            <a:ext cx="45720" cy="448056"/>
+          </a:xfrm>
+          <a:prstGeom prst="rect">
+            <a:avLst/>
+          </a:prstGeom>
+          <a:solidFill>
+            <a:srgbClr val="2E7D32"/>
+          </a:solidFill>
+          <a:ln/>
+        </p:spPr>
+      </p:sp>
+      <p:sp>
+        <p:nvSpPr>
+          <p:cNvPr id="12" name="Text 10"/>
+          <p:cNvSpPr/>
+          <p:nvPr/>
+        </p:nvSpPr>
+        <p:spPr>
+          <a:xfrm>
+            <a:off x="640080" y="1728216"/>
+            <a:ext cx="7863840" cy="448056"/>
           </a:xfrm>
           <a:prstGeom prst="rect">
             <a:avLst/>
@@ -2715,13 +3733,13 @@
             <a:r>
               <a:rPr lang="en-US" sz="1100" dirty="0">
                 <a:solidFill>
-                  <a:srgbClr val="333333"/>
+                  <a:srgbClr val="1A1A2E"/>
                 </a:solidFill>
                 <a:latin typeface="Calibri" pitchFamily="34" charset="0"/>
                 <a:ea typeface="Calibri" pitchFamily="34" charset="-122"/>
                 <a:cs typeface="Calibri" pitchFamily="34" charset="-120"/>
               </a:rPr>
-              <a:t>→ adresse: 'Rue X, 1000, Lausanne'</a:t>
+              <a:t>VIOLATION : telephones = '079..., 078...' (plusieurs valeurs)</a:t>
             </a:r>
             <a:endParaRPr lang="en-US" sz="1100" dirty="0"/>
           </a:p>
@@ -2729,14 +3747,54 @@
       </p:sp>
       <p:sp>
         <p:nvSpPr>
-          <p:cNvPr id="10" name="Text 8"/>
-          <p:cNvSpPr/>
-          <p:nvPr/>
-        </p:nvSpPr>
-        <p:spPr>
-          <a:xfrm>
-            <a:off x="457200" y="2834640"/>
-            <a:ext cx="3840480" cy="411480"/>
+          <p:cNvPr id="13" name="Shape 11"/>
+          <p:cNvSpPr/>
+          <p:nvPr/>
+        </p:nvSpPr>
+        <p:spPr>
+          <a:xfrm>
+            <a:off x="457200" y="2203704"/>
+            <a:ext cx="8229600" cy="448056"/>
+          </a:xfrm>
+          <a:prstGeom prst="rect">
+            <a:avLst/>
+          </a:prstGeom>
+          <a:solidFill>
+            <a:srgbClr val="E8F5E9"/>
+          </a:solidFill>
+          <a:ln/>
+        </p:spPr>
+      </p:sp>
+      <p:sp>
+        <p:nvSpPr>
+          <p:cNvPr id="14" name="Shape 12"/>
+          <p:cNvSpPr/>
+          <p:nvPr/>
+        </p:nvSpPr>
+        <p:spPr>
+          <a:xfrm>
+            <a:off x="457200" y="2203704"/>
+            <a:ext cx="45720" cy="448056"/>
+          </a:xfrm>
+          <a:prstGeom prst="rect">
+            <a:avLst/>
+          </a:prstGeom>
+          <a:solidFill>
+            <a:srgbClr val="2E7D32"/>
+          </a:solidFill>
+          <a:ln/>
+        </p:spPr>
+      </p:sp>
+      <p:sp>
+        <p:nvSpPr>
+          <p:cNvPr id="15" name="Text 13"/>
+          <p:cNvSpPr/>
+          <p:nvPr/>
+        </p:nvSpPr>
+        <p:spPr>
+          <a:xfrm>
+            <a:off x="640080" y="2203704"/>
+            <a:ext cx="7863840" cy="448056"/>
           </a:xfrm>
           <a:prstGeom prst="rect">
             <a:avLst/>
@@ -2754,13 +3812,13 @@
             <a:r>
               <a:rPr lang="en-US" sz="1100" dirty="0">
                 <a:solidFill>
-                  <a:srgbClr val="333333"/>
+                  <a:srgbClr val="1A1A2E"/>
                 </a:solidFill>
                 <a:latin typeface="Calibri" pitchFamily="34" charset="0"/>
                 <a:ea typeface="Calibri" pitchFamily="34" charset="-122"/>
                 <a:cs typeface="Calibri" pitchFamily="34" charset="-120"/>
               </a:rPr>
-              <a:t>→ → Plusieurs valeurs dans 1 cellule</a:t>
+              <a:t>VIOLATION : adresse = 'Rue X, 1000, Lausanne' (composee)</a:t>
             </a:r>
             <a:endParaRPr lang="en-US" sz="1100" dirty="0"/>
           </a:p>
@@ -2768,14 +3826,54 @@
       </p:sp>
       <p:sp>
         <p:nvSpPr>
-          <p:cNvPr id="11" name="Text 9"/>
-          <p:cNvSpPr/>
-          <p:nvPr/>
-        </p:nvSpPr>
-        <p:spPr>
-          <a:xfrm>
-            <a:off x="457200" y="3291840"/>
-            <a:ext cx="3840480" cy="411480"/>
+          <p:cNvPr id="16" name="Shape 14"/>
+          <p:cNvSpPr/>
+          <p:nvPr/>
+        </p:nvSpPr>
+        <p:spPr>
+          <a:xfrm>
+            <a:off x="457200" y="2679192"/>
+            <a:ext cx="8229600" cy="448056"/>
+          </a:xfrm>
+          <a:prstGeom prst="rect">
+            <a:avLst/>
+          </a:prstGeom>
+          <a:solidFill>
+            <a:srgbClr val="FFFFFF"/>
+          </a:solidFill>
+          <a:ln/>
+        </p:spPr>
+      </p:sp>
+      <p:sp>
+        <p:nvSpPr>
+          <p:cNvPr id="17" name="Shape 15"/>
+          <p:cNvSpPr/>
+          <p:nvPr/>
+        </p:nvSpPr>
+        <p:spPr>
+          <a:xfrm>
+            <a:off x="457200" y="2679192"/>
+            <a:ext cx="45720" cy="448056"/>
+          </a:xfrm>
+          <a:prstGeom prst="rect">
+            <a:avLst/>
+          </a:prstGeom>
+          <a:solidFill>
+            <a:srgbClr val="2E7D32"/>
+          </a:solidFill>
+          <a:ln/>
+        </p:spPr>
+      </p:sp>
+      <p:sp>
+        <p:nvSpPr>
+          <p:cNvPr id="18" name="Text 16"/>
+          <p:cNvSpPr/>
+          <p:nvPr/>
+        </p:nvSpPr>
+        <p:spPr>
+          <a:xfrm>
+            <a:off x="640080" y="2679192"/>
+            <a:ext cx="7863840" cy="448056"/>
           </a:xfrm>
           <a:prstGeom prst="rect">
             <a:avLst/>
@@ -2793,13 +3891,13 @@
             <a:r>
               <a:rPr lang="en-US" sz="1100" dirty="0">
                 <a:solidFill>
-                  <a:srgbClr val="333333"/>
+                  <a:srgbClr val="1A1A2E"/>
                 </a:solidFill>
                 <a:latin typeface="Calibri" pitchFamily="34" charset="0"/>
                 <a:ea typeface="Calibri" pitchFamily="34" charset="-122"/>
                 <a:cs typeface="Calibri" pitchFamily="34" charset="-120"/>
               </a:rPr>
-              <a:t>→ → Impossible de filtrer par genre</a:t>
+              <a:t>CORRECTION : table associative genre_artiste (1 ligne par genre)</a:t>
             </a:r>
             <a:endParaRPr lang="en-US" sz="1100" dirty="0"/>
           </a:p>
@@ -2807,14 +3905,54 @@
       </p:sp>
       <p:sp>
         <p:nvSpPr>
-          <p:cNvPr id="12" name="Text 10"/>
-          <p:cNvSpPr/>
-          <p:nvPr/>
-        </p:nvSpPr>
-        <p:spPr>
-          <a:xfrm>
-            <a:off x="457200" y="3749040"/>
-            <a:ext cx="3840480" cy="411480"/>
+          <p:cNvPr id="19" name="Shape 17"/>
+          <p:cNvSpPr/>
+          <p:nvPr/>
+        </p:nvSpPr>
+        <p:spPr>
+          <a:xfrm>
+            <a:off x="457200" y="3154680"/>
+            <a:ext cx="8229600" cy="448056"/>
+          </a:xfrm>
+          <a:prstGeom prst="rect">
+            <a:avLst/>
+          </a:prstGeom>
+          <a:solidFill>
+            <a:srgbClr val="E8F5E9"/>
+          </a:solidFill>
+          <a:ln/>
+        </p:spPr>
+      </p:sp>
+      <p:sp>
+        <p:nvSpPr>
+          <p:cNvPr id="20" name="Shape 18"/>
+          <p:cNvSpPr/>
+          <p:nvPr/>
+        </p:nvSpPr>
+        <p:spPr>
+          <a:xfrm>
+            <a:off x="457200" y="3154680"/>
+            <a:ext cx="45720" cy="448056"/>
+          </a:xfrm>
+          <a:prstGeom prst="rect">
+            <a:avLst/>
+          </a:prstGeom>
+          <a:solidFill>
+            <a:srgbClr val="2E7D32"/>
+          </a:solidFill>
+          <a:ln/>
+        </p:spPr>
+      </p:sp>
+      <p:sp>
+        <p:nvSpPr>
+          <p:cNvPr id="21" name="Text 19"/>
+          <p:cNvSpPr/>
+          <p:nvPr/>
+        </p:nvSpPr>
+        <p:spPr>
+          <a:xfrm>
+            <a:off x="640080" y="3154680"/>
+            <a:ext cx="7863840" cy="448056"/>
           </a:xfrm>
           <a:prstGeom prst="rect">
             <a:avLst/>
@@ -2832,13 +3970,13 @@
             <a:r>
               <a:rPr lang="en-US" sz="1100" dirty="0">
                 <a:solidFill>
-                  <a:srgbClr val="333333"/>
+                  <a:srgbClr val="1A1A2E"/>
                 </a:solidFill>
                 <a:latin typeface="Calibri" pitchFamily="34" charset="0"/>
                 <a:ea typeface="Calibri" pitchFamily="34" charset="-122"/>
                 <a:cs typeface="Calibri" pitchFamily="34" charset="-120"/>
               </a:rPr>
-              <a:t>→ → Impossible de chercher par ville</a:t>
+              <a:t>CORRECTION : separer rue, code_postal, ville</a:t>
             </a:r>
             <a:endParaRPr lang="en-US" sz="1100" dirty="0"/>
           </a:p>
@@ -2846,14 +3984,14 @@
       </p:sp>
       <p:sp>
         <p:nvSpPr>
-          <p:cNvPr id="13" name="Shape 11"/>
-          <p:cNvSpPr/>
-          <p:nvPr/>
-        </p:nvSpPr>
-        <p:spPr>
-          <a:xfrm>
-            <a:off x="4663440" y="914400"/>
-            <a:ext cx="4206240" cy="3840480"/>
+          <p:cNvPr id="22" name="Shape 20"/>
+          <p:cNvSpPr/>
+          <p:nvPr/>
+        </p:nvSpPr>
+        <p:spPr>
+          <a:xfrm>
+            <a:off x="457200" y="3630168"/>
+            <a:ext cx="8229600" cy="448056"/>
           </a:xfrm>
           <a:prstGeom prst="rect">
             <a:avLst/>
@@ -2862,45 +4000,38 @@
             <a:srgbClr val="FFFFFF"/>
           </a:solidFill>
           <a:ln/>
-          <a:effectLst>
-            <a:outerShdw sx="100000" sy="100000" kx="0" ky="0" algn="bl" rotWithShape="0" blurRad="50800" dist="25400" dir="8100000">
-              <a:srgbClr val="000000">
-                <a:alpha val="12000"/>
-              </a:srgbClr>
-            </a:outerShdw>
-          </a:effectLst>
-        </p:spPr>
-      </p:sp>
-      <p:sp>
-        <p:nvSpPr>
-          <p:cNvPr id="14" name="Shape 12"/>
-          <p:cNvSpPr/>
-          <p:nvPr/>
-        </p:nvSpPr>
-        <p:spPr>
-          <a:xfrm>
-            <a:off x="4663440" y="914400"/>
-            <a:ext cx="4206240" cy="457200"/>
-          </a:xfrm>
-          <a:prstGeom prst="rect">
-            <a:avLst/>
-          </a:prstGeom>
-          <a:solidFill>
-            <a:srgbClr val="FF6F00"/>
-          </a:solidFill>
-          <a:ln/>
-        </p:spPr>
-      </p:sp>
-      <p:sp>
-        <p:nvSpPr>
-          <p:cNvPr id="15" name="Text 13"/>
-          <p:cNvSpPr/>
-          <p:nvPr/>
-        </p:nvSpPr>
-        <p:spPr>
-          <a:xfrm>
-            <a:off x="4846320" y="914400"/>
-            <a:ext cx="3840480" cy="457200"/>
+        </p:spPr>
+      </p:sp>
+      <p:sp>
+        <p:nvSpPr>
+          <p:cNvPr id="23" name="Shape 21"/>
+          <p:cNvSpPr/>
+          <p:nvPr/>
+        </p:nvSpPr>
+        <p:spPr>
+          <a:xfrm>
+            <a:off x="457200" y="3630168"/>
+            <a:ext cx="45720" cy="448056"/>
+          </a:xfrm>
+          <a:prstGeom prst="rect">
+            <a:avLst/>
+          </a:prstGeom>
+          <a:solidFill>
+            <a:srgbClr val="2E7D32"/>
+          </a:solidFill>
+          <a:ln/>
+        </p:spPr>
+      </p:sp>
+      <p:sp>
+        <p:nvSpPr>
+          <p:cNvPr id="24" name="Text 22"/>
+          <p:cNvSpPr/>
+          <p:nvPr/>
+        </p:nvSpPr>
+        <p:spPr>
+          <a:xfrm>
+            <a:off x="640080" y="3630168"/>
+            <a:ext cx="7863840" cy="448056"/>
           </a:xfrm>
           <a:prstGeom prst="rect">
             <a:avLst/>
@@ -2916,249 +4047,15 @@
               <a:buNone/>
             </a:pPr>
             <a:r>
-              <a:rPr lang="en-US" sz="1400" b="1" dirty="0">
-                <a:solidFill>
-                  <a:srgbClr val="FFFFFF"/>
-                </a:solidFill>
-                <a:latin typeface="Trebuchet MS" pitchFamily="34" charset="0"/>
-                <a:ea typeface="Trebuchet MS" pitchFamily="34" charset="-122"/>
-                <a:cs typeface="Trebuchet MS" pitchFamily="34" charset="-120"/>
-              </a:rPr>
-              <a:t>✅ Conforme 1NF</a:t>
-            </a:r>
-            <a:endParaRPr lang="en-US" sz="1400" dirty="0"/>
-          </a:p>
-        </p:txBody>
-      </p:sp>
-      <p:sp>
-        <p:nvSpPr>
-          <p:cNvPr id="16" name="Text 14"/>
-          <p:cNvSpPr/>
-          <p:nvPr/>
-        </p:nvSpPr>
-        <p:spPr>
-          <a:xfrm>
-            <a:off x="4846320" y="1463040"/>
-            <a:ext cx="3840480" cy="411480"/>
-          </a:xfrm>
-          <a:prstGeom prst="rect">
-            <a:avLst/>
-          </a:prstGeom>
-          <a:noFill/>
-          <a:ln/>
-        </p:spPr>
-        <p:txBody>
-          <a:bodyPr wrap="square" lIns="0" tIns="0" rIns="0" bIns="0" rtlCol="0" anchor="ctr"/>
-          <a:lstStyle/>
-          <a:p>
-            <a:pPr indent="0" marL="0">
-              <a:buNone/>
-            </a:pPr>
-            <a:r>
               <a:rPr lang="en-US" sz="1100" dirty="0">
                 <a:solidFill>
-                  <a:srgbClr val="333333"/>
+                  <a:srgbClr val="1A1A2E"/>
                 </a:solidFill>
                 <a:latin typeface="Calibri" pitchFamily="34" charset="0"/>
                 <a:ea typeface="Calibri" pitchFamily="34" charset="-122"/>
                 <a:cs typeface="Calibri" pitchFamily="34" charset="-120"/>
               </a:rPr>
-              <a:t>→ 1 ligne par genre (table associative)</a:t>
-            </a:r>
-            <a:endParaRPr lang="en-US" sz="1100" dirty="0"/>
-          </a:p>
-        </p:txBody>
-      </p:sp>
-      <p:sp>
-        <p:nvSpPr>
-          <p:cNvPr id="17" name="Text 15"/>
-          <p:cNvSpPr/>
-          <p:nvPr/>
-        </p:nvSpPr>
-        <p:spPr>
-          <a:xfrm>
-            <a:off x="4846320" y="1920240"/>
-            <a:ext cx="3840480" cy="411480"/>
-          </a:xfrm>
-          <a:prstGeom prst="rect">
-            <a:avLst/>
-          </a:prstGeom>
-          <a:noFill/>
-          <a:ln/>
-        </p:spPr>
-        <p:txBody>
-          <a:bodyPr wrap="square" lIns="0" tIns="0" rIns="0" bIns="0" rtlCol="0" anchor="ctr"/>
-          <a:lstStyle/>
-          <a:p>
-            <a:pPr indent="0" marL="0">
-              <a:buNone/>
-            </a:pPr>
-            <a:r>
-              <a:rPr lang="en-US" sz="1100" dirty="0">
-                <a:solidFill>
-                  <a:srgbClr val="333333"/>
-                </a:solidFill>
-                <a:latin typeface="Calibri" pitchFamily="34" charset="0"/>
-                <a:ea typeface="Calibri" pitchFamily="34" charset="-122"/>
-                <a:cs typeface="Calibri" pitchFamily="34" charset="-120"/>
-              </a:rPr>
-              <a:t>→ 1 colonne = 1 téléphone</a:t>
-            </a:r>
-            <a:endParaRPr lang="en-US" sz="1100" dirty="0"/>
-          </a:p>
-        </p:txBody>
-      </p:sp>
-      <p:sp>
-        <p:nvSpPr>
-          <p:cNvPr id="18" name="Text 16"/>
-          <p:cNvSpPr/>
-          <p:nvPr/>
-        </p:nvSpPr>
-        <p:spPr>
-          <a:xfrm>
-            <a:off x="4846320" y="2377440"/>
-            <a:ext cx="3840480" cy="411480"/>
-          </a:xfrm>
-          <a:prstGeom prst="rect">
-            <a:avLst/>
-          </a:prstGeom>
-          <a:noFill/>
-          <a:ln/>
-        </p:spPr>
-        <p:txBody>
-          <a:bodyPr wrap="square" lIns="0" tIns="0" rIns="0" bIns="0" rtlCol="0" anchor="ctr"/>
-          <a:lstStyle/>
-          <a:p>
-            <a:pPr indent="0" marL="0">
-              <a:buNone/>
-            </a:pPr>
-            <a:r>
-              <a:rPr lang="en-US" sz="1100" dirty="0">
-                <a:solidFill>
-                  <a:srgbClr val="333333"/>
-                </a:solidFill>
-                <a:latin typeface="Calibri" pitchFamily="34" charset="0"/>
-                <a:ea typeface="Calibri" pitchFamily="34" charset="-122"/>
-                <a:cs typeface="Calibri" pitchFamily="34" charset="-120"/>
-              </a:rPr>
-              <a:t>→ rue, code_postal, ville séparés</a:t>
-            </a:r>
-            <a:endParaRPr lang="en-US" sz="1100" dirty="0"/>
-          </a:p>
-        </p:txBody>
-      </p:sp>
-      <p:sp>
-        <p:nvSpPr>
-          <p:cNvPr id="19" name="Text 17"/>
-          <p:cNvSpPr/>
-          <p:nvPr/>
-        </p:nvSpPr>
-        <p:spPr>
-          <a:xfrm>
-            <a:off x="4846320" y="2834640"/>
-            <a:ext cx="3840480" cy="411480"/>
-          </a:xfrm>
-          <a:prstGeom prst="rect">
-            <a:avLst/>
-          </a:prstGeom>
-          <a:noFill/>
-          <a:ln/>
-        </p:spPr>
-        <p:txBody>
-          <a:bodyPr wrap="square" lIns="0" tIns="0" rIns="0" bIns="0" rtlCol="0" anchor="ctr"/>
-          <a:lstStyle/>
-          <a:p>
-            <a:pPr indent="0" marL="0">
-              <a:buNone/>
-            </a:pPr>
-            <a:r>
-              <a:rPr lang="en-US" sz="1100" dirty="0">
-                <a:solidFill>
-                  <a:srgbClr val="333333"/>
-                </a:solidFill>
-                <a:latin typeface="Calibri" pitchFamily="34" charset="0"/>
-                <a:ea typeface="Calibri" pitchFamily="34" charset="-122"/>
-                <a:cs typeface="Calibri" pitchFamily="34" charset="-120"/>
-              </a:rPr>
-              <a:t>→ → Chaque cellule = 1 seule valeur</a:t>
-            </a:r>
-            <a:endParaRPr lang="en-US" sz="1100" dirty="0"/>
-          </a:p>
-        </p:txBody>
-      </p:sp>
-      <p:sp>
-        <p:nvSpPr>
-          <p:cNvPr id="20" name="Text 18"/>
-          <p:cNvSpPr/>
-          <p:nvPr/>
-        </p:nvSpPr>
-        <p:spPr>
-          <a:xfrm>
-            <a:off x="4846320" y="3291840"/>
-            <a:ext cx="3840480" cy="411480"/>
-          </a:xfrm>
-          <a:prstGeom prst="rect">
-            <a:avLst/>
-          </a:prstGeom>
-          <a:noFill/>
-          <a:ln/>
-        </p:spPr>
-        <p:txBody>
-          <a:bodyPr wrap="square" lIns="0" tIns="0" rIns="0" bIns="0" rtlCol="0" anchor="ctr"/>
-          <a:lstStyle/>
-          <a:p>
-            <a:pPr indent="0" marL="0">
-              <a:buNone/>
-            </a:pPr>
-            <a:r>
-              <a:rPr lang="en-US" sz="1100" dirty="0">
-                <a:solidFill>
-                  <a:srgbClr val="333333"/>
-                </a:solidFill>
-                <a:latin typeface="Calibri" pitchFamily="34" charset="0"/>
-                <a:ea typeface="Calibri" pitchFamily="34" charset="-122"/>
-                <a:cs typeface="Calibri" pitchFamily="34" charset="-120"/>
-              </a:rPr>
-              <a:t>→ ⚠️ Atomicité 1NF ≠ Atomicité ACID</a:t>
-            </a:r>
-            <a:endParaRPr lang="en-US" sz="1100" dirty="0"/>
-          </a:p>
-        </p:txBody>
-      </p:sp>
-      <p:sp>
-        <p:nvSpPr>
-          <p:cNvPr id="21" name="Text 19"/>
-          <p:cNvSpPr/>
-          <p:nvPr/>
-        </p:nvSpPr>
-        <p:spPr>
-          <a:xfrm>
-            <a:off x="4846320" y="3749040"/>
-            <a:ext cx="3840480" cy="411480"/>
-          </a:xfrm>
-          <a:prstGeom prst="rect">
-            <a:avLst/>
-          </a:prstGeom>
-          <a:noFill/>
-          <a:ln/>
-        </p:spPr>
-        <p:txBody>
-          <a:bodyPr wrap="square" lIns="0" tIns="0" rIns="0" bIns="0" rtlCol="0" anchor="ctr"/>
-          <a:lstStyle/>
-          <a:p>
-            <a:pPr indent="0" marL="0">
-              <a:buNone/>
-            </a:pPr>
-            <a:r>
-              <a:rPr lang="en-US" sz="1100" dirty="0">
-                <a:solidFill>
-                  <a:srgbClr val="333333"/>
-                </a:solidFill>
-                <a:latin typeface="Calibri" pitchFamily="34" charset="0"/>
-                <a:ea typeface="Calibri" pitchFamily="34" charset="-122"/>
-                <a:cs typeface="Calibri" pitchFamily="34" charset="-120"/>
-              </a:rPr>
-              <a:t>→ 1NF=valeur indivisible | ACID=tout-ou-rien</a:t>
+              <a:t>Cours Merise : propriete SIMPLE = non decomposable</a:t>
             </a:r>
             <a:endParaRPr lang="en-US" sz="1100" dirty="0"/>
           </a:p>
@@ -3225,7 +4122,7 @@
         <p:spPr>
           <a:xfrm>
             <a:off x="457200" y="182880"/>
-            <a:ext cx="8229600" cy="594360"/>
+            <a:ext cx="8229600" cy="502920"/>
           </a:xfrm>
           <a:prstGeom prst="rect">
             <a:avLst/>
@@ -3241,7 +4138,7 @@
               <a:buNone/>
             </a:pPr>
             <a:r>
-              <a:rPr lang="en-US" sz="2400" b="1" dirty="0">
+              <a:rPr lang="en-US" sz="2100" b="1" dirty="0">
                 <a:solidFill>
                   <a:srgbClr val="1B5E20"/>
                 </a:solidFill>
@@ -3249,9 +4146,9 @@
                 <a:ea typeface="Trebuchet MS" pitchFamily="34" charset="-122"/>
                 <a:cs typeface="Trebuchet MS" pitchFamily="34" charset="-120"/>
               </a:rPr>
-              <a:t>2NF : Dépendance totale à la PK</a:t>
-            </a:r>
-            <a:endParaRPr lang="en-US" sz="2400" dirty="0"/>
+              <a:t>ATTENTION : Atomicite 1NF ≠ Atomicite ACID</a:t>
+            </a:r>
+            <a:endParaRPr lang="en-US" sz="2100" dirty="0"/>
           </a:p>
         </p:txBody>
       </p:sp>
@@ -3263,8 +4160,8 @@
         </p:nvSpPr>
         <p:spPr>
           <a:xfrm>
-            <a:off x="457200" y="914400"/>
-            <a:ext cx="8229600" cy="560397"/>
+            <a:off x="457200" y="777240"/>
+            <a:ext cx="8229600" cy="448056"/>
           </a:xfrm>
           <a:prstGeom prst="rect">
             <a:avLst/>
@@ -3273,13 +4170,6 @@
             <a:srgbClr val="FFFFFF"/>
           </a:solidFill>
           <a:ln/>
-          <a:effectLst>
-            <a:outerShdw sx="100000" sy="100000" kx="0" ky="0" algn="bl" rotWithShape="0" blurRad="50800" dist="25400" dir="8100000">
-              <a:srgbClr val="000000">
-                <a:alpha val="12000"/>
-              </a:srgbClr>
-            </a:outerShdw>
-          </a:effectLst>
         </p:spPr>
       </p:sp>
       <p:sp>
@@ -3290,8 +4180,8 @@
         </p:nvSpPr>
         <p:spPr>
           <a:xfrm>
-            <a:off x="457200" y="914400"/>
-            <a:ext cx="45720" cy="560397"/>
+            <a:off x="457200" y="777240"/>
+            <a:ext cx="45720" cy="448056"/>
           </a:xfrm>
           <a:prstGeom prst="rect">
             <a:avLst/>
@@ -3310,8 +4200,8 @@
         </p:nvSpPr>
         <p:spPr>
           <a:xfrm>
-            <a:off x="685800" y="914400"/>
-            <a:ext cx="7818120" cy="560397"/>
+            <a:off x="640080" y="777240"/>
+            <a:ext cx="7863840" cy="448056"/>
           </a:xfrm>
           <a:prstGeom prst="rect">
             <a:avLst/>
@@ -3327,7 +4217,7 @@
               <a:buNone/>
             </a:pPr>
             <a:r>
-              <a:rPr lang="en-US" sz="1200" dirty="0">
+              <a:rPr lang="en-US" sz="1100" dirty="0">
                 <a:solidFill>
                   <a:srgbClr val="1A1A2E"/>
                 </a:solidFill>
@@ -3335,9 +4225,9 @@
                 <a:ea typeface="Calibri" pitchFamily="34" charset="-122"/>
                 <a:cs typeface="Calibri" pitchFamily="34" charset="-120"/>
               </a:rPr>
-              <a:t>Concerne uniquement les tables avec PK COMPOSÉE</a:t>
-            </a:r>
-            <a:endParaRPr lang="en-US" sz="1200" dirty="0"/>
+              <a:t>Ce sont DEUX CONCEPTS COMPLETEMENT DIFFERENTS !</a:t>
+            </a:r>
+            <a:endParaRPr lang="en-US" sz="1100" dirty="0"/>
           </a:p>
         </p:txBody>
       </p:sp>
@@ -3349,8 +4239,8 @@
         </p:nvSpPr>
         <p:spPr>
           <a:xfrm>
-            <a:off x="457200" y="1502229"/>
-            <a:ext cx="8229600" cy="560397"/>
+            <a:off x="457200" y="1252728"/>
+            <a:ext cx="8229600" cy="448056"/>
           </a:xfrm>
           <a:prstGeom prst="rect">
             <a:avLst/>
@@ -3359,13 +4249,6 @@
             <a:srgbClr val="E8F5E9"/>
           </a:solidFill>
           <a:ln/>
-          <a:effectLst>
-            <a:outerShdw sx="100000" sy="100000" kx="0" ky="0" algn="bl" rotWithShape="0" blurRad="50800" dist="25400" dir="8100000">
-              <a:srgbClr val="000000">
-                <a:alpha val="12000"/>
-              </a:srgbClr>
-            </a:outerShdw>
-          </a:effectLst>
         </p:spPr>
       </p:sp>
       <p:sp>
@@ -3376,8 +4259,8 @@
         </p:nvSpPr>
         <p:spPr>
           <a:xfrm>
-            <a:off x="457200" y="1502229"/>
-            <a:ext cx="45720" cy="560397"/>
+            <a:off x="457200" y="1252728"/>
+            <a:ext cx="45720" cy="448056"/>
           </a:xfrm>
           <a:prstGeom prst="rect">
             <a:avLst/>
@@ -3396,8 +4279,8 @@
         </p:nvSpPr>
         <p:spPr>
           <a:xfrm>
-            <a:off x="685800" y="1502229"/>
-            <a:ext cx="7818120" cy="560397"/>
+            <a:off x="640080" y="1252728"/>
+            <a:ext cx="7863840" cy="448056"/>
           </a:xfrm>
           <a:prstGeom prst="rect">
             <a:avLst/>
@@ -3413,7 +4296,7 @@
               <a:buNone/>
             </a:pPr>
             <a:r>
-              <a:rPr lang="en-US" sz="1200" dirty="0">
+              <a:rPr lang="en-US" sz="1100" dirty="0">
                 <a:solidFill>
                   <a:srgbClr val="1A1A2E"/>
                 </a:solidFill>
@@ -3421,9 +4304,9 @@
                 <a:ea typeface="Calibri" pitchFamily="34" charset="-122"/>
                 <a:cs typeface="Calibri" pitchFamily="34" charset="-120"/>
               </a:rPr>
-              <a:t>Chaque attribut non-clé dépend de TOUTE la PK, pas d'une partie</a:t>
-            </a:r>
-            <a:endParaRPr lang="en-US" sz="1200" dirty="0"/>
+              <a:t>ATOMICITE 1NF : chaque CELLULE contient 1 valeur indivisible</a:t>
+            </a:r>
+            <a:endParaRPr lang="en-US" sz="1100" dirty="0"/>
           </a:p>
         </p:txBody>
       </p:sp>
@@ -3435,8 +4318,8 @@
         </p:nvSpPr>
         <p:spPr>
           <a:xfrm>
-            <a:off x="457200" y="2090057"/>
-            <a:ext cx="8229600" cy="560397"/>
+            <a:off x="457200" y="1728216"/>
+            <a:ext cx="8229600" cy="448056"/>
           </a:xfrm>
           <a:prstGeom prst="rect">
             <a:avLst/>
@@ -3445,13 +4328,6 @@
             <a:srgbClr val="FFFFFF"/>
           </a:solidFill>
           <a:ln/>
-          <a:effectLst>
-            <a:outerShdw sx="100000" sy="100000" kx="0" ky="0" algn="bl" rotWithShape="0" blurRad="50800" dist="25400" dir="8100000">
-              <a:srgbClr val="000000">
-                <a:alpha val="12000"/>
-              </a:srgbClr>
-            </a:outerShdw>
-          </a:effectLst>
         </p:spPr>
       </p:sp>
       <p:sp>
@@ -3462,8 +4338,8 @@
         </p:nvSpPr>
         <p:spPr>
           <a:xfrm>
-            <a:off x="457200" y="2090057"/>
-            <a:ext cx="45720" cy="560397"/>
+            <a:off x="457200" y="1728216"/>
+            <a:ext cx="45720" cy="448056"/>
           </a:xfrm>
           <a:prstGeom prst="rect">
             <a:avLst/>
@@ -3482,8 +4358,8 @@
         </p:nvSpPr>
         <p:spPr>
           <a:xfrm>
-            <a:off x="685800" y="2090057"/>
-            <a:ext cx="7818120" cy="560397"/>
+            <a:off x="640080" y="1728216"/>
+            <a:ext cx="7863840" cy="448056"/>
           </a:xfrm>
           <a:prstGeom prst="rect">
             <a:avLst/>
@@ -3499,7 +4375,7 @@
               <a:buNone/>
             </a:pPr>
             <a:r>
-              <a:rPr lang="en-US" sz="1200" dirty="0">
+              <a:rPr lang="en-US" sz="1100" dirty="0">
                 <a:solidFill>
                   <a:srgbClr val="1A1A2E"/>
                 </a:solidFill>
@@ -3507,9 +4383,9 @@
                 <a:ea typeface="Calibri" pitchFamily="34" charset="-122"/>
                 <a:cs typeface="Calibri" pitchFamily="34" charset="-120"/>
               </a:rPr>
-              <a:t>Exemple : GENRE_ARTISTE(→#id_genre, →#id_artiste, nom_genre)</a:t>
-            </a:r>
-            <a:endParaRPr lang="en-US" sz="1200" dirty="0"/>
+              <a:t>  → Concerne la STRUCTURE des tables</a:t>
+            </a:r>
+            <a:endParaRPr lang="en-US" sz="1100" dirty="0"/>
           </a:p>
         </p:txBody>
       </p:sp>
@@ -3521,8 +4397,8 @@
         </p:nvSpPr>
         <p:spPr>
           <a:xfrm>
-            <a:off x="457200" y="2677886"/>
-            <a:ext cx="8229600" cy="560397"/>
+            <a:off x="457200" y="2203704"/>
+            <a:ext cx="8229600" cy="448056"/>
           </a:xfrm>
           <a:prstGeom prst="rect">
             <a:avLst/>
@@ -3531,13 +4407,6 @@
             <a:srgbClr val="E8F5E9"/>
           </a:solidFill>
           <a:ln/>
-          <a:effectLst>
-            <a:outerShdw sx="100000" sy="100000" kx="0" ky="0" algn="bl" rotWithShape="0" blurRad="50800" dist="25400" dir="8100000">
-              <a:srgbClr val="000000">
-                <a:alpha val="12000"/>
-              </a:srgbClr>
-            </a:outerShdw>
-          </a:effectLst>
         </p:spPr>
       </p:sp>
       <p:sp>
@@ -3548,8 +4417,8 @@
         </p:nvSpPr>
         <p:spPr>
           <a:xfrm>
-            <a:off x="457200" y="2677886"/>
-            <a:ext cx="45720" cy="560397"/>
+            <a:off x="457200" y="2203704"/>
+            <a:ext cx="45720" cy="448056"/>
           </a:xfrm>
           <a:prstGeom prst="rect">
             <a:avLst/>
@@ -3568,8 +4437,8 @@
         </p:nvSpPr>
         <p:spPr>
           <a:xfrm>
-            <a:off x="685800" y="2677886"/>
-            <a:ext cx="7818120" cy="560397"/>
+            <a:off x="640080" y="2203704"/>
+            <a:ext cx="7863840" cy="448056"/>
           </a:xfrm>
           <a:prstGeom prst="rect">
             <a:avLst/>
@@ -3585,7 +4454,7 @@
               <a:buNone/>
             </a:pPr>
             <a:r>
-              <a:rPr lang="en-US" sz="1200" dirty="0">
+              <a:rPr lang="en-US" sz="1100" dirty="0">
                 <a:solidFill>
                   <a:srgbClr val="1A1A2E"/>
                 </a:solidFill>
@@ -3593,9 +4462,9 @@
                 <a:ea typeface="Calibri" pitchFamily="34" charset="-122"/>
                 <a:cs typeface="Calibri" pitchFamily="34" charset="-120"/>
               </a:rPr>
-              <a:t>❌ nom_genre dépend UNIQUEMENT de id_genre (pas du couple)</a:t>
-            </a:r>
-            <a:endParaRPr lang="en-US" sz="1200" dirty="0"/>
+              <a:t>  → 'rock, jazz' dans 1 cellule = violation 1NF</a:t>
+            </a:r>
+            <a:endParaRPr lang="en-US" sz="1100" dirty="0"/>
           </a:p>
         </p:txBody>
       </p:sp>
@@ -3607,8 +4476,8 @@
         </p:nvSpPr>
         <p:spPr>
           <a:xfrm>
-            <a:off x="457200" y="3265714"/>
-            <a:ext cx="8229600" cy="560397"/>
+            <a:off x="457200" y="2679192"/>
+            <a:ext cx="8229600" cy="448056"/>
           </a:xfrm>
           <a:prstGeom prst="rect">
             <a:avLst/>
@@ -3617,13 +4486,6 @@
             <a:srgbClr val="FFFFFF"/>
           </a:solidFill>
           <a:ln/>
-          <a:effectLst>
-            <a:outerShdw sx="100000" sy="100000" kx="0" ky="0" algn="bl" rotWithShape="0" blurRad="50800" dist="25400" dir="8100000">
-              <a:srgbClr val="000000">
-                <a:alpha val="12000"/>
-              </a:srgbClr>
-            </a:outerShdw>
-          </a:effectLst>
         </p:spPr>
       </p:sp>
       <p:sp>
@@ -3634,8 +4496,8 @@
         </p:nvSpPr>
         <p:spPr>
           <a:xfrm>
-            <a:off x="457200" y="3265714"/>
-            <a:ext cx="45720" cy="560397"/>
+            <a:off x="457200" y="2679192"/>
+            <a:ext cx="45720" cy="448056"/>
           </a:xfrm>
           <a:prstGeom prst="rect">
             <a:avLst/>
@@ -3654,8 +4516,8 @@
         </p:nvSpPr>
         <p:spPr>
           <a:xfrm>
-            <a:off x="685800" y="3265714"/>
-            <a:ext cx="7818120" cy="560397"/>
+            <a:off x="640080" y="2679192"/>
+            <a:ext cx="7863840" cy="448056"/>
           </a:xfrm>
           <a:prstGeom prst="rect">
             <a:avLst/>
@@ -3671,7 +4533,7 @@
               <a:buNone/>
             </a:pPr>
             <a:r>
-              <a:rPr lang="en-US" sz="1200" dirty="0">
+              <a:rPr lang="en-US" sz="1100" dirty="0">
                 <a:solidFill>
                   <a:srgbClr val="1A1A2E"/>
                 </a:solidFill>
@@ -3679,9 +4541,9 @@
                 <a:ea typeface="Calibri" pitchFamily="34" charset="-122"/>
                 <a:cs typeface="Calibri" pitchFamily="34" charset="-120"/>
               </a:rPr>
-              <a:t>→ Violation 2NF : extraire nom_genre dans la table GENRE</a:t>
-            </a:r>
-            <a:endParaRPr lang="en-US" sz="1200" dirty="0"/>
+              <a:t>ATOMICITE ACID : une TRANSACTION est tout-ou-rien</a:t>
+            </a:r>
+            <a:endParaRPr lang="en-US" sz="1100" dirty="0"/>
           </a:p>
         </p:txBody>
       </p:sp>
@@ -3693,8 +4555,8 @@
         </p:nvSpPr>
         <p:spPr>
           <a:xfrm>
-            <a:off x="457200" y="3853543"/>
-            <a:ext cx="8229600" cy="560397"/>
+            <a:off x="457200" y="3154680"/>
+            <a:ext cx="8229600" cy="448056"/>
           </a:xfrm>
           <a:prstGeom prst="rect">
             <a:avLst/>
@@ -3703,13 +4565,6 @@
             <a:srgbClr val="E8F5E9"/>
           </a:solidFill>
           <a:ln/>
-          <a:effectLst>
-            <a:outerShdw sx="100000" sy="100000" kx="0" ky="0" algn="bl" rotWithShape="0" blurRad="50800" dist="25400" dir="8100000">
-              <a:srgbClr val="000000">
-                <a:alpha val="12000"/>
-              </a:srgbClr>
-            </a:outerShdw>
-          </a:effectLst>
         </p:spPr>
       </p:sp>
       <p:sp>
@@ -3720,8 +4575,8 @@
         </p:nvSpPr>
         <p:spPr>
           <a:xfrm>
-            <a:off x="457200" y="3853543"/>
-            <a:ext cx="45720" cy="560397"/>
+            <a:off x="457200" y="3154680"/>
+            <a:ext cx="45720" cy="448056"/>
           </a:xfrm>
           <a:prstGeom prst="rect">
             <a:avLst/>
@@ -3740,8 +4595,8 @@
         </p:nvSpPr>
         <p:spPr>
           <a:xfrm>
-            <a:off x="685800" y="3853543"/>
-            <a:ext cx="7818120" cy="560397"/>
+            <a:off x="640080" y="3154680"/>
+            <a:ext cx="7863840" cy="448056"/>
           </a:xfrm>
           <a:prstGeom prst="rect">
             <a:avLst/>
@@ -3757,7 +4612,7 @@
               <a:buNone/>
             </a:pPr>
             <a:r>
-              <a:rPr lang="en-US" sz="1200" dirty="0">
+              <a:rPr lang="en-US" sz="1100" dirty="0">
                 <a:solidFill>
                   <a:srgbClr val="1A1A2E"/>
                 </a:solidFill>
@@ -3765,9 +4620,9 @@
                 <a:ea typeface="Calibri" pitchFamily="34" charset="-122"/>
                 <a:cs typeface="Calibri" pitchFamily="34" charset="-120"/>
               </a:rPr>
-              <a:t>✅ GENRE_ARTISTE(→#id_genre, →#id_artiste) — sans nom_genre</a:t>
-            </a:r>
-            <a:endParaRPr lang="en-US" sz="1200" dirty="0"/>
+              <a:t>  → Concerne les OPERATIONS (INSERT, UPDATE, DELETE)</a:t>
+            </a:r>
+            <a:endParaRPr lang="en-US" sz="1100" dirty="0"/>
           </a:p>
         </p:txBody>
       </p:sp>
@@ -3779,8 +4634,8 @@
         </p:nvSpPr>
         <p:spPr>
           <a:xfrm>
-            <a:off x="457200" y="4441371"/>
-            <a:ext cx="8229600" cy="560397"/>
+            <a:off x="457200" y="3630168"/>
+            <a:ext cx="8229600" cy="448056"/>
           </a:xfrm>
           <a:prstGeom prst="rect">
             <a:avLst/>
@@ -3789,13 +4644,6 @@
             <a:srgbClr val="FFFFFF"/>
           </a:solidFill>
           <a:ln/>
-          <a:effectLst>
-            <a:outerShdw sx="100000" sy="100000" kx="0" ky="0" algn="bl" rotWithShape="0" blurRad="50800" dist="25400" dir="8100000">
-              <a:srgbClr val="000000">
-                <a:alpha val="12000"/>
-              </a:srgbClr>
-            </a:outerShdw>
-          </a:effectLst>
         </p:spPr>
       </p:sp>
       <p:sp>
@@ -3806,8 +4654,8 @@
         </p:nvSpPr>
         <p:spPr>
           <a:xfrm>
-            <a:off x="457200" y="4441371"/>
-            <a:ext cx="45720" cy="560397"/>
+            <a:off x="457200" y="3630168"/>
+            <a:ext cx="45720" cy="448056"/>
           </a:xfrm>
           <a:prstGeom prst="rect">
             <a:avLst/>
@@ -3826,8 +4674,8 @@
         </p:nvSpPr>
         <p:spPr>
           <a:xfrm>
-            <a:off x="685800" y="4441371"/>
-            <a:ext cx="7818120" cy="560397"/>
+            <a:off x="640080" y="3630168"/>
+            <a:ext cx="7863840" cy="448056"/>
           </a:xfrm>
           <a:prstGeom prst="rect">
             <a:avLst/>
@@ -3843,7 +4691,7 @@
               <a:buNone/>
             </a:pPr>
             <a:r>
-              <a:rPr lang="en-US" sz="1200" dirty="0">
+              <a:rPr lang="en-US" sz="1100" dirty="0">
                 <a:solidFill>
                   <a:srgbClr val="1A1A2E"/>
                 </a:solidFill>
@@ -3851,9 +4699,88 @@
                 <a:ea typeface="Calibri" pitchFamily="34" charset="-122"/>
                 <a:cs typeface="Calibri" pitchFamily="34" charset="-120"/>
               </a:rPr>
-              <a:t>Si PK simple (1 seul champ) → 2NF automatiquement respectée</a:t>
-            </a:r>
-            <a:endParaRPr lang="en-US" sz="1200" dirty="0"/>
+              <a:t>  → BEGIN → operations → COMMIT (tout) ou ROLLBACK (rien)</a:t>
+            </a:r>
+            <a:endParaRPr lang="en-US" sz="1100" dirty="0"/>
+          </a:p>
+        </p:txBody>
+      </p:sp>
+      <p:sp>
+        <p:nvSpPr>
+          <p:cNvPr id="25" name="Shape 23"/>
+          <p:cNvSpPr/>
+          <p:nvPr/>
+        </p:nvSpPr>
+        <p:spPr>
+          <a:xfrm>
+            <a:off x="457200" y="4105656"/>
+            <a:ext cx="8229600" cy="448056"/>
+          </a:xfrm>
+          <a:prstGeom prst="rect">
+            <a:avLst/>
+          </a:prstGeom>
+          <a:solidFill>
+            <a:srgbClr val="E8F5E9"/>
+          </a:solidFill>
+          <a:ln/>
+        </p:spPr>
+      </p:sp>
+      <p:sp>
+        <p:nvSpPr>
+          <p:cNvPr id="26" name="Shape 24"/>
+          <p:cNvSpPr/>
+          <p:nvPr/>
+        </p:nvSpPr>
+        <p:spPr>
+          <a:xfrm>
+            <a:off x="457200" y="4105656"/>
+            <a:ext cx="45720" cy="448056"/>
+          </a:xfrm>
+          <a:prstGeom prst="rect">
+            <a:avLst/>
+          </a:prstGeom>
+          <a:solidFill>
+            <a:srgbClr val="2E7D32"/>
+          </a:solidFill>
+          <a:ln/>
+        </p:spPr>
+      </p:sp>
+      <p:sp>
+        <p:nvSpPr>
+          <p:cNvPr id="27" name="Text 25"/>
+          <p:cNvSpPr/>
+          <p:nvPr/>
+        </p:nvSpPr>
+        <p:spPr>
+          <a:xfrm>
+            <a:off x="640080" y="4105656"/>
+            <a:ext cx="7863840" cy="448056"/>
+          </a:xfrm>
+          <a:prstGeom prst="rect">
+            <a:avLst/>
+          </a:prstGeom>
+          <a:noFill/>
+          <a:ln/>
+        </p:spPr>
+        <p:txBody>
+          <a:bodyPr wrap="square" lIns="0" tIns="0" rIns="0" bIns="0" rtlCol="0" anchor="ctr"/>
+          <a:lstStyle/>
+          <a:p>
+            <a:pPr indent="0" marL="0">
+              <a:buNone/>
+            </a:pPr>
+            <a:r>
+              <a:rPr lang="en-US" sz="1100" dirty="0">
+                <a:solidFill>
+                  <a:srgbClr val="1A1A2E"/>
+                </a:solidFill>
+                <a:latin typeface="Calibri" pitchFamily="34" charset="0"/>
+                <a:ea typeface="Calibri" pitchFamily="34" charset="-122"/>
+                <a:cs typeface="Calibri" pitchFamily="34" charset="-120"/>
+              </a:rPr>
+              <a:t>Meme mot, sens TOTALEMENT DIFFERENT. Question d'examen classique !</a:t>
+            </a:r>
+            <a:endParaRPr lang="en-US" sz="1100" dirty="0"/>
           </a:p>
         </p:txBody>
       </p:sp>
@@ -3918,7 +4845,7 @@
         <p:spPr>
           <a:xfrm>
             <a:off x="457200" y="182880"/>
-            <a:ext cx="8229600" cy="594360"/>
+            <a:ext cx="8229600" cy="502920"/>
           </a:xfrm>
           <a:prstGeom prst="rect">
             <a:avLst/>
@@ -3934,7 +4861,7 @@
               <a:buNone/>
             </a:pPr>
             <a:r>
-              <a:rPr lang="en-US" sz="2400" b="1" dirty="0">
+              <a:rPr lang="en-US" sz="2100" b="1" dirty="0">
                 <a:solidFill>
                   <a:srgbClr val="1B5E20"/>
                 </a:solidFill>
@@ -3942,9 +4869,9 @@
                 <a:ea typeface="Trebuchet MS" pitchFamily="34" charset="-122"/>
                 <a:cs typeface="Trebuchet MS" pitchFamily="34" charset="-120"/>
               </a:rPr>
-              <a:t>3NF : Pas de dépendance transitive</a:t>
-            </a:r>
-            <a:endParaRPr lang="en-US" sz="2400" dirty="0"/>
+              <a:t>2NF : Dependance totale a la PK</a:t>
+            </a:r>
+            <a:endParaRPr lang="en-US" sz="2100" dirty="0"/>
           </a:p>
         </p:txBody>
       </p:sp>
@@ -3956,8 +4883,8 @@
         </p:nvSpPr>
         <p:spPr>
           <a:xfrm>
-            <a:off x="457200" y="914400"/>
-            <a:ext cx="8229600" cy="560397"/>
+            <a:off x="457200" y="777240"/>
+            <a:ext cx="8229600" cy="448056"/>
           </a:xfrm>
           <a:prstGeom prst="rect">
             <a:avLst/>
@@ -3966,13 +4893,6 @@
             <a:srgbClr val="FFFFFF"/>
           </a:solidFill>
           <a:ln/>
-          <a:effectLst>
-            <a:outerShdw sx="100000" sy="100000" kx="0" ky="0" algn="bl" rotWithShape="0" blurRad="50800" dist="25400" dir="8100000">
-              <a:srgbClr val="000000">
-                <a:alpha val="12000"/>
-              </a:srgbClr>
-            </a:outerShdw>
-          </a:effectLst>
         </p:spPr>
       </p:sp>
       <p:sp>
@@ -3983,8 +4903,8 @@
         </p:nvSpPr>
         <p:spPr>
           <a:xfrm>
-            <a:off x="457200" y="914400"/>
-            <a:ext cx="45720" cy="560397"/>
+            <a:off x="457200" y="777240"/>
+            <a:ext cx="45720" cy="448056"/>
           </a:xfrm>
           <a:prstGeom prst="rect">
             <a:avLst/>
@@ -4003,8 +4923,8 @@
         </p:nvSpPr>
         <p:spPr>
           <a:xfrm>
-            <a:off x="685800" y="914400"/>
-            <a:ext cx="7818120" cy="560397"/>
+            <a:off x="640080" y="777240"/>
+            <a:ext cx="7863840" cy="448056"/>
           </a:xfrm>
           <a:prstGeom prst="rect">
             <a:avLst/>
@@ -4020,7 +4940,7 @@
               <a:buNone/>
             </a:pPr>
             <a:r>
-              <a:rPr lang="en-US" sz="1200" dirty="0">
+              <a:rPr lang="en-US" sz="1100" dirty="0">
                 <a:solidFill>
                   <a:srgbClr val="1A1A2E"/>
                 </a:solidFill>
@@ -4028,9 +4948,9 @@
                 <a:ea typeface="Calibri" pitchFamily="34" charset="-122"/>
                 <a:cs typeface="Calibri" pitchFamily="34" charset="-120"/>
               </a:rPr>
-              <a:t>Aucun attribut non-clé ne dépend d'un AUTRE attribut non-clé</a:t>
-            </a:r>
-            <a:endParaRPr lang="en-US" sz="1200" dirty="0"/>
+              <a:t>Concerne UNIQUEMENT les tables avec PK COMPOSEE</a:t>
+            </a:r>
+            <a:endParaRPr lang="en-US" sz="1100" dirty="0"/>
           </a:p>
         </p:txBody>
       </p:sp>
@@ -4042,8 +4962,8 @@
         </p:nvSpPr>
         <p:spPr>
           <a:xfrm>
-            <a:off x="457200" y="1502229"/>
-            <a:ext cx="8229600" cy="560397"/>
+            <a:off x="457200" y="1252728"/>
+            <a:ext cx="8229600" cy="448056"/>
           </a:xfrm>
           <a:prstGeom prst="rect">
             <a:avLst/>
@@ -4052,13 +4972,6 @@
             <a:srgbClr val="E8F5E9"/>
           </a:solidFill>
           <a:ln/>
-          <a:effectLst>
-            <a:outerShdw sx="100000" sy="100000" kx="0" ky="0" algn="bl" rotWithShape="0" blurRad="50800" dist="25400" dir="8100000">
-              <a:srgbClr val="000000">
-                <a:alpha val="12000"/>
-              </a:srgbClr>
-            </a:outerShdw>
-          </a:effectLst>
         </p:spPr>
       </p:sp>
       <p:sp>
@@ -4069,8 +4982,8 @@
         </p:nvSpPr>
         <p:spPr>
           <a:xfrm>
-            <a:off x="457200" y="1502229"/>
-            <a:ext cx="45720" cy="560397"/>
+            <a:off x="457200" y="1252728"/>
+            <a:ext cx="45720" cy="448056"/>
           </a:xfrm>
           <a:prstGeom prst="rect">
             <a:avLst/>
@@ -4089,8 +5002,8 @@
         </p:nvSpPr>
         <p:spPr>
           <a:xfrm>
-            <a:off x="685800" y="1502229"/>
-            <a:ext cx="7818120" cy="560397"/>
+            <a:off x="640080" y="1252728"/>
+            <a:ext cx="7863840" cy="448056"/>
           </a:xfrm>
           <a:prstGeom prst="rect">
             <a:avLst/>
@@ -4106,7 +5019,7 @@
               <a:buNone/>
             </a:pPr>
             <a:r>
-              <a:rPr lang="en-US" sz="1200" dirty="0">
+              <a:rPr lang="en-US" sz="1100" dirty="0">
                 <a:solidFill>
                   <a:srgbClr val="1A1A2E"/>
                 </a:solidFill>
@@ -4114,9 +5027,9 @@
                 <a:ea typeface="Calibri" pitchFamily="34" charset="-122"/>
                 <a:cs typeface="Calibri" pitchFamily="34" charset="-120"/>
               </a:rPr>
-              <a:t>❌ SESSION(id_session, id_salle, nom_salle, tarif_salle)</a:t>
-            </a:r>
-            <a:endParaRPr lang="en-US" sz="1200" dirty="0"/>
+              <a:t>Chaque attribut non-cle depend de TOUTE la PK</a:t>
+            </a:r>
+            <a:endParaRPr lang="en-US" sz="1100" dirty="0"/>
           </a:p>
         </p:txBody>
       </p:sp>
@@ -4128,8 +5041,8 @@
         </p:nvSpPr>
         <p:spPr>
           <a:xfrm>
-            <a:off x="457200" y="2090057"/>
-            <a:ext cx="8229600" cy="560397"/>
+            <a:off x="457200" y="1728216"/>
+            <a:ext cx="8229600" cy="448056"/>
           </a:xfrm>
           <a:prstGeom prst="rect">
             <a:avLst/>
@@ -4138,13 +5051,6 @@
             <a:srgbClr val="FFFFFF"/>
           </a:solidFill>
           <a:ln/>
-          <a:effectLst>
-            <a:outerShdw sx="100000" sy="100000" kx="0" ky="0" algn="bl" rotWithShape="0" blurRad="50800" dist="25400" dir="8100000">
-              <a:srgbClr val="000000">
-                <a:alpha val="12000"/>
-              </a:srgbClr>
-            </a:outerShdw>
-          </a:effectLst>
         </p:spPr>
       </p:sp>
       <p:sp>
@@ -4155,8 +5061,8 @@
         </p:nvSpPr>
         <p:spPr>
           <a:xfrm>
-            <a:off x="457200" y="2090057"/>
-            <a:ext cx="45720" cy="560397"/>
+            <a:off x="457200" y="1728216"/>
+            <a:ext cx="45720" cy="448056"/>
           </a:xfrm>
           <a:prstGeom prst="rect">
             <a:avLst/>
@@ -4175,8 +5081,8 @@
         </p:nvSpPr>
         <p:spPr>
           <a:xfrm>
-            <a:off x="685800" y="2090057"/>
-            <a:ext cx="7818120" cy="560397"/>
+            <a:off x="640080" y="1728216"/>
+            <a:ext cx="7863840" cy="448056"/>
           </a:xfrm>
           <a:prstGeom prst="rect">
             <a:avLst/>
@@ -4192,7 +5098,7 @@
               <a:buNone/>
             </a:pPr>
             <a:r>
-              <a:rPr lang="en-US" sz="1200" dirty="0">
+              <a:rPr lang="en-US" sz="1100" dirty="0">
                 <a:solidFill>
                   <a:srgbClr val="1A1A2E"/>
                 </a:solidFill>
@@ -4200,9 +5106,9 @@
                 <a:ea typeface="Calibri" pitchFamily="34" charset="-122"/>
                 <a:cs typeface="Calibri" pitchFamily="34" charset="-120"/>
               </a:rPr>
-              <a:t>id_session → id_salle → nom_salle (transitif via id_salle)</a:t>
-            </a:r>
-            <a:endParaRPr lang="en-US" sz="1200" dirty="0"/>
+              <a:t>Exemple : GENRE_ARTISTE(id_genre#, id_artiste#, nom_genre)</a:t>
+            </a:r>
+            <a:endParaRPr lang="en-US" sz="1100" dirty="0"/>
           </a:p>
         </p:txBody>
       </p:sp>
@@ -4214,8 +5120,8 @@
         </p:nvSpPr>
         <p:spPr>
           <a:xfrm>
-            <a:off x="457200" y="2677886"/>
-            <a:ext cx="8229600" cy="560397"/>
+            <a:off x="457200" y="2203704"/>
+            <a:ext cx="8229600" cy="448056"/>
           </a:xfrm>
           <a:prstGeom prst="rect">
             <a:avLst/>
@@ -4224,13 +5130,6 @@
             <a:srgbClr val="E8F5E9"/>
           </a:solidFill>
           <a:ln/>
-          <a:effectLst>
-            <a:outerShdw sx="100000" sy="100000" kx="0" ky="0" algn="bl" rotWithShape="0" blurRad="50800" dist="25400" dir="8100000">
-              <a:srgbClr val="000000">
-                <a:alpha val="12000"/>
-              </a:srgbClr>
-            </a:outerShdw>
-          </a:effectLst>
         </p:spPr>
       </p:sp>
       <p:sp>
@@ -4241,8 +5140,8 @@
         </p:nvSpPr>
         <p:spPr>
           <a:xfrm>
-            <a:off x="457200" y="2677886"/>
-            <a:ext cx="45720" cy="560397"/>
+            <a:off x="457200" y="2203704"/>
+            <a:ext cx="45720" cy="448056"/>
           </a:xfrm>
           <a:prstGeom prst="rect">
             <a:avLst/>
@@ -4261,8 +5160,8 @@
         </p:nvSpPr>
         <p:spPr>
           <a:xfrm>
-            <a:off x="685800" y="2677886"/>
-            <a:ext cx="7818120" cy="560397"/>
+            <a:off x="640080" y="2203704"/>
+            <a:ext cx="7863840" cy="448056"/>
           </a:xfrm>
           <a:prstGeom prst="rect">
             <a:avLst/>
@@ -4278,7 +5177,7 @@
               <a:buNone/>
             </a:pPr>
             <a:r>
-              <a:rPr lang="en-US" sz="1200" dirty="0">
+              <a:rPr lang="en-US" sz="1100" dirty="0">
                 <a:solidFill>
                   <a:srgbClr val="1A1A2E"/>
                 </a:solidFill>
@@ -4286,9 +5185,9 @@
                 <a:ea typeface="Calibri" pitchFamily="34" charset="-122"/>
                 <a:cs typeface="Calibri" pitchFamily="34" charset="-120"/>
               </a:rPr>
-              <a:t>→ nom_salle et tarif_salle doivent rester dans TABLE SALLE</a:t>
-            </a:r>
-            <a:endParaRPr lang="en-US" sz="1200" dirty="0"/>
+              <a:t>  nom_genre depend UNIQUEMENT de id_genre (pas du couple)</a:t>
+            </a:r>
+            <a:endParaRPr lang="en-US" sz="1100" dirty="0"/>
           </a:p>
         </p:txBody>
       </p:sp>
@@ -4300,8 +5199,8 @@
         </p:nvSpPr>
         <p:spPr>
           <a:xfrm>
-            <a:off x="457200" y="3265714"/>
-            <a:ext cx="8229600" cy="560397"/>
+            <a:off x="457200" y="2679192"/>
+            <a:ext cx="8229600" cy="448056"/>
           </a:xfrm>
           <a:prstGeom prst="rect">
             <a:avLst/>
@@ -4310,13 +5209,6 @@
             <a:srgbClr val="FFFFFF"/>
           </a:solidFill>
           <a:ln/>
-          <a:effectLst>
-            <a:outerShdw sx="100000" sy="100000" kx="0" ky="0" algn="bl" rotWithShape="0" blurRad="50800" dist="25400" dir="8100000">
-              <a:srgbClr val="000000">
-                <a:alpha val="12000"/>
-              </a:srgbClr>
-            </a:outerShdw>
-          </a:effectLst>
         </p:spPr>
       </p:sp>
       <p:sp>
@@ -4327,8 +5219,8 @@
         </p:nvSpPr>
         <p:spPr>
           <a:xfrm>
-            <a:off x="457200" y="3265714"/>
-            <a:ext cx="45720" cy="560397"/>
+            <a:off x="457200" y="2679192"/>
+            <a:ext cx="45720" cy="448056"/>
           </a:xfrm>
           <a:prstGeom prst="rect">
             <a:avLst/>
@@ -4347,8 +5239,8 @@
         </p:nvSpPr>
         <p:spPr>
           <a:xfrm>
-            <a:off x="685800" y="3265714"/>
-            <a:ext cx="7818120" cy="560397"/>
+            <a:off x="640080" y="2679192"/>
+            <a:ext cx="7863840" cy="448056"/>
           </a:xfrm>
           <a:prstGeom prst="rect">
             <a:avLst/>
@@ -4364,7 +5256,7 @@
               <a:buNone/>
             </a:pPr>
             <a:r>
-              <a:rPr lang="en-US" sz="1200" dirty="0">
+              <a:rPr lang="en-US" sz="1100" dirty="0">
                 <a:solidFill>
                   <a:srgbClr val="1A1A2E"/>
                 </a:solidFill>
@@ -4372,9 +5264,9 @@
                 <a:ea typeface="Calibri" pitchFamily="34" charset="-122"/>
                 <a:cs typeface="Calibri" pitchFamily="34" charset="-120"/>
               </a:rPr>
-              <a:t>✅ SESSION(id_session, ..., →id_salle) — sans nom_salle</a:t>
-            </a:r>
-            <a:endParaRPr lang="en-US" sz="1200" dirty="0"/>
+              <a:t>  → Violation 2NF → extraire nom_genre dans table GENRE</a:t>
+            </a:r>
+            <a:endParaRPr lang="en-US" sz="1100" dirty="0"/>
           </a:p>
         </p:txBody>
       </p:sp>
@@ -4386,8 +5278,8 @@
         </p:nvSpPr>
         <p:spPr>
           <a:xfrm>
-            <a:off x="457200" y="3853543"/>
-            <a:ext cx="8229600" cy="560397"/>
+            <a:off x="457200" y="3154680"/>
+            <a:ext cx="8229600" cy="448056"/>
           </a:xfrm>
           <a:prstGeom prst="rect">
             <a:avLst/>
@@ -4396,13 +5288,6 @@
             <a:srgbClr val="E8F5E9"/>
           </a:solidFill>
           <a:ln/>
-          <a:effectLst>
-            <a:outerShdw sx="100000" sy="100000" kx="0" ky="0" algn="bl" rotWithShape="0" blurRad="50800" dist="25400" dir="8100000">
-              <a:srgbClr val="000000">
-                <a:alpha val="12000"/>
-              </a:srgbClr>
-            </a:outerShdw>
-          </a:effectLst>
         </p:spPr>
       </p:sp>
       <p:sp>
@@ -4413,8 +5298,8 @@
         </p:nvSpPr>
         <p:spPr>
           <a:xfrm>
-            <a:off x="457200" y="3853543"/>
-            <a:ext cx="45720" cy="560397"/>
+            <a:off x="457200" y="3154680"/>
+            <a:ext cx="45720" cy="448056"/>
           </a:xfrm>
           <a:prstGeom prst="rect">
             <a:avLst/>
@@ -4433,8 +5318,8 @@
         </p:nvSpPr>
         <p:spPr>
           <a:xfrm>
-            <a:off x="685800" y="3853543"/>
-            <a:ext cx="7818120" cy="560397"/>
+            <a:off x="640080" y="3154680"/>
+            <a:ext cx="7863840" cy="448056"/>
           </a:xfrm>
           <a:prstGeom prst="rect">
             <a:avLst/>
@@ -4450,7 +5335,7 @@
               <a:buNone/>
             </a:pPr>
             <a:r>
-              <a:rPr lang="en-US" sz="1200" dirty="0">
+              <a:rPr lang="en-US" sz="1100" dirty="0">
                 <a:solidFill>
                   <a:srgbClr val="1A1A2E"/>
                 </a:solidFill>
@@ -4458,9 +5343,9 @@
                 <a:ea typeface="Calibri" pitchFamily="34" charset="-122"/>
                 <a:cs typeface="Calibri" pitchFamily="34" charset="-120"/>
               </a:rPr>
-              <a:t>Règle mnémotechnique : chaque attribut dépend de la clé,</a:t>
-            </a:r>
-            <a:endParaRPr lang="en-US" sz="1200" dirty="0"/>
+              <a:t>CORRECTION : GENRE_ARTISTE(id_genre#, id_artiste#) sans nom_genre</a:t>
+            </a:r>
+            <a:endParaRPr lang="en-US" sz="1100" dirty="0"/>
           </a:p>
         </p:txBody>
       </p:sp>
@@ -4472,8 +5357,8 @@
         </p:nvSpPr>
         <p:spPr>
           <a:xfrm>
-            <a:off x="457200" y="4441371"/>
-            <a:ext cx="8229600" cy="560397"/>
+            <a:off x="457200" y="3630168"/>
+            <a:ext cx="8229600" cy="448056"/>
           </a:xfrm>
           <a:prstGeom prst="rect">
             <a:avLst/>
@@ -4482,13 +5367,6 @@
             <a:srgbClr val="FFFFFF"/>
           </a:solidFill>
           <a:ln/>
-          <a:effectLst>
-            <a:outerShdw sx="100000" sy="100000" kx="0" ky="0" algn="bl" rotWithShape="0" blurRad="50800" dist="25400" dir="8100000">
-              <a:srgbClr val="000000">
-                <a:alpha val="12000"/>
-              </a:srgbClr>
-            </a:outerShdw>
-          </a:effectLst>
         </p:spPr>
       </p:sp>
       <p:sp>
@@ -4499,8 +5377,8 @@
         </p:nvSpPr>
         <p:spPr>
           <a:xfrm>
-            <a:off x="457200" y="4441371"/>
-            <a:ext cx="45720" cy="560397"/>
+            <a:off x="457200" y="3630168"/>
+            <a:ext cx="45720" cy="448056"/>
           </a:xfrm>
           <a:prstGeom prst="rect">
             <a:avLst/>
@@ -4519,8 +5397,8 @@
         </p:nvSpPr>
         <p:spPr>
           <a:xfrm>
-            <a:off x="685800" y="4441371"/>
-            <a:ext cx="7818120" cy="560397"/>
+            <a:off x="640080" y="3630168"/>
+            <a:ext cx="7863840" cy="448056"/>
           </a:xfrm>
           <a:prstGeom prst="rect">
             <a:avLst/>
@@ -4536,7 +5414,7 @@
               <a:buNone/>
             </a:pPr>
             <a:r>
-              <a:rPr lang="en-US" sz="1200" dirty="0">
+              <a:rPr lang="en-US" sz="1100" dirty="0">
                 <a:solidFill>
                   <a:srgbClr val="1A1A2E"/>
                 </a:solidFill>
@@ -4544,9 +5422,9 @@
                 <a:ea typeface="Calibri" pitchFamily="34" charset="-122"/>
                 <a:cs typeface="Calibri" pitchFamily="34" charset="-120"/>
               </a:rPr>
-              <a:t>de TOUTE la clé, et RIEN QUE de la clé</a:t>
-            </a:r>
-            <a:endParaRPr lang="en-US" sz="1200" dirty="0"/>
+              <a:t>Si PK simple (1 seul champ) → 2NF automatiquement respectee</a:t>
+            </a:r>
+            <a:endParaRPr lang="en-US" sz="1100" dirty="0"/>
           </a:p>
         </p:txBody>
       </p:sp>
@@ -4611,7 +5489,7 @@
         <p:spPr>
           <a:xfrm>
             <a:off x="457200" y="182880"/>
-            <a:ext cx="8229600" cy="594360"/>
+            <a:ext cx="8229600" cy="502920"/>
           </a:xfrm>
           <a:prstGeom prst="rect">
             <a:avLst/>
@@ -4627,7 +5505,7 @@
               <a:buNone/>
             </a:pPr>
             <a:r>
-              <a:rPr lang="en-US" sz="2400" b="1" dirty="0">
+              <a:rPr lang="en-US" sz="2100" b="1" dirty="0">
                 <a:solidFill>
                   <a:srgbClr val="1B5E20"/>
                 </a:solidFill>
@@ -4635,9 +5513,9 @@
                 <a:ea typeface="Trebuchet MS" pitchFamily="34" charset="-122"/>
                 <a:cs typeface="Trebuchet MS" pitchFamily="34" charset="-120"/>
               </a:rPr>
-              <a:t>Vérification et dénormalisation</a:t>
-            </a:r>
-            <a:endParaRPr lang="en-US" sz="2400" dirty="0"/>
+              <a:t>3NF : Pas de dependance transitive</a:t>
+            </a:r>
+            <a:endParaRPr lang="en-US" sz="2100" dirty="0"/>
           </a:p>
         </p:txBody>
       </p:sp>
@@ -4649,8 +5527,8 @@
         </p:nvSpPr>
         <p:spPr>
           <a:xfrm>
-            <a:off x="457200" y="914400"/>
-            <a:ext cx="8229600" cy="560397"/>
+            <a:off x="457200" y="777240"/>
+            <a:ext cx="8229600" cy="448056"/>
           </a:xfrm>
           <a:prstGeom prst="rect">
             <a:avLst/>
@@ -4659,13 +5537,6 @@
             <a:srgbClr val="FFFFFF"/>
           </a:solidFill>
           <a:ln/>
-          <a:effectLst>
-            <a:outerShdw sx="100000" sy="100000" kx="0" ky="0" algn="bl" rotWithShape="0" blurRad="50800" dist="25400" dir="8100000">
-              <a:srgbClr val="000000">
-                <a:alpha val="12000"/>
-              </a:srgbClr>
-            </a:outerShdw>
-          </a:effectLst>
         </p:spPr>
       </p:sp>
       <p:sp>
@@ -4676,8 +5547,8 @@
         </p:nvSpPr>
         <p:spPr>
           <a:xfrm>
-            <a:off x="457200" y="914400"/>
-            <a:ext cx="45720" cy="560397"/>
+            <a:off x="457200" y="777240"/>
+            <a:ext cx="45720" cy="448056"/>
           </a:xfrm>
           <a:prstGeom prst="rect">
             <a:avLst/>
@@ -4696,8 +5567,8 @@
         </p:nvSpPr>
         <p:spPr>
           <a:xfrm>
-            <a:off x="685800" y="914400"/>
-            <a:ext cx="7818120" cy="560397"/>
+            <a:off x="640080" y="777240"/>
+            <a:ext cx="7863840" cy="448056"/>
           </a:xfrm>
           <a:prstGeom prst="rect">
             <a:avLst/>
@@ -4713,7 +5584,7 @@
               <a:buNone/>
             </a:pPr>
             <a:r>
-              <a:rPr lang="en-US" sz="1200" dirty="0">
+              <a:rPr lang="en-US" sz="1100" dirty="0">
                 <a:solidFill>
                   <a:srgbClr val="1A1A2E"/>
                 </a:solidFill>
@@ -4721,9 +5592,9 @@
                 <a:ea typeface="Calibri" pitchFamily="34" charset="-122"/>
                 <a:cs typeface="Calibri" pitchFamily="34" charset="-120"/>
               </a:rPr>
-              <a:t>Vérifier le MLD de SwissSound : est-il en 3NF ?</a:t>
-            </a:r>
-            <a:endParaRPr lang="en-US" sz="1200" dirty="0"/>
+              <a:t>Aucun attribut non-cle ne depend d'un AUTRE attribut non-cle</a:t>
+            </a:r>
+            <a:endParaRPr lang="en-US" sz="1100" dirty="0"/>
           </a:p>
         </p:txBody>
       </p:sp>
@@ -4735,8 +5606,8 @@
         </p:nvSpPr>
         <p:spPr>
           <a:xfrm>
-            <a:off x="457200" y="1502229"/>
-            <a:ext cx="8229600" cy="560397"/>
+            <a:off x="457200" y="1252728"/>
+            <a:ext cx="8229600" cy="448056"/>
           </a:xfrm>
           <a:prstGeom prst="rect">
             <a:avLst/>
@@ -4745,13 +5616,6 @@
             <a:srgbClr val="E8F5E9"/>
           </a:solidFill>
           <a:ln/>
-          <a:effectLst>
-            <a:outerShdw sx="100000" sy="100000" kx="0" ky="0" algn="bl" rotWithShape="0" blurRad="50800" dist="25400" dir="8100000">
-              <a:srgbClr val="000000">
-                <a:alpha val="12000"/>
-              </a:srgbClr>
-            </a:outerShdw>
-          </a:effectLst>
         </p:spPr>
       </p:sp>
       <p:sp>
@@ -4762,8 +5626,8 @@
         </p:nvSpPr>
         <p:spPr>
           <a:xfrm>
-            <a:off x="457200" y="1502229"/>
-            <a:ext cx="45720" cy="560397"/>
+            <a:off x="457200" y="1252728"/>
+            <a:ext cx="45720" cy="448056"/>
           </a:xfrm>
           <a:prstGeom prst="rect">
             <a:avLst/>
@@ -4782,8 +5646,8 @@
         </p:nvSpPr>
         <p:spPr>
           <a:xfrm>
-            <a:off x="685800" y="1502229"/>
-            <a:ext cx="7818120" cy="560397"/>
+            <a:off x="640080" y="1252728"/>
+            <a:ext cx="7863840" cy="448056"/>
           </a:xfrm>
           <a:prstGeom prst="rect">
             <a:avLst/>
@@ -4799,7 +5663,7 @@
               <a:buNone/>
             </a:pPr>
             <a:r>
-              <a:rPr lang="en-US" sz="1200" dirty="0">
+              <a:rPr lang="en-US" sz="1100" dirty="0">
                 <a:solidFill>
                   <a:srgbClr val="1A1A2E"/>
                 </a:solidFill>
@@ -4807,9 +5671,9 @@
                 <a:ea typeface="Calibri" pitchFamily="34" charset="-122"/>
                 <a:cs typeface="Calibri" pitchFamily="34" charset="-120"/>
               </a:rPr>
-              <a:t>Si oui (normalement car on a suivi les DF) → validé</a:t>
-            </a:r>
-            <a:endParaRPr lang="en-US" sz="1200" dirty="0"/>
+              <a:t>VIOLATION : SESSION(id_session, id_salle, nom_salle, tarif_salle)</a:t>
+            </a:r>
+            <a:endParaRPr lang="en-US" sz="1100" dirty="0"/>
           </a:p>
         </p:txBody>
       </p:sp>
@@ -4821,8 +5685,8 @@
         </p:nvSpPr>
         <p:spPr>
           <a:xfrm>
-            <a:off x="457200" y="2090057"/>
-            <a:ext cx="8229600" cy="560397"/>
+            <a:off x="457200" y="1728216"/>
+            <a:ext cx="8229600" cy="448056"/>
           </a:xfrm>
           <a:prstGeom prst="rect">
             <a:avLst/>
@@ -4831,13 +5695,6 @@
             <a:srgbClr val="FFFFFF"/>
           </a:solidFill>
           <a:ln/>
-          <a:effectLst>
-            <a:outerShdw sx="100000" sy="100000" kx="0" ky="0" algn="bl" rotWithShape="0" blurRad="50800" dist="25400" dir="8100000">
-              <a:srgbClr val="000000">
-                <a:alpha val="12000"/>
-              </a:srgbClr>
-            </a:outerShdw>
-          </a:effectLst>
         </p:spPr>
       </p:sp>
       <p:sp>
@@ -4848,8 +5705,8 @@
         </p:nvSpPr>
         <p:spPr>
           <a:xfrm>
-            <a:off x="457200" y="2090057"/>
-            <a:ext cx="45720" cy="560397"/>
+            <a:off x="457200" y="1728216"/>
+            <a:ext cx="45720" cy="448056"/>
           </a:xfrm>
           <a:prstGeom prst="rect">
             <a:avLst/>
@@ -4868,8 +5725,8 @@
         </p:nvSpPr>
         <p:spPr>
           <a:xfrm>
-            <a:off x="685800" y="2090057"/>
-            <a:ext cx="7818120" cy="560397"/>
+            <a:off x="640080" y="1728216"/>
+            <a:ext cx="7863840" cy="448056"/>
           </a:xfrm>
           <a:prstGeom prst="rect">
             <a:avLst/>
@@ -4885,7 +5742,7 @@
               <a:buNone/>
             </a:pPr>
             <a:r>
-              <a:rPr lang="en-US" sz="1200" dirty="0">
+              <a:rPr lang="en-US" sz="1100" dirty="0">
                 <a:solidFill>
                   <a:srgbClr val="1A1A2E"/>
                 </a:solidFill>
@@ -4893,9 +5750,9 @@
                 <a:ea typeface="Calibri" pitchFamily="34" charset="-122"/>
                 <a:cs typeface="Calibri" pitchFamily="34" charset="-120"/>
               </a:rPr>
-              <a:t>Si non → corriger en extrayant les attributs transitifs</a:t>
-            </a:r>
-            <a:endParaRPr lang="en-US" sz="1200" dirty="0"/>
+              <a:t>  id_session → id_salle → nom_salle (TRANSITIF)</a:t>
+            </a:r>
+            <a:endParaRPr lang="en-US" sz="1100" dirty="0"/>
           </a:p>
         </p:txBody>
       </p:sp>
@@ -4907,8 +5764,8 @@
         </p:nvSpPr>
         <p:spPr>
           <a:xfrm>
-            <a:off x="457200" y="2677886"/>
-            <a:ext cx="8229600" cy="560397"/>
+            <a:off x="457200" y="2203704"/>
+            <a:ext cx="8229600" cy="448056"/>
           </a:xfrm>
           <a:prstGeom prst="rect">
             <a:avLst/>
@@ -4917,13 +5774,6 @@
             <a:srgbClr val="E8F5E9"/>
           </a:solidFill>
           <a:ln/>
-          <a:effectLst>
-            <a:outerShdw sx="100000" sy="100000" kx="0" ky="0" algn="bl" rotWithShape="0" blurRad="50800" dist="25400" dir="8100000">
-              <a:srgbClr val="000000">
-                <a:alpha val="12000"/>
-              </a:srgbClr>
-            </a:outerShdw>
-          </a:effectLst>
         </p:spPr>
       </p:sp>
       <p:sp>
@@ -4934,8 +5784,8 @@
         </p:nvSpPr>
         <p:spPr>
           <a:xfrm>
-            <a:off x="457200" y="2677886"/>
-            <a:ext cx="45720" cy="560397"/>
+            <a:off x="457200" y="2203704"/>
+            <a:ext cx="45720" cy="448056"/>
           </a:xfrm>
           <a:prstGeom prst="rect">
             <a:avLst/>
@@ -4954,8 +5804,8 @@
         </p:nvSpPr>
         <p:spPr>
           <a:xfrm>
-            <a:off x="685800" y="2677886"/>
-            <a:ext cx="7818120" cy="560397"/>
+            <a:off x="640080" y="2203704"/>
+            <a:ext cx="7863840" cy="448056"/>
           </a:xfrm>
           <a:prstGeom prst="rect">
             <a:avLst/>
@@ -4971,7 +5821,7 @@
               <a:buNone/>
             </a:pPr>
             <a:r>
-              <a:rPr lang="en-US" sz="1200" dirty="0">
+              <a:rPr lang="en-US" sz="1100" dirty="0">
                 <a:solidFill>
                   <a:srgbClr val="1A1A2E"/>
                 </a:solidFill>
@@ -4979,9 +5829,9 @@
                 <a:ea typeface="Calibri" pitchFamily="34" charset="-122"/>
                 <a:cs typeface="Calibri" pitchFamily="34" charset="-120"/>
               </a:rPr>
-              <a:t>DÉNORMALISATION = violer volontairement une NF pour la performance</a:t>
-            </a:r>
-            <a:endParaRPr lang="en-US" sz="1200" dirty="0"/>
+              <a:t>  → nom_salle et tarif_salle doivent rester dans TABLE SALLE</a:t>
+            </a:r>
+            <a:endParaRPr lang="en-US" sz="1100" dirty="0"/>
           </a:p>
         </p:txBody>
       </p:sp>
@@ -4993,8 +5843,8 @@
         </p:nvSpPr>
         <p:spPr>
           <a:xfrm>
-            <a:off x="457200" y="3265714"/>
-            <a:ext cx="8229600" cy="560397"/>
+            <a:off x="457200" y="2679192"/>
+            <a:ext cx="8229600" cy="448056"/>
           </a:xfrm>
           <a:prstGeom prst="rect">
             <a:avLst/>
@@ -5003,13 +5853,6 @@
             <a:srgbClr val="FFFFFF"/>
           </a:solidFill>
           <a:ln/>
-          <a:effectLst>
-            <a:outerShdw sx="100000" sy="100000" kx="0" ky="0" algn="bl" rotWithShape="0" blurRad="50800" dist="25400" dir="8100000">
-              <a:srgbClr val="000000">
-                <a:alpha val="12000"/>
-              </a:srgbClr>
-            </a:outerShdw>
-          </a:effectLst>
         </p:spPr>
       </p:sp>
       <p:sp>
@@ -5020,8 +5863,8 @@
         </p:nvSpPr>
         <p:spPr>
           <a:xfrm>
-            <a:off x="457200" y="3265714"/>
-            <a:ext cx="45720" cy="560397"/>
+            <a:off x="457200" y="2679192"/>
+            <a:ext cx="45720" cy="448056"/>
           </a:xfrm>
           <a:prstGeom prst="rect">
             <a:avLst/>
@@ -5040,8 +5883,8 @@
         </p:nvSpPr>
         <p:spPr>
           <a:xfrm>
-            <a:off x="685800" y="3265714"/>
-            <a:ext cx="7818120" cy="560397"/>
+            <a:off x="640080" y="2679192"/>
+            <a:ext cx="7863840" cy="448056"/>
           </a:xfrm>
           <a:prstGeom prst="rect">
             <a:avLst/>
@@ -5057,7 +5900,7 @@
               <a:buNone/>
             </a:pPr>
             <a:r>
-              <a:rPr lang="en-US" sz="1200" dirty="0">
+              <a:rPr lang="en-US" sz="1100" dirty="0">
                 <a:solidFill>
                   <a:srgbClr val="1A1A2E"/>
                 </a:solidFill>
@@ -5065,9 +5908,9 @@
                 <a:ea typeface="Calibri" pitchFamily="34" charset="-122"/>
                 <a:cs typeface="Calibri" pitchFamily="34" charset="-120"/>
               </a:rPr>
-              <a:t>Ex: stocker nom_artiste dans Facture pour éviter un JOIN</a:t>
-            </a:r>
-            <a:endParaRPr lang="en-US" sz="1200" dirty="0"/>
+              <a:t>CORRECTION : SESSION(id_session, ..., →id_salle) sans nom_salle</a:t>
+            </a:r>
+            <a:endParaRPr lang="en-US" sz="1100" dirty="0"/>
           </a:p>
         </p:txBody>
       </p:sp>
@@ -5079,8 +5922,8 @@
         </p:nvSpPr>
         <p:spPr>
           <a:xfrm>
-            <a:off x="457200" y="3853543"/>
-            <a:ext cx="8229600" cy="560397"/>
+            <a:off x="457200" y="3154680"/>
+            <a:ext cx="8229600" cy="448056"/>
           </a:xfrm>
           <a:prstGeom prst="rect">
             <a:avLst/>
@@ -5089,13 +5932,6 @@
             <a:srgbClr val="E8F5E9"/>
           </a:solidFill>
           <a:ln/>
-          <a:effectLst>
-            <a:outerShdw sx="100000" sy="100000" kx="0" ky="0" algn="bl" rotWithShape="0" blurRad="50800" dist="25400" dir="8100000">
-              <a:srgbClr val="000000">
-                <a:alpha val="12000"/>
-              </a:srgbClr>
-            </a:outerShdw>
-          </a:effectLst>
         </p:spPr>
       </p:sp>
       <p:sp>
@@ -5106,8 +5942,8 @@
         </p:nvSpPr>
         <p:spPr>
           <a:xfrm>
-            <a:off x="457200" y="3853543"/>
-            <a:ext cx="45720" cy="560397"/>
+            <a:off x="457200" y="3154680"/>
+            <a:ext cx="45720" cy="448056"/>
           </a:xfrm>
           <a:prstGeom prst="rect">
             <a:avLst/>
@@ -5126,8 +5962,8 @@
         </p:nvSpPr>
         <p:spPr>
           <a:xfrm>
-            <a:off x="685800" y="3853543"/>
-            <a:ext cx="7818120" cy="560397"/>
+            <a:off x="640080" y="3154680"/>
+            <a:ext cx="7863840" cy="448056"/>
           </a:xfrm>
           <a:prstGeom prst="rect">
             <a:avLst/>
@@ -5143,7 +5979,7 @@
               <a:buNone/>
             </a:pPr>
             <a:r>
-              <a:rPr lang="en-US" sz="1200" dirty="0">
+              <a:rPr lang="en-US" sz="1100" dirty="0">
                 <a:solidFill>
                   <a:srgbClr val="1A1A2E"/>
                 </a:solidFill>
@@ -5151,9 +5987,9 @@
                 <a:ea typeface="Calibri" pitchFamily="34" charset="-122"/>
                 <a:cs typeface="Calibri" pitchFamily="34" charset="-120"/>
               </a:rPr>
-              <a:t>C'est un choix CONSCIENT, documenté et justifié</a:t>
-            </a:r>
-            <a:endParaRPr lang="en-US" sz="1200" dirty="0"/>
+              <a:t>Regle mnemonique de Codd :</a:t>
+            </a:r>
+            <a:endParaRPr lang="en-US" sz="1100" dirty="0"/>
           </a:p>
         </p:txBody>
       </p:sp>
@@ -5165,8 +6001,8 @@
         </p:nvSpPr>
         <p:spPr>
           <a:xfrm>
-            <a:off x="457200" y="4441371"/>
-            <a:ext cx="8229600" cy="560397"/>
+            <a:off x="457200" y="3630168"/>
+            <a:ext cx="8229600" cy="448056"/>
           </a:xfrm>
           <a:prstGeom prst="rect">
             <a:avLst/>
@@ -5175,13 +6011,6 @@
             <a:srgbClr val="FFFFFF"/>
           </a:solidFill>
           <a:ln/>
-          <a:effectLst>
-            <a:outerShdw sx="100000" sy="100000" kx="0" ky="0" algn="bl" rotWithShape="0" blurRad="50800" dist="25400" dir="8100000">
-              <a:srgbClr val="000000">
-                <a:alpha val="12000"/>
-              </a:srgbClr>
-            </a:outerShdw>
-          </a:effectLst>
         </p:spPr>
       </p:sp>
       <p:sp>
@@ -5192,8 +6021,8 @@
         </p:nvSpPr>
         <p:spPr>
           <a:xfrm>
-            <a:off x="457200" y="4441371"/>
-            <a:ext cx="45720" cy="560397"/>
+            <a:off x="457200" y="3630168"/>
+            <a:ext cx="45720" cy="448056"/>
           </a:xfrm>
           <a:prstGeom prst="rect">
             <a:avLst/>
@@ -5212,8 +6041,8 @@
         </p:nvSpPr>
         <p:spPr>
           <a:xfrm>
-            <a:off x="685800" y="4441371"/>
-            <a:ext cx="7818120" cy="560397"/>
+            <a:off x="640080" y="3630168"/>
+            <a:ext cx="7863840" cy="448056"/>
           </a:xfrm>
           <a:prstGeom prst="rect">
             <a:avLst/>
@@ -5229,7 +6058,7 @@
               <a:buNone/>
             </a:pPr>
             <a:r>
-              <a:rPr lang="en-US" sz="1200" dirty="0">
+              <a:rPr lang="en-US" sz="1100" dirty="0">
                 <a:solidFill>
                   <a:srgbClr val="1A1A2E"/>
                 </a:solidFill>
@@ -5237,9 +6066,9 @@
                 <a:ea typeface="Calibri" pitchFamily="34" charset="-122"/>
                 <a:cs typeface="Calibri" pitchFamily="34" charset="-120"/>
               </a:rPr>
-              <a:t>Dans SwissSound : on reste en 3NF (pas besoin de dénormaliser)</a:t>
-            </a:r>
-            <a:endParaRPr lang="en-US" sz="1200" dirty="0"/>
+              <a:t>  'Chaque attribut depend de la cle, de TOUTE la cle, et RIEN QUE de la cle'</a:t>
+            </a:r>
+            <a:endParaRPr lang="en-US" sz="1100" dirty="0"/>
           </a:p>
         </p:txBody>
       </p:sp>
@@ -5257,7 +6086,7 @@
     <p:bg>
       <p:bgPr>
         <a:solidFill>
-          <a:srgbClr val="E8F5E9"/>
+          <a:srgbClr val="F5F7FA"/>
         </a:solidFill>
       </p:bgPr>
     </p:bg>
@@ -5290,7 +6119,7 @@
             <a:avLst/>
           </a:prstGeom>
           <a:solidFill>
-            <a:srgbClr val="FF6F00"/>
+            <a:srgbClr val="2E7D32"/>
           </a:solidFill>
           <a:ln/>
         </p:spPr>
@@ -5304,7 +6133,7 @@
         <p:spPr>
           <a:xfrm>
             <a:off x="457200" y="182880"/>
-            <a:ext cx="8229600" cy="548640"/>
+            <a:ext cx="8229600" cy="502920"/>
           </a:xfrm>
           <a:prstGeom prst="rect">
             <a:avLst/>
@@ -5320,7 +6149,7 @@
               <a:buNone/>
             </a:pPr>
             <a:r>
-              <a:rPr lang="en-US" sz="2400" b="1" dirty="0">
+              <a:rPr lang="en-US" sz="2100" b="1" dirty="0">
                 <a:solidFill>
                   <a:srgbClr val="1B5E20"/>
                 </a:solidFill>
@@ -5328,9 +6157,9 @@
                 <a:ea typeface="Trebuchet MS" pitchFamily="34" charset="-122"/>
                 <a:cs typeface="Trebuchet MS" pitchFamily="34" charset="-120"/>
               </a:rPr>
-              <a:t>✏️ Exercice Module 7</a:t>
-            </a:r>
-            <a:endParaRPr lang="en-US" sz="2400" dirty="0"/>
+              <a:t>Verification et denormalisation</a:t>
+            </a:r>
+            <a:endParaRPr lang="en-US" sz="2100" dirty="0"/>
           </a:p>
         </p:txBody>
       </p:sp>
@@ -5342,8 +6171,8 @@
         </p:nvSpPr>
         <p:spPr>
           <a:xfrm>
-            <a:off x="457200" y="914400"/>
-            <a:ext cx="8229600" cy="566928"/>
+            <a:off x="457200" y="777240"/>
+            <a:ext cx="8229600" cy="448056"/>
           </a:xfrm>
           <a:prstGeom prst="rect">
             <a:avLst/>
@@ -5352,13 +6181,6 @@
             <a:srgbClr val="FFFFFF"/>
           </a:solidFill>
           <a:ln/>
-          <a:effectLst>
-            <a:outerShdw sx="100000" sy="100000" kx="0" ky="0" algn="bl" rotWithShape="0" blurRad="50800" dist="25400" dir="8100000">
-              <a:srgbClr val="000000">
-                <a:alpha val="12000"/>
-              </a:srgbClr>
-            </a:outerShdw>
-          </a:effectLst>
         </p:spPr>
       </p:sp>
       <p:sp>
@@ -5369,14 +6191,14 @@
         </p:nvSpPr>
         <p:spPr>
           <a:xfrm>
-            <a:off x="457200" y="914400"/>
-            <a:ext cx="457200" cy="566928"/>
-          </a:xfrm>
-          <a:prstGeom prst="rect">
-            <a:avLst/>
-          </a:prstGeom>
-          <a:solidFill>
-            <a:srgbClr val="FF6F00"/>
+            <a:off x="457200" y="777240"/>
+            <a:ext cx="45720" cy="448056"/>
+          </a:xfrm>
+          <a:prstGeom prst="rect">
+            <a:avLst/>
+          </a:prstGeom>
+          <a:solidFill>
+            <a:srgbClr val="2E7D32"/>
           </a:solidFill>
           <a:ln/>
         </p:spPr>
@@ -5389,47 +6211,8 @@
         </p:nvSpPr>
         <p:spPr>
           <a:xfrm>
-            <a:off x="457200" y="914400"/>
-            <a:ext cx="457200" cy="566928"/>
-          </a:xfrm>
-          <a:prstGeom prst="rect">
-            <a:avLst/>
-          </a:prstGeom>
-          <a:noFill/>
-          <a:ln/>
-        </p:spPr>
-        <p:txBody>
-          <a:bodyPr wrap="square" lIns="0" tIns="0" rIns="0" bIns="0" rtlCol="0" anchor="ctr"/>
-          <a:lstStyle/>
-          <a:p>
-            <a:pPr algn="ctr" indent="0" marL="0">
-              <a:buNone/>
-            </a:pPr>
-            <a:r>
-              <a:rPr lang="en-US" sz="1600" b="1" dirty="0">
-                <a:solidFill>
-                  <a:srgbClr val="FFFFFF"/>
-                </a:solidFill>
-                <a:latin typeface="Trebuchet MS" pitchFamily="34" charset="0"/>
-                <a:ea typeface="Trebuchet MS" pitchFamily="34" charset="-122"/>
-                <a:cs typeface="Trebuchet MS" pitchFamily="34" charset="-120"/>
-              </a:rPr>
-              <a:t>1</a:t>
-            </a:r>
-            <a:endParaRPr lang="en-US" sz="1600" dirty="0"/>
-          </a:p>
-        </p:txBody>
-      </p:sp>
-      <p:sp>
-        <p:nvSpPr>
-          <p:cNvPr id="7" name="Text 5"/>
-          <p:cNvSpPr/>
-          <p:nvPr/>
-        </p:nvSpPr>
-        <p:spPr>
-          <a:xfrm>
-            <a:off x="1051560" y="914400"/>
-            <a:ext cx="7498080" cy="566928"/>
+            <a:off x="640080" y="777240"/>
+            <a:ext cx="7863840" cy="448056"/>
           </a:xfrm>
           <a:prstGeom prst="rect">
             <a:avLst/>
@@ -5453,7 +6236,7 @@
                 <a:ea typeface="Calibri" pitchFamily="34" charset="-122"/>
                 <a:cs typeface="Calibri" pitchFamily="34" charset="-120"/>
               </a:rPr>
-              <a:t>Prendre la table 'tout_en_un' fournie et identifier les violations 1NF/2NF/3NF</a:t>
+              <a:t>Verifier le MLD de SwissSound : est-il en 3NF ?</a:t>
             </a:r>
             <a:endParaRPr lang="en-US" sz="1100" dirty="0"/>
           </a:p>
@@ -5461,100 +6244,54 @@
       </p:sp>
       <p:sp>
         <p:nvSpPr>
+          <p:cNvPr id="7" name="Shape 5"/>
+          <p:cNvSpPr/>
+          <p:nvPr/>
+        </p:nvSpPr>
+        <p:spPr>
+          <a:xfrm>
+            <a:off x="457200" y="1252728"/>
+            <a:ext cx="8229600" cy="448056"/>
+          </a:xfrm>
+          <a:prstGeom prst="rect">
+            <a:avLst/>
+          </a:prstGeom>
+          <a:solidFill>
+            <a:srgbClr val="E8F5E9"/>
+          </a:solidFill>
+          <a:ln/>
+        </p:spPr>
+      </p:sp>
+      <p:sp>
+        <p:nvSpPr>
           <p:cNvPr id="8" name="Shape 6"/>
           <p:cNvSpPr/>
           <p:nvPr/>
         </p:nvSpPr>
         <p:spPr>
           <a:xfrm>
-            <a:off x="457200" y="1554480"/>
-            <a:ext cx="8229600" cy="566928"/>
-          </a:xfrm>
-          <a:prstGeom prst="rect">
-            <a:avLst/>
-          </a:prstGeom>
-          <a:solidFill>
-            <a:srgbClr val="FFFFFF"/>
-          </a:solidFill>
-          <a:ln/>
-          <a:effectLst>
-            <a:outerShdw sx="100000" sy="100000" kx="0" ky="0" algn="bl" rotWithShape="0" blurRad="50800" dist="25400" dir="8100000">
-              <a:srgbClr val="000000">
-                <a:alpha val="12000"/>
-              </a:srgbClr>
-            </a:outerShdw>
-          </a:effectLst>
-        </p:spPr>
-      </p:sp>
-      <p:sp>
-        <p:nvSpPr>
-          <p:cNvPr id="9" name="Shape 7"/>
-          <p:cNvSpPr/>
-          <p:nvPr/>
-        </p:nvSpPr>
-        <p:spPr>
-          <a:xfrm>
-            <a:off x="457200" y="1554480"/>
-            <a:ext cx="457200" cy="566928"/>
-          </a:xfrm>
-          <a:prstGeom prst="rect">
-            <a:avLst/>
-          </a:prstGeom>
-          <a:solidFill>
-            <a:srgbClr val="FF6F00"/>
-          </a:solidFill>
-          <a:ln/>
-        </p:spPr>
-      </p:sp>
-      <p:sp>
-        <p:nvSpPr>
-          <p:cNvPr id="10" name="Text 8"/>
-          <p:cNvSpPr/>
-          <p:nvPr/>
-        </p:nvSpPr>
-        <p:spPr>
-          <a:xfrm>
-            <a:off x="457200" y="1554480"/>
-            <a:ext cx="457200" cy="566928"/>
-          </a:xfrm>
-          <a:prstGeom prst="rect">
-            <a:avLst/>
-          </a:prstGeom>
-          <a:noFill/>
-          <a:ln/>
-        </p:spPr>
-        <p:txBody>
-          <a:bodyPr wrap="square" lIns="0" tIns="0" rIns="0" bIns="0" rtlCol="0" anchor="ctr"/>
-          <a:lstStyle/>
-          <a:p>
-            <a:pPr algn="ctr" indent="0" marL="0">
-              <a:buNone/>
-            </a:pPr>
-            <a:r>
-              <a:rPr lang="en-US" sz="1600" b="1" dirty="0">
-                <a:solidFill>
-                  <a:srgbClr val="FFFFFF"/>
-                </a:solidFill>
-                <a:latin typeface="Trebuchet MS" pitchFamily="34" charset="0"/>
-                <a:ea typeface="Trebuchet MS" pitchFamily="34" charset="-122"/>
-                <a:cs typeface="Trebuchet MS" pitchFamily="34" charset="-120"/>
-              </a:rPr>
-              <a:t>2</a:t>
-            </a:r>
-            <a:endParaRPr lang="en-US" sz="1600" dirty="0"/>
-          </a:p>
-        </p:txBody>
-      </p:sp>
-      <p:sp>
-        <p:nvSpPr>
-          <p:cNvPr id="11" name="Text 9"/>
-          <p:cNvSpPr/>
-          <p:nvPr/>
-        </p:nvSpPr>
-        <p:spPr>
-          <a:xfrm>
-            <a:off x="1051560" y="1554480"/>
-            <a:ext cx="7498080" cy="566928"/>
+            <a:off x="457200" y="1252728"/>
+            <a:ext cx="45720" cy="448056"/>
+          </a:xfrm>
+          <a:prstGeom prst="rect">
+            <a:avLst/>
+          </a:prstGeom>
+          <a:solidFill>
+            <a:srgbClr val="2E7D32"/>
+          </a:solidFill>
+          <a:ln/>
+        </p:spPr>
+      </p:sp>
+      <p:sp>
+        <p:nvSpPr>
+          <p:cNvPr id="9" name="Text 7"/>
+          <p:cNvSpPr/>
+          <p:nvPr/>
+        </p:nvSpPr>
+        <p:spPr>
+          <a:xfrm>
+            <a:off x="640080" y="1252728"/>
+            <a:ext cx="7863840" cy="448056"/>
           </a:xfrm>
           <a:prstGeom prst="rect">
             <a:avLst/>
@@ -5578,7 +6315,7 @@
                 <a:ea typeface="Calibri" pitchFamily="34" charset="-122"/>
                 <a:cs typeface="Calibri" pitchFamily="34" charset="-120"/>
               </a:rPr>
-              <a:t>Normaliser étape par étape : 1NF → 2NF → 3NF</a:t>
+              <a:t>Si oui (normalement car on a suivi les DF) → valide</a:t>
             </a:r>
             <a:endParaRPr lang="en-US" sz="1100" dirty="0"/>
           </a:p>
@@ -5586,14 +6323,14 @@
       </p:sp>
       <p:sp>
         <p:nvSpPr>
-          <p:cNvPr id="12" name="Shape 10"/>
-          <p:cNvSpPr/>
-          <p:nvPr/>
-        </p:nvSpPr>
-        <p:spPr>
-          <a:xfrm>
-            <a:off x="457200" y="2194560"/>
-            <a:ext cx="8229600" cy="566928"/>
+          <p:cNvPr id="10" name="Shape 8"/>
+          <p:cNvSpPr/>
+          <p:nvPr/>
+        </p:nvSpPr>
+        <p:spPr>
+          <a:xfrm>
+            <a:off x="457200" y="1728216"/>
+            <a:ext cx="8229600" cy="448056"/>
           </a:xfrm>
           <a:prstGeom prst="rect">
             <a:avLst/>
@@ -5602,84 +6339,38 @@
             <a:srgbClr val="FFFFFF"/>
           </a:solidFill>
           <a:ln/>
-          <a:effectLst>
-            <a:outerShdw sx="100000" sy="100000" kx="0" ky="0" algn="bl" rotWithShape="0" blurRad="50800" dist="25400" dir="8100000">
-              <a:srgbClr val="000000">
-                <a:alpha val="12000"/>
-              </a:srgbClr>
-            </a:outerShdw>
-          </a:effectLst>
-        </p:spPr>
-      </p:sp>
-      <p:sp>
-        <p:nvSpPr>
-          <p:cNvPr id="13" name="Shape 11"/>
-          <p:cNvSpPr/>
-          <p:nvPr/>
-        </p:nvSpPr>
-        <p:spPr>
-          <a:xfrm>
-            <a:off x="457200" y="2194560"/>
-            <a:ext cx="457200" cy="566928"/>
-          </a:xfrm>
-          <a:prstGeom prst="rect">
-            <a:avLst/>
-          </a:prstGeom>
-          <a:solidFill>
-            <a:srgbClr val="FF6F00"/>
-          </a:solidFill>
-          <a:ln/>
-        </p:spPr>
-      </p:sp>
-      <p:sp>
-        <p:nvSpPr>
-          <p:cNvPr id="14" name="Text 12"/>
-          <p:cNvSpPr/>
-          <p:nvPr/>
-        </p:nvSpPr>
-        <p:spPr>
-          <a:xfrm>
-            <a:off x="457200" y="2194560"/>
-            <a:ext cx="457200" cy="566928"/>
-          </a:xfrm>
-          <a:prstGeom prst="rect">
-            <a:avLst/>
-          </a:prstGeom>
-          <a:noFill/>
-          <a:ln/>
-        </p:spPr>
-        <p:txBody>
-          <a:bodyPr wrap="square" lIns="0" tIns="0" rIns="0" bIns="0" rtlCol="0" anchor="ctr"/>
-          <a:lstStyle/>
-          <a:p>
-            <a:pPr algn="ctr" indent="0" marL="0">
-              <a:buNone/>
-            </a:pPr>
-            <a:r>
-              <a:rPr lang="en-US" sz="1600" b="1" dirty="0">
-                <a:solidFill>
-                  <a:srgbClr val="FFFFFF"/>
-                </a:solidFill>
-                <a:latin typeface="Trebuchet MS" pitchFamily="34" charset="0"/>
-                <a:ea typeface="Trebuchet MS" pitchFamily="34" charset="-122"/>
-                <a:cs typeface="Trebuchet MS" pitchFamily="34" charset="-120"/>
-              </a:rPr>
-              <a:t>3</a:t>
-            </a:r>
-            <a:endParaRPr lang="en-US" sz="1600" dirty="0"/>
-          </a:p>
-        </p:txBody>
-      </p:sp>
-      <p:sp>
-        <p:nvSpPr>
-          <p:cNvPr id="15" name="Text 13"/>
-          <p:cNvSpPr/>
-          <p:nvPr/>
-        </p:nvSpPr>
-        <p:spPr>
-          <a:xfrm>
-            <a:off x="1051560" y="2194560"/>
-            <a:ext cx="7498080" cy="566928"/>
+        </p:spPr>
+      </p:sp>
+      <p:sp>
+        <p:nvSpPr>
+          <p:cNvPr id="11" name="Shape 9"/>
+          <p:cNvSpPr/>
+          <p:nvPr/>
+        </p:nvSpPr>
+        <p:spPr>
+          <a:xfrm>
+            <a:off x="457200" y="1728216"/>
+            <a:ext cx="45720" cy="448056"/>
+          </a:xfrm>
+          <a:prstGeom prst="rect">
+            <a:avLst/>
+          </a:prstGeom>
+          <a:solidFill>
+            <a:srgbClr val="2E7D32"/>
+          </a:solidFill>
+          <a:ln/>
+        </p:spPr>
+      </p:sp>
+      <p:sp>
+        <p:nvSpPr>
+          <p:cNvPr id="12" name="Text 10"/>
+          <p:cNvSpPr/>
+          <p:nvPr/>
+        </p:nvSpPr>
+        <p:spPr>
+          <a:xfrm>
+            <a:off x="640080" y="1728216"/>
+            <a:ext cx="7863840" cy="448056"/>
           </a:xfrm>
           <a:prstGeom prst="rect">
             <a:avLst/>
@@ -5703,7 +6394,7 @@
                 <a:ea typeface="Calibri" pitchFamily="34" charset="-122"/>
                 <a:cs typeface="Calibri" pitchFamily="34" charset="-120"/>
               </a:rPr>
-              <a:t>Comparer le résultat avec le MLD SwissSound — sont-ils identiques ?</a:t>
+              <a:t>Si non → corriger en extrayant les attributs transitifs</a:t>
             </a:r>
             <a:endParaRPr lang="en-US" sz="1100" dirty="0"/>
           </a:p>
@@ -5711,100 +6402,54 @@
       </p:sp>
       <p:sp>
         <p:nvSpPr>
-          <p:cNvPr id="16" name="Shape 14"/>
-          <p:cNvSpPr/>
-          <p:nvPr/>
-        </p:nvSpPr>
-        <p:spPr>
-          <a:xfrm>
-            <a:off x="457200" y="2834640"/>
-            <a:ext cx="8229600" cy="566928"/>
-          </a:xfrm>
-          <a:prstGeom prst="rect">
-            <a:avLst/>
-          </a:prstGeom>
-          <a:solidFill>
-            <a:srgbClr val="FFFFFF"/>
-          </a:solidFill>
-          <a:ln/>
-          <a:effectLst>
-            <a:outerShdw sx="100000" sy="100000" kx="0" ky="0" algn="bl" rotWithShape="0" blurRad="50800" dist="25400" dir="8100000">
-              <a:srgbClr val="000000">
-                <a:alpha val="12000"/>
-              </a:srgbClr>
-            </a:outerShdw>
-          </a:effectLst>
-        </p:spPr>
-      </p:sp>
-      <p:sp>
-        <p:nvSpPr>
-          <p:cNvPr id="17" name="Shape 15"/>
-          <p:cNvSpPr/>
-          <p:nvPr/>
-        </p:nvSpPr>
-        <p:spPr>
-          <a:xfrm>
-            <a:off x="457200" y="2834640"/>
-            <a:ext cx="457200" cy="566928"/>
-          </a:xfrm>
-          <a:prstGeom prst="rect">
-            <a:avLst/>
-          </a:prstGeom>
-          <a:solidFill>
-            <a:srgbClr val="FF6F00"/>
-          </a:solidFill>
-          <a:ln/>
-        </p:spPr>
-      </p:sp>
-      <p:sp>
-        <p:nvSpPr>
-          <p:cNvPr id="18" name="Text 16"/>
-          <p:cNvSpPr/>
-          <p:nvPr/>
-        </p:nvSpPr>
-        <p:spPr>
-          <a:xfrm>
-            <a:off x="457200" y="2834640"/>
-            <a:ext cx="457200" cy="566928"/>
-          </a:xfrm>
-          <a:prstGeom prst="rect">
-            <a:avLst/>
-          </a:prstGeom>
-          <a:noFill/>
-          <a:ln/>
-        </p:spPr>
-        <p:txBody>
-          <a:bodyPr wrap="square" lIns="0" tIns="0" rIns="0" bIns="0" rtlCol="0" anchor="ctr"/>
-          <a:lstStyle/>
-          <a:p>
-            <a:pPr algn="ctr" indent="0" marL="0">
-              <a:buNone/>
-            </a:pPr>
-            <a:r>
-              <a:rPr lang="en-US" sz="1600" b="1" dirty="0">
-                <a:solidFill>
-                  <a:srgbClr val="FFFFFF"/>
-                </a:solidFill>
-                <a:latin typeface="Trebuchet MS" pitchFamily="34" charset="0"/>
-                <a:ea typeface="Trebuchet MS" pitchFamily="34" charset="-122"/>
-                <a:cs typeface="Trebuchet MS" pitchFamily="34" charset="-120"/>
-              </a:rPr>
-              <a:t>4</a:t>
-            </a:r>
-            <a:endParaRPr lang="en-US" sz="1600" dirty="0"/>
-          </a:p>
-        </p:txBody>
-      </p:sp>
-      <p:sp>
-        <p:nvSpPr>
-          <p:cNvPr id="19" name="Text 17"/>
-          <p:cNvSpPr/>
-          <p:nvPr/>
-        </p:nvSpPr>
-        <p:spPr>
-          <a:xfrm>
-            <a:off x="1051560" y="2834640"/>
-            <a:ext cx="7498080" cy="566928"/>
+          <p:cNvPr id="13" name="Shape 11"/>
+          <p:cNvSpPr/>
+          <p:nvPr/>
+        </p:nvSpPr>
+        <p:spPr>
+          <a:xfrm>
+            <a:off x="457200" y="2203704"/>
+            <a:ext cx="8229600" cy="448056"/>
+          </a:xfrm>
+          <a:prstGeom prst="rect">
+            <a:avLst/>
+          </a:prstGeom>
+          <a:solidFill>
+            <a:srgbClr val="E8F5E9"/>
+          </a:solidFill>
+          <a:ln/>
+        </p:spPr>
+      </p:sp>
+      <p:sp>
+        <p:nvSpPr>
+          <p:cNvPr id="14" name="Shape 12"/>
+          <p:cNvSpPr/>
+          <p:nvPr/>
+        </p:nvSpPr>
+        <p:spPr>
+          <a:xfrm>
+            <a:off x="457200" y="2203704"/>
+            <a:ext cx="45720" cy="448056"/>
+          </a:xfrm>
+          <a:prstGeom prst="rect">
+            <a:avLst/>
+          </a:prstGeom>
+          <a:solidFill>
+            <a:srgbClr val="2E7D32"/>
+          </a:solidFill>
+          <a:ln/>
+        </p:spPr>
+      </p:sp>
+      <p:sp>
+        <p:nvSpPr>
+          <p:cNvPr id="15" name="Text 13"/>
+          <p:cNvSpPr/>
+          <p:nvPr/>
+        </p:nvSpPr>
+        <p:spPr>
+          <a:xfrm>
+            <a:off x="640080" y="2203704"/>
+            <a:ext cx="7863840" cy="448056"/>
           </a:xfrm>
           <a:prstGeom prst="rect">
             <a:avLst/>
@@ -5828,7 +6473,7 @@
                 <a:ea typeface="Calibri" pitchFamily="34" charset="-122"/>
                 <a:cs typeface="Calibri" pitchFamily="34" charset="-120"/>
               </a:rPr>
-              <a:t>Expliquer la différence entre atomicité 1NF et atomicité ACID</a:t>
+              <a:t>DENORMALISATION = violer VOLONTAIREMENT une NF pour la performance</a:t>
             </a:r>
             <a:endParaRPr lang="en-US" sz="1100" dirty="0"/>
           </a:p>
@@ -5836,14 +6481,14 @@
       </p:sp>
       <p:sp>
         <p:nvSpPr>
-          <p:cNvPr id="20" name="Shape 18"/>
-          <p:cNvSpPr/>
-          <p:nvPr/>
-        </p:nvSpPr>
-        <p:spPr>
-          <a:xfrm>
-            <a:off x="457200" y="3474720"/>
-            <a:ext cx="8229600" cy="566928"/>
+          <p:cNvPr id="16" name="Shape 14"/>
+          <p:cNvSpPr/>
+          <p:nvPr/>
+        </p:nvSpPr>
+        <p:spPr>
+          <a:xfrm>
+            <a:off x="457200" y="2679192"/>
+            <a:ext cx="8229600" cy="448056"/>
           </a:xfrm>
           <a:prstGeom prst="rect">
             <a:avLst/>
@@ -5852,84 +6497,38 @@
             <a:srgbClr val="FFFFFF"/>
           </a:solidFill>
           <a:ln/>
-          <a:effectLst>
-            <a:outerShdw sx="100000" sy="100000" kx="0" ky="0" algn="bl" rotWithShape="0" blurRad="50800" dist="25400" dir="8100000">
-              <a:srgbClr val="000000">
-                <a:alpha val="12000"/>
-              </a:srgbClr>
-            </a:outerShdw>
-          </a:effectLst>
-        </p:spPr>
-      </p:sp>
-      <p:sp>
-        <p:nvSpPr>
-          <p:cNvPr id="21" name="Shape 19"/>
-          <p:cNvSpPr/>
-          <p:nvPr/>
-        </p:nvSpPr>
-        <p:spPr>
-          <a:xfrm>
-            <a:off x="457200" y="3474720"/>
-            <a:ext cx="457200" cy="566928"/>
-          </a:xfrm>
-          <a:prstGeom prst="rect">
-            <a:avLst/>
-          </a:prstGeom>
-          <a:solidFill>
-            <a:srgbClr val="FF6F00"/>
-          </a:solidFill>
-          <a:ln/>
-        </p:spPr>
-      </p:sp>
-      <p:sp>
-        <p:nvSpPr>
-          <p:cNvPr id="22" name="Text 20"/>
-          <p:cNvSpPr/>
-          <p:nvPr/>
-        </p:nvSpPr>
-        <p:spPr>
-          <a:xfrm>
-            <a:off x="457200" y="3474720"/>
-            <a:ext cx="457200" cy="566928"/>
-          </a:xfrm>
-          <a:prstGeom prst="rect">
-            <a:avLst/>
-          </a:prstGeom>
-          <a:noFill/>
-          <a:ln/>
-        </p:spPr>
-        <p:txBody>
-          <a:bodyPr wrap="square" lIns="0" tIns="0" rIns="0" bIns="0" rtlCol="0" anchor="ctr"/>
-          <a:lstStyle/>
-          <a:p>
-            <a:pPr algn="ctr" indent="0" marL="0">
-              <a:buNone/>
-            </a:pPr>
-            <a:r>
-              <a:rPr lang="en-US" sz="1600" b="1" dirty="0">
-                <a:solidFill>
-                  <a:srgbClr val="FFFFFF"/>
-                </a:solidFill>
-                <a:latin typeface="Trebuchet MS" pitchFamily="34" charset="0"/>
-                <a:ea typeface="Trebuchet MS" pitchFamily="34" charset="-122"/>
-                <a:cs typeface="Trebuchet MS" pitchFamily="34" charset="-120"/>
-              </a:rPr>
-              <a:t>5</a:t>
-            </a:r>
-            <a:endParaRPr lang="en-US" sz="1600" dirty="0"/>
-          </a:p>
-        </p:txBody>
-      </p:sp>
-      <p:sp>
-        <p:nvSpPr>
-          <p:cNvPr id="23" name="Text 21"/>
-          <p:cNvSpPr/>
-          <p:nvPr/>
-        </p:nvSpPr>
-        <p:spPr>
-          <a:xfrm>
-            <a:off x="1051560" y="3474720"/>
-            <a:ext cx="7498080" cy="566928"/>
+        </p:spPr>
+      </p:sp>
+      <p:sp>
+        <p:nvSpPr>
+          <p:cNvPr id="17" name="Shape 15"/>
+          <p:cNvSpPr/>
+          <p:nvPr/>
+        </p:nvSpPr>
+        <p:spPr>
+          <a:xfrm>
+            <a:off x="457200" y="2679192"/>
+            <a:ext cx="45720" cy="448056"/>
+          </a:xfrm>
+          <a:prstGeom prst="rect">
+            <a:avLst/>
+          </a:prstGeom>
+          <a:solidFill>
+            <a:srgbClr val="2E7D32"/>
+          </a:solidFill>
+          <a:ln/>
+        </p:spPr>
+      </p:sp>
+      <p:sp>
+        <p:nvSpPr>
+          <p:cNvPr id="18" name="Text 16"/>
+          <p:cNvSpPr/>
+          <p:nvPr/>
+        </p:nvSpPr>
+        <p:spPr>
+          <a:xfrm>
+            <a:off x="640080" y="2679192"/>
+            <a:ext cx="7863840" cy="448056"/>
           </a:xfrm>
           <a:prstGeom prst="rect">
             <a:avLst/>
@@ -5953,7 +6552,7 @@
                 <a:ea typeface="Calibri" pitchFamily="34" charset="-122"/>
                 <a:cs typeface="Calibri" pitchFamily="34" charset="-120"/>
               </a:rPr>
-              <a:t>Argumenter un cas de dénormalisation (pour D1)</a:t>
+              <a:t>Ex: stocker nom_artiste dans Facture pour eviter un JOIN</a:t>
             </a:r>
             <a:endParaRPr lang="en-US" sz="1100" dirty="0"/>
           </a:p>
@@ -5961,100 +6560,54 @@
       </p:sp>
       <p:sp>
         <p:nvSpPr>
-          <p:cNvPr id="24" name="Shape 22"/>
-          <p:cNvSpPr/>
-          <p:nvPr/>
-        </p:nvSpPr>
-        <p:spPr>
-          <a:xfrm>
-            <a:off x="457200" y="4114800"/>
-            <a:ext cx="8229600" cy="566928"/>
-          </a:xfrm>
-          <a:prstGeom prst="rect">
-            <a:avLst/>
-          </a:prstGeom>
-          <a:solidFill>
-            <a:srgbClr val="FFFFFF"/>
-          </a:solidFill>
-          <a:ln/>
-          <a:effectLst>
-            <a:outerShdw sx="100000" sy="100000" kx="0" ky="0" algn="bl" rotWithShape="0" blurRad="50800" dist="25400" dir="8100000">
-              <a:srgbClr val="000000">
-                <a:alpha val="12000"/>
-              </a:srgbClr>
-            </a:outerShdw>
-          </a:effectLst>
-        </p:spPr>
-      </p:sp>
-      <p:sp>
-        <p:nvSpPr>
-          <p:cNvPr id="25" name="Shape 23"/>
-          <p:cNvSpPr/>
-          <p:nvPr/>
-        </p:nvSpPr>
-        <p:spPr>
-          <a:xfrm>
-            <a:off x="457200" y="4114800"/>
-            <a:ext cx="457200" cy="566928"/>
-          </a:xfrm>
-          <a:prstGeom prst="rect">
-            <a:avLst/>
-          </a:prstGeom>
-          <a:solidFill>
-            <a:srgbClr val="FF6F00"/>
-          </a:solidFill>
-          <a:ln/>
-        </p:spPr>
-      </p:sp>
-      <p:sp>
-        <p:nvSpPr>
-          <p:cNvPr id="26" name="Text 24"/>
-          <p:cNvSpPr/>
-          <p:nvPr/>
-        </p:nvSpPr>
-        <p:spPr>
-          <a:xfrm>
-            <a:off x="457200" y="4114800"/>
-            <a:ext cx="457200" cy="566928"/>
-          </a:xfrm>
-          <a:prstGeom prst="rect">
-            <a:avLst/>
-          </a:prstGeom>
-          <a:noFill/>
-          <a:ln/>
-        </p:spPr>
-        <p:txBody>
-          <a:bodyPr wrap="square" lIns="0" tIns="0" rIns="0" bIns="0" rtlCol="0" anchor="ctr"/>
-          <a:lstStyle/>
-          <a:p>
-            <a:pPr algn="ctr" indent="0" marL="0">
-              <a:buNone/>
-            </a:pPr>
-            <a:r>
-              <a:rPr lang="en-US" sz="1600" b="1" dirty="0">
-                <a:solidFill>
-                  <a:srgbClr val="FFFFFF"/>
-                </a:solidFill>
-                <a:latin typeface="Trebuchet MS" pitchFamily="34" charset="0"/>
-                <a:ea typeface="Trebuchet MS" pitchFamily="34" charset="-122"/>
-                <a:cs typeface="Trebuchet MS" pitchFamily="34" charset="-120"/>
-              </a:rPr>
-              <a:t>6</a:t>
-            </a:r>
-            <a:endParaRPr lang="en-US" sz="1600" dirty="0"/>
-          </a:p>
-        </p:txBody>
-      </p:sp>
-      <p:sp>
-        <p:nvSpPr>
-          <p:cNvPr id="27" name="Text 25"/>
-          <p:cNvSpPr/>
-          <p:nvPr/>
-        </p:nvSpPr>
-        <p:spPr>
-          <a:xfrm>
-            <a:off x="1051560" y="4114800"/>
-            <a:ext cx="7498080" cy="566928"/>
+          <p:cNvPr id="19" name="Shape 17"/>
+          <p:cNvSpPr/>
+          <p:nvPr/>
+        </p:nvSpPr>
+        <p:spPr>
+          <a:xfrm>
+            <a:off x="457200" y="3154680"/>
+            <a:ext cx="8229600" cy="448056"/>
+          </a:xfrm>
+          <a:prstGeom prst="rect">
+            <a:avLst/>
+          </a:prstGeom>
+          <a:solidFill>
+            <a:srgbClr val="E8F5E9"/>
+          </a:solidFill>
+          <a:ln/>
+        </p:spPr>
+      </p:sp>
+      <p:sp>
+        <p:nvSpPr>
+          <p:cNvPr id="20" name="Shape 18"/>
+          <p:cNvSpPr/>
+          <p:nvPr/>
+        </p:nvSpPr>
+        <p:spPr>
+          <a:xfrm>
+            <a:off x="457200" y="3154680"/>
+            <a:ext cx="45720" cy="448056"/>
+          </a:xfrm>
+          <a:prstGeom prst="rect">
+            <a:avLst/>
+          </a:prstGeom>
+          <a:solidFill>
+            <a:srgbClr val="2E7D32"/>
+          </a:solidFill>
+          <a:ln/>
+        </p:spPr>
+      </p:sp>
+      <p:sp>
+        <p:nvSpPr>
+          <p:cNvPr id="21" name="Text 19"/>
+          <p:cNvSpPr/>
+          <p:nvPr/>
+        </p:nvSpPr>
+        <p:spPr>
+          <a:xfrm>
+            <a:off x="640080" y="3154680"/>
+            <a:ext cx="7863840" cy="448056"/>
           </a:xfrm>
           <a:prstGeom prst="rect">
             <a:avLst/>
@@ -6078,7 +6631,165 @@
                 <a:ea typeface="Calibri" pitchFamily="34" charset="-122"/>
                 <a:cs typeface="Calibri" pitchFamily="34" charset="-120"/>
               </a:rPr>
-              <a:t>DÉFI : créer une table volontairement non normalisée et montrer les 3 types d'anomalies</a:t>
+              <a:t>Avantage : requete plus rapide | Inconvenient : redondance</a:t>
+            </a:r>
+            <a:endParaRPr lang="en-US" sz="1100" dirty="0"/>
+          </a:p>
+        </p:txBody>
+      </p:sp>
+      <p:sp>
+        <p:nvSpPr>
+          <p:cNvPr id="22" name="Shape 20"/>
+          <p:cNvSpPr/>
+          <p:nvPr/>
+        </p:nvSpPr>
+        <p:spPr>
+          <a:xfrm>
+            <a:off x="457200" y="3630168"/>
+            <a:ext cx="8229600" cy="448056"/>
+          </a:xfrm>
+          <a:prstGeom prst="rect">
+            <a:avLst/>
+          </a:prstGeom>
+          <a:solidFill>
+            <a:srgbClr val="FFFFFF"/>
+          </a:solidFill>
+          <a:ln/>
+        </p:spPr>
+      </p:sp>
+      <p:sp>
+        <p:nvSpPr>
+          <p:cNvPr id="23" name="Shape 21"/>
+          <p:cNvSpPr/>
+          <p:nvPr/>
+        </p:nvSpPr>
+        <p:spPr>
+          <a:xfrm>
+            <a:off x="457200" y="3630168"/>
+            <a:ext cx="45720" cy="448056"/>
+          </a:xfrm>
+          <a:prstGeom prst="rect">
+            <a:avLst/>
+          </a:prstGeom>
+          <a:solidFill>
+            <a:srgbClr val="2E7D32"/>
+          </a:solidFill>
+          <a:ln/>
+        </p:spPr>
+      </p:sp>
+      <p:sp>
+        <p:nvSpPr>
+          <p:cNvPr id="24" name="Text 22"/>
+          <p:cNvSpPr/>
+          <p:nvPr/>
+        </p:nvSpPr>
+        <p:spPr>
+          <a:xfrm>
+            <a:off x="640080" y="3630168"/>
+            <a:ext cx="7863840" cy="448056"/>
+          </a:xfrm>
+          <a:prstGeom prst="rect">
+            <a:avLst/>
+          </a:prstGeom>
+          <a:noFill/>
+          <a:ln/>
+        </p:spPr>
+        <p:txBody>
+          <a:bodyPr wrap="square" lIns="0" tIns="0" rIns="0" bIns="0" rtlCol="0" anchor="ctr"/>
+          <a:lstStyle/>
+          <a:p>
+            <a:pPr indent="0" marL="0">
+              <a:buNone/>
+            </a:pPr>
+            <a:r>
+              <a:rPr lang="en-US" sz="1100" dirty="0">
+                <a:solidFill>
+                  <a:srgbClr val="1A1A2E"/>
+                </a:solidFill>
+                <a:latin typeface="Calibri" pitchFamily="34" charset="0"/>
+                <a:ea typeface="Calibri" pitchFamily="34" charset="-122"/>
+                <a:cs typeface="Calibri" pitchFamily="34" charset="-120"/>
+              </a:rPr>
+              <a:t>C'est un choix CONSCIENT et DOCUMENTE (pas une erreur !)</a:t>
+            </a:r>
+            <a:endParaRPr lang="en-US" sz="1100" dirty="0"/>
+          </a:p>
+        </p:txBody>
+      </p:sp>
+      <p:sp>
+        <p:nvSpPr>
+          <p:cNvPr id="25" name="Shape 23"/>
+          <p:cNvSpPr/>
+          <p:nvPr/>
+        </p:nvSpPr>
+        <p:spPr>
+          <a:xfrm>
+            <a:off x="457200" y="4105656"/>
+            <a:ext cx="8229600" cy="448056"/>
+          </a:xfrm>
+          <a:prstGeom prst="rect">
+            <a:avLst/>
+          </a:prstGeom>
+          <a:solidFill>
+            <a:srgbClr val="E8F5E9"/>
+          </a:solidFill>
+          <a:ln/>
+        </p:spPr>
+      </p:sp>
+      <p:sp>
+        <p:nvSpPr>
+          <p:cNvPr id="26" name="Shape 24"/>
+          <p:cNvSpPr/>
+          <p:nvPr/>
+        </p:nvSpPr>
+        <p:spPr>
+          <a:xfrm>
+            <a:off x="457200" y="4105656"/>
+            <a:ext cx="45720" cy="448056"/>
+          </a:xfrm>
+          <a:prstGeom prst="rect">
+            <a:avLst/>
+          </a:prstGeom>
+          <a:solidFill>
+            <a:srgbClr val="2E7D32"/>
+          </a:solidFill>
+          <a:ln/>
+        </p:spPr>
+      </p:sp>
+      <p:sp>
+        <p:nvSpPr>
+          <p:cNvPr id="27" name="Text 25"/>
+          <p:cNvSpPr/>
+          <p:nvPr/>
+        </p:nvSpPr>
+        <p:spPr>
+          <a:xfrm>
+            <a:off x="640080" y="4105656"/>
+            <a:ext cx="7863840" cy="448056"/>
+          </a:xfrm>
+          <a:prstGeom prst="rect">
+            <a:avLst/>
+          </a:prstGeom>
+          <a:noFill/>
+          <a:ln/>
+        </p:spPr>
+        <p:txBody>
+          <a:bodyPr wrap="square" lIns="0" tIns="0" rIns="0" bIns="0" rtlCol="0" anchor="ctr"/>
+          <a:lstStyle/>
+          <a:p>
+            <a:pPr indent="0" marL="0">
+              <a:buNone/>
+            </a:pPr>
+            <a:r>
+              <a:rPr lang="en-US" sz="1100" dirty="0">
+                <a:solidFill>
+                  <a:srgbClr val="1A1A2E"/>
+                </a:solidFill>
+                <a:latin typeface="Calibri" pitchFamily="34" charset="0"/>
+                <a:ea typeface="Calibri" pitchFamily="34" charset="-122"/>
+                <a:cs typeface="Calibri" pitchFamily="34" charset="-120"/>
+              </a:rPr>
+              <a:t>Pour D1 : argumenter un cas de denormalisation = bon point</a:t>
             </a:r>
             <a:endParaRPr lang="en-US" sz="1100" dirty="0"/>
           </a:p>
@@ -6095,6 +6806,729 @@
 <file path=ppt/slides/slide8.xml><?xml version="1.0" encoding="utf-8"?>
 <p:sld xmlns:a="http://schemas.openxmlformats.org/drawingml/2006/main" xmlns:r="http://schemas.openxmlformats.org/officeDocument/2006/relationships" xmlns:p="http://schemas.openxmlformats.org/presentationml/2006/main">
   <p:cSld name="Slide 8">
+    <p:bg>
+      <p:bgPr>
+        <a:solidFill>
+          <a:srgbClr val="F5F7FA"/>
+        </a:solidFill>
+      </p:bgPr>
+    </p:bg>
+    <p:spTree>
+      <p:nvGrpSpPr>
+        <p:cNvPr id="1" name=""/>
+        <p:cNvGrpSpPr/>
+        <p:nvPr/>
+      </p:nvGrpSpPr>
+      <p:grpSpPr>
+        <a:xfrm>
+          <a:off x="0" y="0"/>
+          <a:ext cx="0" cy="0"/>
+          <a:chOff x="0" y="0"/>
+          <a:chExt cx="0" cy="0"/>
+        </a:xfrm>
+      </p:grpSpPr>
+      <p:sp>
+        <p:nvSpPr>
+          <p:cNvPr id="2" name="Shape 0"/>
+          <p:cNvSpPr/>
+          <p:nvPr/>
+        </p:nvSpPr>
+        <p:spPr>
+          <a:xfrm>
+            <a:off x="0" y="0"/>
+            <a:ext cx="9144000" cy="54864"/>
+          </a:xfrm>
+          <a:prstGeom prst="rect">
+            <a:avLst/>
+          </a:prstGeom>
+          <a:solidFill>
+            <a:srgbClr val="2E7D32"/>
+          </a:solidFill>
+          <a:ln/>
+        </p:spPr>
+      </p:sp>
+      <p:sp>
+        <p:nvSpPr>
+          <p:cNvPr id="3" name="Text 1"/>
+          <p:cNvSpPr/>
+          <p:nvPr/>
+        </p:nvSpPr>
+        <p:spPr>
+          <a:xfrm>
+            <a:off x="457200" y="182880"/>
+            <a:ext cx="8229600" cy="502920"/>
+          </a:xfrm>
+          <a:prstGeom prst="rect">
+            <a:avLst/>
+          </a:prstGeom>
+          <a:noFill/>
+          <a:ln/>
+        </p:spPr>
+        <p:txBody>
+          <a:bodyPr wrap="square" lIns="0" tIns="0" rIns="0" bIns="0" rtlCol="0" anchor="ctr"/>
+          <a:lstStyle/>
+          <a:p>
+            <a:pPr indent="0" marL="0">
+              <a:buNone/>
+            </a:pPr>
+            <a:r>
+              <a:rPr lang="en-US" sz="2100" b="1" dirty="0">
+                <a:solidFill>
+                  <a:srgbClr val="1B5E20"/>
+                </a:solidFill>
+                <a:latin typeface="Trebuchet MS" pitchFamily="34" charset="0"/>
+                <a:ea typeface="Trebuchet MS" pitchFamily="34" charset="-122"/>
+                <a:cs typeface="Trebuchet MS" pitchFamily="34" charset="-120"/>
+              </a:rPr>
+              <a:t>Exercice Module 7 — normaliser une table 'brute'</a:t>
+            </a:r>
+            <a:endParaRPr lang="en-US" sz="2100" dirty="0"/>
+          </a:p>
+        </p:txBody>
+      </p:sp>
+      <p:sp>
+        <p:nvSpPr>
+          <p:cNvPr id="4" name="Shape 2"/>
+          <p:cNvSpPr/>
+          <p:nvPr/>
+        </p:nvSpPr>
+        <p:spPr>
+          <a:xfrm>
+            <a:off x="457200" y="777240"/>
+            <a:ext cx="8229600" cy="448056"/>
+          </a:xfrm>
+          <a:prstGeom prst="rect">
+            <a:avLst/>
+          </a:prstGeom>
+          <a:solidFill>
+            <a:srgbClr val="FFFFFF"/>
+          </a:solidFill>
+          <a:ln/>
+        </p:spPr>
+      </p:sp>
+      <p:sp>
+        <p:nvSpPr>
+          <p:cNvPr id="5" name="Shape 3"/>
+          <p:cNvSpPr/>
+          <p:nvPr/>
+        </p:nvSpPr>
+        <p:spPr>
+          <a:xfrm>
+            <a:off x="457200" y="777240"/>
+            <a:ext cx="45720" cy="448056"/>
+          </a:xfrm>
+          <a:prstGeom prst="rect">
+            <a:avLst/>
+          </a:prstGeom>
+          <a:solidFill>
+            <a:srgbClr val="2E7D32"/>
+          </a:solidFill>
+          <a:ln/>
+        </p:spPr>
+      </p:sp>
+      <p:sp>
+        <p:nvSpPr>
+          <p:cNvPr id="6" name="Text 4"/>
+          <p:cNvSpPr/>
+          <p:nvPr/>
+        </p:nvSpPr>
+        <p:spPr>
+          <a:xfrm>
+            <a:off x="640080" y="777240"/>
+            <a:ext cx="7863840" cy="448056"/>
+          </a:xfrm>
+          <a:prstGeom prst="rect">
+            <a:avLst/>
+          </a:prstGeom>
+          <a:noFill/>
+          <a:ln/>
+        </p:spPr>
+        <p:txBody>
+          <a:bodyPr wrap="square" lIns="0" tIns="0" rIns="0" bIns="0" rtlCol="0" anchor="ctr"/>
+          <a:lstStyle/>
+          <a:p>
+            <a:pPr indent="0" marL="0">
+              <a:buNone/>
+            </a:pPr>
+            <a:r>
+              <a:rPr lang="en-US" sz="1100" dirty="0">
+                <a:solidFill>
+                  <a:srgbClr val="1A1A2E"/>
+                </a:solidFill>
+                <a:latin typeface="Calibri" pitchFamily="34" charset="0"/>
+                <a:ea typeface="Calibri" pitchFamily="34" charset="-122"/>
+                <a:cs typeface="Calibri" pitchFamily="34" charset="-120"/>
+              </a:rPr>
+              <a:t>1. Prendre la table 'tout_en_un' fournie (fichier Excel)</a:t>
+            </a:r>
+            <a:endParaRPr lang="en-US" sz="1100" dirty="0"/>
+          </a:p>
+        </p:txBody>
+      </p:sp>
+      <p:sp>
+        <p:nvSpPr>
+          <p:cNvPr id="7" name="Shape 5"/>
+          <p:cNvSpPr/>
+          <p:nvPr/>
+        </p:nvSpPr>
+        <p:spPr>
+          <a:xfrm>
+            <a:off x="457200" y="1252728"/>
+            <a:ext cx="8229600" cy="448056"/>
+          </a:xfrm>
+          <a:prstGeom prst="rect">
+            <a:avLst/>
+          </a:prstGeom>
+          <a:solidFill>
+            <a:srgbClr val="E8F5E9"/>
+          </a:solidFill>
+          <a:ln/>
+        </p:spPr>
+      </p:sp>
+      <p:sp>
+        <p:nvSpPr>
+          <p:cNvPr id="8" name="Shape 6"/>
+          <p:cNvSpPr/>
+          <p:nvPr/>
+        </p:nvSpPr>
+        <p:spPr>
+          <a:xfrm>
+            <a:off x="457200" y="1252728"/>
+            <a:ext cx="45720" cy="448056"/>
+          </a:xfrm>
+          <a:prstGeom prst="rect">
+            <a:avLst/>
+          </a:prstGeom>
+          <a:solidFill>
+            <a:srgbClr val="2E7D32"/>
+          </a:solidFill>
+          <a:ln/>
+        </p:spPr>
+      </p:sp>
+      <p:sp>
+        <p:nvSpPr>
+          <p:cNvPr id="9" name="Text 7"/>
+          <p:cNvSpPr/>
+          <p:nvPr/>
+        </p:nvSpPr>
+        <p:spPr>
+          <a:xfrm>
+            <a:off x="640080" y="1252728"/>
+            <a:ext cx="7863840" cy="448056"/>
+          </a:xfrm>
+          <a:prstGeom prst="rect">
+            <a:avLst/>
+          </a:prstGeom>
+          <a:noFill/>
+          <a:ln/>
+        </p:spPr>
+        <p:txBody>
+          <a:bodyPr wrap="square" lIns="0" tIns="0" rIns="0" bIns="0" rtlCol="0" anchor="ctr"/>
+          <a:lstStyle/>
+          <a:p>
+            <a:pPr indent="0" marL="0">
+              <a:buNone/>
+            </a:pPr>
+            <a:r>
+              <a:rPr lang="en-US" sz="1100" dirty="0">
+                <a:solidFill>
+                  <a:srgbClr val="1A1A2E"/>
+                </a:solidFill>
+                <a:latin typeface="Calibri" pitchFamily="34" charset="0"/>
+                <a:ea typeface="Calibri" pitchFamily="34" charset="-122"/>
+                <a:cs typeface="Calibri" pitchFamily="34" charset="-120"/>
+              </a:rPr>
+              <a:t>2. Identifier les violations 1NF (listes, champs composes)</a:t>
+            </a:r>
+            <a:endParaRPr lang="en-US" sz="1100" dirty="0"/>
+          </a:p>
+        </p:txBody>
+      </p:sp>
+      <p:sp>
+        <p:nvSpPr>
+          <p:cNvPr id="10" name="Shape 8"/>
+          <p:cNvSpPr/>
+          <p:nvPr/>
+        </p:nvSpPr>
+        <p:spPr>
+          <a:xfrm>
+            <a:off x="457200" y="1728216"/>
+            <a:ext cx="8229600" cy="448056"/>
+          </a:xfrm>
+          <a:prstGeom prst="rect">
+            <a:avLst/>
+          </a:prstGeom>
+          <a:solidFill>
+            <a:srgbClr val="FFFFFF"/>
+          </a:solidFill>
+          <a:ln/>
+        </p:spPr>
+      </p:sp>
+      <p:sp>
+        <p:nvSpPr>
+          <p:cNvPr id="11" name="Shape 9"/>
+          <p:cNvSpPr/>
+          <p:nvPr/>
+        </p:nvSpPr>
+        <p:spPr>
+          <a:xfrm>
+            <a:off x="457200" y="1728216"/>
+            <a:ext cx="45720" cy="448056"/>
+          </a:xfrm>
+          <a:prstGeom prst="rect">
+            <a:avLst/>
+          </a:prstGeom>
+          <a:solidFill>
+            <a:srgbClr val="2E7D32"/>
+          </a:solidFill>
+          <a:ln/>
+        </p:spPr>
+      </p:sp>
+      <p:sp>
+        <p:nvSpPr>
+          <p:cNvPr id="12" name="Text 10"/>
+          <p:cNvSpPr/>
+          <p:nvPr/>
+        </p:nvSpPr>
+        <p:spPr>
+          <a:xfrm>
+            <a:off x="640080" y="1728216"/>
+            <a:ext cx="7863840" cy="448056"/>
+          </a:xfrm>
+          <a:prstGeom prst="rect">
+            <a:avLst/>
+          </a:prstGeom>
+          <a:noFill/>
+          <a:ln/>
+        </p:spPr>
+        <p:txBody>
+          <a:bodyPr wrap="square" lIns="0" tIns="0" rIns="0" bIns="0" rtlCol="0" anchor="ctr"/>
+          <a:lstStyle/>
+          <a:p>
+            <a:pPr indent="0" marL="0">
+              <a:buNone/>
+            </a:pPr>
+            <a:r>
+              <a:rPr lang="en-US" sz="1100" dirty="0">
+                <a:solidFill>
+                  <a:srgbClr val="1A1A2E"/>
+                </a:solidFill>
+                <a:latin typeface="Calibri" pitchFamily="34" charset="0"/>
+                <a:ea typeface="Calibri" pitchFamily="34" charset="-122"/>
+                <a:cs typeface="Calibri" pitchFamily="34" charset="-120"/>
+              </a:rPr>
+              <a:t>3. Identifier les violations 2NF (si PK composee)</a:t>
+            </a:r>
+            <a:endParaRPr lang="en-US" sz="1100" dirty="0"/>
+          </a:p>
+        </p:txBody>
+      </p:sp>
+      <p:sp>
+        <p:nvSpPr>
+          <p:cNvPr id="13" name="Shape 11"/>
+          <p:cNvSpPr/>
+          <p:nvPr/>
+        </p:nvSpPr>
+        <p:spPr>
+          <a:xfrm>
+            <a:off x="457200" y="2203704"/>
+            <a:ext cx="8229600" cy="448056"/>
+          </a:xfrm>
+          <a:prstGeom prst="rect">
+            <a:avLst/>
+          </a:prstGeom>
+          <a:solidFill>
+            <a:srgbClr val="E8F5E9"/>
+          </a:solidFill>
+          <a:ln/>
+        </p:spPr>
+      </p:sp>
+      <p:sp>
+        <p:nvSpPr>
+          <p:cNvPr id="14" name="Shape 12"/>
+          <p:cNvSpPr/>
+          <p:nvPr/>
+        </p:nvSpPr>
+        <p:spPr>
+          <a:xfrm>
+            <a:off x="457200" y="2203704"/>
+            <a:ext cx="45720" cy="448056"/>
+          </a:xfrm>
+          <a:prstGeom prst="rect">
+            <a:avLst/>
+          </a:prstGeom>
+          <a:solidFill>
+            <a:srgbClr val="2E7D32"/>
+          </a:solidFill>
+          <a:ln/>
+        </p:spPr>
+      </p:sp>
+      <p:sp>
+        <p:nvSpPr>
+          <p:cNvPr id="15" name="Text 13"/>
+          <p:cNvSpPr/>
+          <p:nvPr/>
+        </p:nvSpPr>
+        <p:spPr>
+          <a:xfrm>
+            <a:off x="640080" y="2203704"/>
+            <a:ext cx="7863840" cy="448056"/>
+          </a:xfrm>
+          <a:prstGeom prst="rect">
+            <a:avLst/>
+          </a:prstGeom>
+          <a:noFill/>
+          <a:ln/>
+        </p:spPr>
+        <p:txBody>
+          <a:bodyPr wrap="square" lIns="0" tIns="0" rIns="0" bIns="0" rtlCol="0" anchor="ctr"/>
+          <a:lstStyle/>
+          <a:p>
+            <a:pPr indent="0" marL="0">
+              <a:buNone/>
+            </a:pPr>
+            <a:r>
+              <a:rPr lang="en-US" sz="1100" dirty="0">
+                <a:solidFill>
+                  <a:srgbClr val="1A1A2E"/>
+                </a:solidFill>
+                <a:latin typeface="Calibri" pitchFamily="34" charset="0"/>
+                <a:ea typeface="Calibri" pitchFamily="34" charset="-122"/>
+                <a:cs typeface="Calibri" pitchFamily="34" charset="-120"/>
+              </a:rPr>
+              <a:t>4. Identifier les violations 3NF (DF transitives)</a:t>
+            </a:r>
+            <a:endParaRPr lang="en-US" sz="1100" dirty="0"/>
+          </a:p>
+        </p:txBody>
+      </p:sp>
+      <p:sp>
+        <p:nvSpPr>
+          <p:cNvPr id="16" name="Shape 14"/>
+          <p:cNvSpPr/>
+          <p:nvPr/>
+        </p:nvSpPr>
+        <p:spPr>
+          <a:xfrm>
+            <a:off x="457200" y="2679192"/>
+            <a:ext cx="8229600" cy="448056"/>
+          </a:xfrm>
+          <a:prstGeom prst="rect">
+            <a:avLst/>
+          </a:prstGeom>
+          <a:solidFill>
+            <a:srgbClr val="FFFFFF"/>
+          </a:solidFill>
+          <a:ln/>
+        </p:spPr>
+      </p:sp>
+      <p:sp>
+        <p:nvSpPr>
+          <p:cNvPr id="17" name="Shape 15"/>
+          <p:cNvSpPr/>
+          <p:nvPr/>
+        </p:nvSpPr>
+        <p:spPr>
+          <a:xfrm>
+            <a:off x="457200" y="2679192"/>
+            <a:ext cx="45720" cy="448056"/>
+          </a:xfrm>
+          <a:prstGeom prst="rect">
+            <a:avLst/>
+          </a:prstGeom>
+          <a:solidFill>
+            <a:srgbClr val="2E7D32"/>
+          </a:solidFill>
+          <a:ln/>
+        </p:spPr>
+      </p:sp>
+      <p:sp>
+        <p:nvSpPr>
+          <p:cNvPr id="18" name="Text 16"/>
+          <p:cNvSpPr/>
+          <p:nvPr/>
+        </p:nvSpPr>
+        <p:spPr>
+          <a:xfrm>
+            <a:off x="640080" y="2679192"/>
+            <a:ext cx="7863840" cy="448056"/>
+          </a:xfrm>
+          <a:prstGeom prst="rect">
+            <a:avLst/>
+          </a:prstGeom>
+          <a:noFill/>
+          <a:ln/>
+        </p:spPr>
+        <p:txBody>
+          <a:bodyPr wrap="square" lIns="0" tIns="0" rIns="0" bIns="0" rtlCol="0" anchor="ctr"/>
+          <a:lstStyle/>
+          <a:p>
+            <a:pPr indent="0" marL="0">
+              <a:buNone/>
+            </a:pPr>
+            <a:r>
+              <a:rPr lang="en-US" sz="1100" dirty="0">
+                <a:solidFill>
+                  <a:srgbClr val="1A1A2E"/>
+                </a:solidFill>
+                <a:latin typeface="Calibri" pitchFamily="34" charset="0"/>
+                <a:ea typeface="Calibri" pitchFamily="34" charset="-122"/>
+                <a:cs typeface="Calibri" pitchFamily="34" charset="-120"/>
+              </a:rPr>
+              <a:t>5. Normaliser etape par etape : 1NF → 2NF → 3NF</a:t>
+            </a:r>
+            <a:endParaRPr lang="en-US" sz="1100" dirty="0"/>
+          </a:p>
+        </p:txBody>
+      </p:sp>
+      <p:sp>
+        <p:nvSpPr>
+          <p:cNvPr id="19" name="Shape 17"/>
+          <p:cNvSpPr/>
+          <p:nvPr/>
+        </p:nvSpPr>
+        <p:spPr>
+          <a:xfrm>
+            <a:off x="457200" y="3154680"/>
+            <a:ext cx="8229600" cy="448056"/>
+          </a:xfrm>
+          <a:prstGeom prst="rect">
+            <a:avLst/>
+          </a:prstGeom>
+          <a:solidFill>
+            <a:srgbClr val="E8F5E9"/>
+          </a:solidFill>
+          <a:ln/>
+        </p:spPr>
+      </p:sp>
+      <p:sp>
+        <p:nvSpPr>
+          <p:cNvPr id="20" name="Shape 18"/>
+          <p:cNvSpPr/>
+          <p:nvPr/>
+        </p:nvSpPr>
+        <p:spPr>
+          <a:xfrm>
+            <a:off x="457200" y="3154680"/>
+            <a:ext cx="45720" cy="448056"/>
+          </a:xfrm>
+          <a:prstGeom prst="rect">
+            <a:avLst/>
+          </a:prstGeom>
+          <a:solidFill>
+            <a:srgbClr val="2E7D32"/>
+          </a:solidFill>
+          <a:ln/>
+        </p:spPr>
+      </p:sp>
+      <p:sp>
+        <p:nvSpPr>
+          <p:cNvPr id="21" name="Text 19"/>
+          <p:cNvSpPr/>
+          <p:nvPr/>
+        </p:nvSpPr>
+        <p:spPr>
+          <a:xfrm>
+            <a:off x="640080" y="3154680"/>
+            <a:ext cx="7863840" cy="448056"/>
+          </a:xfrm>
+          <a:prstGeom prst="rect">
+            <a:avLst/>
+          </a:prstGeom>
+          <a:noFill/>
+          <a:ln/>
+        </p:spPr>
+        <p:txBody>
+          <a:bodyPr wrap="square" lIns="0" tIns="0" rIns="0" bIns="0" rtlCol="0" anchor="ctr"/>
+          <a:lstStyle/>
+          <a:p>
+            <a:pPr indent="0" marL="0">
+              <a:buNone/>
+            </a:pPr>
+            <a:r>
+              <a:rPr lang="en-US" sz="1100" dirty="0">
+                <a:solidFill>
+                  <a:srgbClr val="1A1A2E"/>
+                </a:solidFill>
+                <a:latin typeface="Calibri" pitchFamily="34" charset="0"/>
+                <a:ea typeface="Calibri" pitchFamily="34" charset="-122"/>
+                <a:cs typeface="Calibri" pitchFamily="34" charset="-120"/>
+              </a:rPr>
+              <a:t>6. Comparer le resultat avec le MLD SwissSound</a:t>
+            </a:r>
+            <a:endParaRPr lang="en-US" sz="1100" dirty="0"/>
+          </a:p>
+        </p:txBody>
+      </p:sp>
+      <p:sp>
+        <p:nvSpPr>
+          <p:cNvPr id="22" name="Shape 20"/>
+          <p:cNvSpPr/>
+          <p:nvPr/>
+        </p:nvSpPr>
+        <p:spPr>
+          <a:xfrm>
+            <a:off x="457200" y="3630168"/>
+            <a:ext cx="8229600" cy="448056"/>
+          </a:xfrm>
+          <a:prstGeom prst="rect">
+            <a:avLst/>
+          </a:prstGeom>
+          <a:solidFill>
+            <a:srgbClr val="FFFFFF"/>
+          </a:solidFill>
+          <a:ln/>
+        </p:spPr>
+      </p:sp>
+      <p:sp>
+        <p:nvSpPr>
+          <p:cNvPr id="23" name="Shape 21"/>
+          <p:cNvSpPr/>
+          <p:nvPr/>
+        </p:nvSpPr>
+        <p:spPr>
+          <a:xfrm>
+            <a:off x="457200" y="3630168"/>
+            <a:ext cx="45720" cy="448056"/>
+          </a:xfrm>
+          <a:prstGeom prst="rect">
+            <a:avLst/>
+          </a:prstGeom>
+          <a:solidFill>
+            <a:srgbClr val="2E7D32"/>
+          </a:solidFill>
+          <a:ln/>
+        </p:spPr>
+      </p:sp>
+      <p:sp>
+        <p:nvSpPr>
+          <p:cNvPr id="24" name="Text 22"/>
+          <p:cNvSpPr/>
+          <p:nvPr/>
+        </p:nvSpPr>
+        <p:spPr>
+          <a:xfrm>
+            <a:off x="640080" y="3630168"/>
+            <a:ext cx="7863840" cy="448056"/>
+          </a:xfrm>
+          <a:prstGeom prst="rect">
+            <a:avLst/>
+          </a:prstGeom>
+          <a:noFill/>
+          <a:ln/>
+        </p:spPr>
+        <p:txBody>
+          <a:bodyPr wrap="square" lIns="0" tIns="0" rIns="0" bIns="0" rtlCol="0" anchor="ctr"/>
+          <a:lstStyle/>
+          <a:p>
+            <a:pPr indent="0" marL="0">
+              <a:buNone/>
+            </a:pPr>
+            <a:r>
+              <a:rPr lang="en-US" sz="1100" dirty="0">
+                <a:solidFill>
+                  <a:srgbClr val="1A1A2E"/>
+                </a:solidFill>
+                <a:latin typeface="Calibri" pitchFamily="34" charset="0"/>
+                <a:ea typeface="Calibri" pitchFamily="34" charset="-122"/>
+                <a:cs typeface="Calibri" pitchFamily="34" charset="-120"/>
+              </a:rPr>
+              <a:t>7. Expliquer la difference atomicite 1NF vs ACID</a:t>
+            </a:r>
+            <a:endParaRPr lang="en-US" sz="1100" dirty="0"/>
+          </a:p>
+        </p:txBody>
+      </p:sp>
+      <p:sp>
+        <p:nvSpPr>
+          <p:cNvPr id="25" name="Shape 23"/>
+          <p:cNvSpPr/>
+          <p:nvPr/>
+        </p:nvSpPr>
+        <p:spPr>
+          <a:xfrm>
+            <a:off x="457200" y="4105656"/>
+            <a:ext cx="8229600" cy="448056"/>
+          </a:xfrm>
+          <a:prstGeom prst="rect">
+            <a:avLst/>
+          </a:prstGeom>
+          <a:solidFill>
+            <a:srgbClr val="E8F5E9"/>
+          </a:solidFill>
+          <a:ln/>
+        </p:spPr>
+      </p:sp>
+      <p:sp>
+        <p:nvSpPr>
+          <p:cNvPr id="26" name="Shape 24"/>
+          <p:cNvSpPr/>
+          <p:nvPr/>
+        </p:nvSpPr>
+        <p:spPr>
+          <a:xfrm>
+            <a:off x="457200" y="4105656"/>
+            <a:ext cx="45720" cy="448056"/>
+          </a:xfrm>
+          <a:prstGeom prst="rect">
+            <a:avLst/>
+          </a:prstGeom>
+          <a:solidFill>
+            <a:srgbClr val="2E7D32"/>
+          </a:solidFill>
+          <a:ln/>
+        </p:spPr>
+      </p:sp>
+      <p:sp>
+        <p:nvSpPr>
+          <p:cNvPr id="27" name="Text 25"/>
+          <p:cNvSpPr/>
+          <p:nvPr/>
+        </p:nvSpPr>
+        <p:spPr>
+          <a:xfrm>
+            <a:off x="640080" y="4105656"/>
+            <a:ext cx="7863840" cy="448056"/>
+          </a:xfrm>
+          <a:prstGeom prst="rect">
+            <a:avLst/>
+          </a:prstGeom>
+          <a:noFill/>
+          <a:ln/>
+        </p:spPr>
+        <p:txBody>
+          <a:bodyPr wrap="square" lIns="0" tIns="0" rIns="0" bIns="0" rtlCol="0" anchor="ctr"/>
+          <a:lstStyle/>
+          <a:p>
+            <a:pPr indent="0" marL="0">
+              <a:buNone/>
+            </a:pPr>
+            <a:r>
+              <a:rPr lang="en-US" sz="1100" dirty="0">
+                <a:solidFill>
+                  <a:srgbClr val="1A1A2E"/>
+                </a:solidFill>
+                <a:latin typeface="Calibri" pitchFamily="34" charset="0"/>
+                <a:ea typeface="Calibri" pitchFamily="34" charset="-122"/>
+                <a:cs typeface="Calibri" pitchFamily="34" charset="-120"/>
+              </a:rPr>
+              <a:t>DEFI : creer une table volontairement non normalisee et montrer les 3 anomalies</a:t>
+            </a:r>
+            <a:endParaRPr lang="en-US" sz="1100" dirty="0"/>
+          </a:p>
+        </p:txBody>
+      </p:sp>
+    </p:spTree>
+  </p:cSld>
+  <p:clrMapOvr>
+    <a:masterClrMapping/>
+  </p:clrMapOvr>
+</p:sld>
+</file>
+
+<file path=ppt/slides/slide9.xml><?xml version="1.0" encoding="utf-8"?>
+<p:sld xmlns:a="http://schemas.openxmlformats.org/drawingml/2006/main" xmlns:r="http://schemas.openxmlformats.org/officeDocument/2006/relationships" xmlns:p="http://schemas.openxmlformats.org/presentationml/2006/main">
+  <p:cSld name="Slide 9">
     <p:bg>
       <p:bgPr>
         <a:solidFill>
@@ -6124,8 +7558,8 @@
         </p:nvSpPr>
         <p:spPr>
           <a:xfrm>
-            <a:off x="3840480" y="457200"/>
-            <a:ext cx="1463040" cy="1097280"/>
+            <a:off x="457200" y="1828800"/>
+            <a:ext cx="8229600" cy="548640"/>
           </a:xfrm>
           <a:prstGeom prst="rect">
             <a:avLst/>
@@ -6141,43 +7575,7 @@
               <a:buNone/>
             </a:pPr>
             <a:r>
-              <a:rPr lang="en-US" sz="6000" dirty="0">
-                <a:solidFill>
-                  <a:srgbClr val="000000"/>
-                </a:solidFill>
-              </a:rPr>
-              <a:t>🎮</a:t>
-            </a:r>
-            <a:endParaRPr lang="en-US" sz="6000" dirty="0"/>
-          </a:p>
-        </p:txBody>
-      </p:sp>
-      <p:sp>
-        <p:nvSpPr>
-          <p:cNvPr id="3" name="Text 1"/>
-          <p:cNvSpPr/>
-          <p:nvPr/>
-        </p:nvSpPr>
-        <p:spPr>
-          <a:xfrm>
-            <a:off x="457200" y="1645920"/>
-            <a:ext cx="8229600" cy="548640"/>
-          </a:xfrm>
-          <a:prstGeom prst="rect">
-            <a:avLst/>
-          </a:prstGeom>
-          <a:noFill/>
-          <a:ln/>
-        </p:spPr>
-        <p:txBody>
-          <a:bodyPr wrap="square" lIns="0" tIns="0" rIns="0" bIns="0" rtlCol="0" anchor="ctr"/>
-          <a:lstStyle/>
-          <a:p>
-            <a:pPr algn="ctr" indent="0" marL="0">
-              <a:buNone/>
-            </a:pPr>
-            <a:r>
-              <a:rPr lang="en-US" sz="2600" b="1" dirty="0">
+              <a:rPr lang="en-US" sz="2200" b="1" dirty="0">
                 <a:solidFill>
                   <a:srgbClr val="FFFFFF"/>
                 </a:solidFill>
@@ -6187,20 +7585,20 @@
               </a:rPr>
               <a:t>Mini-jeu : Le Nettoyeur de Tables</a:t>
             </a:r>
-            <a:endParaRPr lang="en-US" sz="2600" dirty="0"/>
-          </a:p>
-        </p:txBody>
-      </p:sp>
-      <p:sp>
-        <p:nvSpPr>
-          <p:cNvPr id="4" name="Text 2"/>
-          <p:cNvSpPr/>
-          <p:nvPr/>
-        </p:nvSpPr>
-        <p:spPr>
-          <a:xfrm>
-            <a:off x="1371600" y="2286000"/>
-            <a:ext cx="6400800" cy="731520"/>
+            <a:endParaRPr lang="en-US" sz="2200" dirty="0"/>
+          </a:p>
+        </p:txBody>
+      </p:sp>
+      <p:sp>
+        <p:nvSpPr>
+          <p:cNvPr id="3" name="Text 1"/>
+          <p:cNvSpPr/>
+          <p:nvPr/>
+        </p:nvSpPr>
+        <p:spPr>
+          <a:xfrm>
+            <a:off x="1371600" y="2468880"/>
+            <a:ext cx="6400800" cy="457200"/>
           </a:xfrm>
           <a:prstGeom prst="rect">
             <a:avLst/>
@@ -6216,7 +7614,7 @@
               <a:buNone/>
             </a:pPr>
             <a:r>
-              <a:rPr lang="en-US" sz="1400" dirty="0">
+              <a:rPr lang="en-US" sz="1300" dirty="0">
                 <a:solidFill>
                   <a:srgbClr val="CCCCCC"/>
                 </a:solidFill>
@@ -6224,827 +7622,9 @@
                 <a:ea typeface="Calibri" pitchFamily="34" charset="-122"/>
                 <a:cs typeface="Calibri" pitchFamily="34" charset="-120"/>
               </a:rPr>
-              <a:t>Nettoyez les tables non normalisées !</a:t>
-            </a:r>
-            <a:endParaRPr lang="en-US" sz="1400" dirty="0"/>
-          </a:p>
-        </p:txBody>
-      </p:sp>
-      <p:sp>
-        <p:nvSpPr>
-          <p:cNvPr id="5" name="Shape 3"/>
-          <p:cNvSpPr/>
-          <p:nvPr/>
-        </p:nvSpPr>
-        <p:spPr>
-          <a:xfrm>
-            <a:off x="2286000" y="3291840"/>
-            <a:ext cx="4572000" cy="548640"/>
-          </a:xfrm>
-          <a:prstGeom prst="rect">
-            <a:avLst/>
-          </a:prstGeom>
-          <a:solidFill>
-            <a:srgbClr val="FF6F00"/>
-          </a:solidFill>
-          <a:ln/>
-        </p:spPr>
-      </p:sp>
-      <p:sp>
-        <p:nvSpPr>
-          <p:cNvPr id="6" name="Text 4"/>
-          <p:cNvSpPr/>
-          <p:nvPr/>
-        </p:nvSpPr>
-        <p:spPr>
-          <a:xfrm>
-            <a:off x="2286000" y="3291840"/>
-            <a:ext cx="4572000" cy="548640"/>
-          </a:xfrm>
-          <a:prstGeom prst="rect">
-            <a:avLst/>
-          </a:prstGeom>
-          <a:noFill/>
-          <a:ln/>
-        </p:spPr>
-        <p:txBody>
-          <a:bodyPr wrap="square" lIns="0" tIns="0" rIns="0" bIns="0" rtlCol="0" anchor="ctr"/>
-          <a:lstStyle/>
-          <a:p>
-            <a:pPr algn="ctr" indent="0" marL="0">
-              <a:buNone/>
-            </a:pPr>
-            <a:r>
-              <a:rPr lang="en-US" sz="1800" b="1" dirty="0">
-                <a:solidFill>
-                  <a:srgbClr val="FFFFFF"/>
-                </a:solidFill>
-                <a:latin typeface="Trebuchet MS" pitchFamily="34" charset="0"/>
-                <a:ea typeface="Trebuchet MS" pitchFamily="34" charset="-122"/>
-                <a:cs typeface="Trebuchet MS" pitchFamily="34" charset="-120"/>
-              </a:rPr>
-              <a:t>▶  Lancer le jeu</a:t>
-            </a:r>
-            <a:endParaRPr lang="en-US" sz="1800" dirty="0"/>
-          </a:p>
-        </p:txBody>
-      </p:sp>
-      <p:sp>
-        <p:nvSpPr>
-          <p:cNvPr id="7" name="Text 5"/>
-          <p:cNvSpPr/>
-          <p:nvPr/>
-        </p:nvSpPr>
-        <p:spPr>
-          <a:xfrm>
-            <a:off x="914400" y="4114800"/>
-            <a:ext cx="7315200" cy="365760"/>
-          </a:xfrm>
-          <a:prstGeom prst="rect">
-            <a:avLst/>
-          </a:prstGeom>
-          <a:noFill/>
-          <a:ln/>
-        </p:spPr>
-        <p:txBody>
-          <a:bodyPr wrap="square" lIns="0" tIns="0" rIns="0" bIns="0" rtlCol="0" anchor="ctr"/>
-          <a:lstStyle/>
-          <a:p>
-            <a:pPr algn="ctr" indent="0" marL="0">
-              <a:buNone/>
-            </a:pPr>
-            <a:r>
-              <a:rPr lang="en-US" sz="1100" dirty="0">
-                <a:solidFill>
-                  <a:srgbClr val="8888AA"/>
-                </a:solidFill>
-                <a:latin typeface="Calibri" pitchFamily="34" charset="0"/>
-                <a:ea typeface="Calibri" pitchFamily="34" charset="-122"/>
-                <a:cs typeface="Calibri" pitchFamily="34" charset="-120"/>
-              </a:rPr>
-              <a:t>Score + Correction automatique + Historique</a:t>
-            </a:r>
-            <a:endParaRPr lang="en-US" sz="1100" dirty="0"/>
-          </a:p>
-        </p:txBody>
-      </p:sp>
-    </p:spTree>
-  </p:cSld>
-  <p:clrMapOvr>
-    <a:masterClrMapping/>
-  </p:clrMapOvr>
-</p:sld>
-</file>
-
-<file path=ppt/slides/slide9.xml><?xml version="1.0" encoding="utf-8"?>
-<p:sld xmlns:a="http://schemas.openxmlformats.org/drawingml/2006/main" xmlns:r="http://schemas.openxmlformats.org/officeDocument/2006/relationships" xmlns:p="http://schemas.openxmlformats.org/presentationml/2006/main">
-  <p:cSld name="Slide 9">
-    <p:bg>
-      <p:bgPr>
-        <a:solidFill>
-          <a:srgbClr val="F5F7FA"/>
-        </a:solidFill>
-      </p:bgPr>
-    </p:bg>
-    <p:spTree>
-      <p:nvGrpSpPr>
-        <p:cNvPr id="1" name=""/>
-        <p:cNvGrpSpPr/>
-        <p:nvPr/>
-      </p:nvGrpSpPr>
-      <p:grpSpPr>
-        <a:xfrm>
-          <a:off x="0" y="0"/>
-          <a:ext cx="0" cy="0"/>
-          <a:chOff x="0" y="0"/>
-          <a:chExt cx="0" cy="0"/>
-        </a:xfrm>
-      </p:grpSpPr>
-      <p:sp>
-        <p:nvSpPr>
-          <p:cNvPr id="2" name="Text 0"/>
-          <p:cNvSpPr/>
-          <p:nvPr/>
-        </p:nvSpPr>
-        <p:spPr>
-          <a:xfrm>
-            <a:off x="457200" y="137160"/>
-            <a:ext cx="5486400" cy="411480"/>
-          </a:xfrm>
-          <a:prstGeom prst="rect">
-            <a:avLst/>
-          </a:prstGeom>
-          <a:noFill/>
-          <a:ln/>
-        </p:spPr>
-        <p:txBody>
-          <a:bodyPr wrap="square" lIns="0" tIns="0" rIns="0" bIns="0" rtlCol="0" anchor="ctr"/>
-          <a:lstStyle/>
-          <a:p>
-            <a:pPr indent="0" marL="0">
-              <a:buNone/>
-            </a:pPr>
-            <a:r>
-              <a:rPr lang="en-US" sz="1800" b="1" dirty="0">
-                <a:solidFill>
-                  <a:srgbClr val="1B5E20"/>
-                </a:solidFill>
-                <a:latin typeface="Trebuchet MS" pitchFamily="34" charset="0"/>
-                <a:ea typeface="Trebuchet MS" pitchFamily="34" charset="-122"/>
-                <a:cs typeface="Trebuchet MS" pitchFamily="34" charset="-120"/>
-              </a:rPr>
-              <a:t>📋 Mémo Module 7</a:t>
-            </a:r>
-            <a:endParaRPr lang="en-US" sz="1800" dirty="0"/>
-          </a:p>
-        </p:txBody>
-      </p:sp>
-      <p:sp>
-        <p:nvSpPr>
-          <p:cNvPr id="3" name="Shape 1"/>
-          <p:cNvSpPr/>
-          <p:nvPr/>
-        </p:nvSpPr>
-        <p:spPr>
-          <a:xfrm>
-            <a:off x="457200" y="548640"/>
-            <a:ext cx="8229600" cy="274320"/>
-          </a:xfrm>
-          <a:prstGeom prst="rect">
-            <a:avLst/>
-          </a:prstGeom>
-          <a:solidFill>
-            <a:srgbClr val="FFF3E0"/>
-          </a:solidFill>
-          <a:ln/>
-        </p:spPr>
-      </p:sp>
-      <p:sp>
-        <p:nvSpPr>
-          <p:cNvPr id="4" name="Text 2"/>
-          <p:cNvSpPr/>
-          <p:nvPr/>
-        </p:nvSpPr>
-        <p:spPr>
-          <a:xfrm>
-            <a:off x="640080" y="548640"/>
-            <a:ext cx="7772400" cy="274320"/>
-          </a:xfrm>
-          <a:prstGeom prst="rect">
-            <a:avLst/>
-          </a:prstGeom>
-          <a:noFill/>
-          <a:ln/>
-        </p:spPr>
-        <p:txBody>
-          <a:bodyPr wrap="square" lIns="0" tIns="0" rIns="0" bIns="0" rtlCol="0" anchor="ctr"/>
-          <a:lstStyle/>
-          <a:p>
-            <a:pPr indent="0" marL="0">
-              <a:buNone/>
-            </a:pPr>
-            <a:r>
-              <a:rPr lang="en-US" sz="900" b="1" dirty="0">
-                <a:solidFill>
-                  <a:srgbClr val="E65100"/>
-                </a:solidFill>
-                <a:latin typeface="Calibri" pitchFamily="34" charset="0"/>
-                <a:ea typeface="Calibri" pitchFamily="34" charset="-122"/>
-                <a:cs typeface="Calibri" pitchFamily="34" charset="-120"/>
-              </a:rPr>
-              <a:t>🔒 Déblocable après complétion de toutes les phases</a:t>
-            </a:r>
-            <a:endParaRPr lang="en-US" sz="900" dirty="0"/>
-          </a:p>
-        </p:txBody>
-      </p:sp>
-      <p:sp>
-        <p:nvSpPr>
-          <p:cNvPr id="5" name="Shape 3"/>
-          <p:cNvSpPr/>
-          <p:nvPr/>
-        </p:nvSpPr>
-        <p:spPr>
-          <a:xfrm>
-            <a:off x="457200" y="960120"/>
-            <a:ext cx="2286000" cy="475488"/>
-          </a:xfrm>
-          <a:prstGeom prst="rect">
-            <a:avLst/>
-          </a:prstGeom>
-          <a:solidFill>
-            <a:srgbClr val="E8F5E9"/>
-          </a:solidFill>
-          <a:ln/>
-        </p:spPr>
-      </p:sp>
-      <p:sp>
-        <p:nvSpPr>
-          <p:cNvPr id="6" name="Text 4"/>
-          <p:cNvSpPr/>
-          <p:nvPr/>
-        </p:nvSpPr>
-        <p:spPr>
-          <a:xfrm>
-            <a:off x="548640" y="960120"/>
-            <a:ext cx="2103120" cy="475488"/>
-          </a:xfrm>
-          <a:prstGeom prst="rect">
-            <a:avLst/>
-          </a:prstGeom>
-          <a:noFill/>
-          <a:ln/>
-        </p:spPr>
-        <p:txBody>
-          <a:bodyPr wrap="square" lIns="0" tIns="0" rIns="0" bIns="0" rtlCol="0" anchor="ctr"/>
-          <a:lstStyle/>
-          <a:p>
-            <a:pPr indent="0" marL="0">
-              <a:buNone/>
-            </a:pPr>
-            <a:r>
-              <a:rPr lang="en-US" sz="900" b="1" dirty="0">
-                <a:solidFill>
-                  <a:srgbClr val="1B5E20"/>
-                </a:solidFill>
-                <a:latin typeface="Trebuchet MS" pitchFamily="34" charset="0"/>
-                <a:ea typeface="Trebuchet MS" pitchFamily="34" charset="-122"/>
-                <a:cs typeface="Trebuchet MS" pitchFamily="34" charset="-120"/>
-              </a:rPr>
-              <a:t>1NF</a:t>
-            </a:r>
-            <a:endParaRPr lang="en-US" sz="900" dirty="0"/>
-          </a:p>
-        </p:txBody>
-      </p:sp>
-      <p:sp>
-        <p:nvSpPr>
-          <p:cNvPr id="7" name="Shape 5"/>
-          <p:cNvSpPr/>
-          <p:nvPr/>
-        </p:nvSpPr>
-        <p:spPr>
-          <a:xfrm>
-            <a:off x="2743200" y="960120"/>
-            <a:ext cx="5943600" cy="475488"/>
-          </a:xfrm>
-          <a:prstGeom prst="rect">
-            <a:avLst/>
-          </a:prstGeom>
-          <a:solidFill>
-            <a:srgbClr val="E8F5E9"/>
-          </a:solidFill>
-          <a:ln/>
-        </p:spPr>
-      </p:sp>
-      <p:sp>
-        <p:nvSpPr>
-          <p:cNvPr id="8" name="Text 6"/>
-          <p:cNvSpPr/>
-          <p:nvPr/>
-        </p:nvSpPr>
-        <p:spPr>
-          <a:xfrm>
-            <a:off x="2834640" y="960120"/>
-            <a:ext cx="5760720" cy="475488"/>
-          </a:xfrm>
-          <a:prstGeom prst="rect">
-            <a:avLst/>
-          </a:prstGeom>
-          <a:noFill/>
-          <a:ln/>
-        </p:spPr>
-        <p:txBody>
-          <a:bodyPr wrap="square" lIns="0" tIns="0" rIns="0" bIns="0" rtlCol="0" anchor="ctr"/>
-          <a:lstStyle/>
-          <a:p>
-            <a:pPr indent="0" marL="0">
-              <a:buNone/>
-            </a:pPr>
-            <a:r>
-              <a:rPr lang="en-US" sz="900" dirty="0">
-                <a:solidFill>
-                  <a:srgbClr val="333333"/>
-                </a:solidFill>
-                <a:latin typeface="Calibri" pitchFamily="34" charset="0"/>
-                <a:ea typeface="Calibri" pitchFamily="34" charset="-122"/>
-                <a:cs typeface="Calibri" pitchFamily="34" charset="-120"/>
-              </a:rPr>
-              <a:t>Valeurs atomiques : 1 cellule = 1 valeur (≠ ACID !)</a:t>
-            </a:r>
-            <a:endParaRPr lang="en-US" sz="900" dirty="0"/>
-          </a:p>
-        </p:txBody>
-      </p:sp>
-      <p:sp>
-        <p:nvSpPr>
-          <p:cNvPr id="9" name="Shape 7"/>
-          <p:cNvSpPr/>
-          <p:nvPr/>
-        </p:nvSpPr>
-        <p:spPr>
-          <a:xfrm>
-            <a:off x="457200" y="1463040"/>
-            <a:ext cx="2286000" cy="475488"/>
-          </a:xfrm>
-          <a:prstGeom prst="rect">
-            <a:avLst/>
-          </a:prstGeom>
-          <a:solidFill>
-            <a:srgbClr val="F0F0F0"/>
-          </a:solidFill>
-          <a:ln/>
-        </p:spPr>
-      </p:sp>
-      <p:sp>
-        <p:nvSpPr>
-          <p:cNvPr id="10" name="Text 8"/>
-          <p:cNvSpPr/>
-          <p:nvPr/>
-        </p:nvSpPr>
-        <p:spPr>
-          <a:xfrm>
-            <a:off x="548640" y="1463040"/>
-            <a:ext cx="2103120" cy="475488"/>
-          </a:xfrm>
-          <a:prstGeom prst="rect">
-            <a:avLst/>
-          </a:prstGeom>
-          <a:noFill/>
-          <a:ln/>
-        </p:spPr>
-        <p:txBody>
-          <a:bodyPr wrap="square" lIns="0" tIns="0" rIns="0" bIns="0" rtlCol="0" anchor="ctr"/>
-          <a:lstStyle/>
-          <a:p>
-            <a:pPr indent="0" marL="0">
-              <a:buNone/>
-            </a:pPr>
-            <a:r>
-              <a:rPr lang="en-US" sz="900" b="1" dirty="0">
-                <a:solidFill>
-                  <a:srgbClr val="1B5E20"/>
-                </a:solidFill>
-                <a:latin typeface="Trebuchet MS" pitchFamily="34" charset="0"/>
-                <a:ea typeface="Trebuchet MS" pitchFamily="34" charset="-122"/>
-                <a:cs typeface="Trebuchet MS" pitchFamily="34" charset="-120"/>
-              </a:rPr>
-              <a:t>2NF</a:t>
-            </a:r>
-            <a:endParaRPr lang="en-US" sz="900" dirty="0"/>
-          </a:p>
-        </p:txBody>
-      </p:sp>
-      <p:sp>
-        <p:nvSpPr>
-          <p:cNvPr id="11" name="Shape 9"/>
-          <p:cNvSpPr/>
-          <p:nvPr/>
-        </p:nvSpPr>
-        <p:spPr>
-          <a:xfrm>
-            <a:off x="2743200" y="1463040"/>
-            <a:ext cx="5943600" cy="475488"/>
-          </a:xfrm>
-          <a:prstGeom prst="rect">
-            <a:avLst/>
-          </a:prstGeom>
-          <a:solidFill>
-            <a:srgbClr val="F0F0F0"/>
-          </a:solidFill>
-          <a:ln/>
-        </p:spPr>
-      </p:sp>
-      <p:sp>
-        <p:nvSpPr>
-          <p:cNvPr id="12" name="Text 10"/>
-          <p:cNvSpPr/>
-          <p:nvPr/>
-        </p:nvSpPr>
-        <p:spPr>
-          <a:xfrm>
-            <a:off x="2834640" y="1463040"/>
-            <a:ext cx="5760720" cy="475488"/>
-          </a:xfrm>
-          <a:prstGeom prst="rect">
-            <a:avLst/>
-          </a:prstGeom>
-          <a:noFill/>
-          <a:ln/>
-        </p:spPr>
-        <p:txBody>
-          <a:bodyPr wrap="square" lIns="0" tIns="0" rIns="0" bIns="0" rtlCol="0" anchor="ctr"/>
-          <a:lstStyle/>
-          <a:p>
-            <a:pPr indent="0" marL="0">
-              <a:buNone/>
-            </a:pPr>
-            <a:r>
-              <a:rPr lang="en-US" sz="900" dirty="0">
-                <a:solidFill>
-                  <a:srgbClr val="333333"/>
-                </a:solidFill>
-                <a:latin typeface="Calibri" pitchFamily="34" charset="0"/>
-                <a:ea typeface="Calibri" pitchFamily="34" charset="-122"/>
-                <a:cs typeface="Calibri" pitchFamily="34" charset="-120"/>
-              </a:rPr>
-              <a:t>Dépendance totale à la PK composée (PK simple → auto OK)</a:t>
-            </a:r>
-            <a:endParaRPr lang="en-US" sz="900" dirty="0"/>
-          </a:p>
-        </p:txBody>
-      </p:sp>
-      <p:sp>
-        <p:nvSpPr>
-          <p:cNvPr id="13" name="Shape 11"/>
-          <p:cNvSpPr/>
-          <p:nvPr/>
-        </p:nvSpPr>
-        <p:spPr>
-          <a:xfrm>
-            <a:off x="457200" y="1965960"/>
-            <a:ext cx="2286000" cy="475488"/>
-          </a:xfrm>
-          <a:prstGeom prst="rect">
-            <a:avLst/>
-          </a:prstGeom>
-          <a:solidFill>
-            <a:srgbClr val="E8F5E9"/>
-          </a:solidFill>
-          <a:ln/>
-        </p:spPr>
-      </p:sp>
-      <p:sp>
-        <p:nvSpPr>
-          <p:cNvPr id="14" name="Text 12"/>
-          <p:cNvSpPr/>
-          <p:nvPr/>
-        </p:nvSpPr>
-        <p:spPr>
-          <a:xfrm>
-            <a:off x="548640" y="1965960"/>
-            <a:ext cx="2103120" cy="475488"/>
-          </a:xfrm>
-          <a:prstGeom prst="rect">
-            <a:avLst/>
-          </a:prstGeom>
-          <a:noFill/>
-          <a:ln/>
-        </p:spPr>
-        <p:txBody>
-          <a:bodyPr wrap="square" lIns="0" tIns="0" rIns="0" bIns="0" rtlCol="0" anchor="ctr"/>
-          <a:lstStyle/>
-          <a:p>
-            <a:pPr indent="0" marL="0">
-              <a:buNone/>
-            </a:pPr>
-            <a:r>
-              <a:rPr lang="en-US" sz="900" b="1" dirty="0">
-                <a:solidFill>
-                  <a:srgbClr val="1B5E20"/>
-                </a:solidFill>
-                <a:latin typeface="Trebuchet MS" pitchFamily="34" charset="0"/>
-                <a:ea typeface="Trebuchet MS" pitchFamily="34" charset="-122"/>
-                <a:cs typeface="Trebuchet MS" pitchFamily="34" charset="-120"/>
-              </a:rPr>
-              <a:t>3NF</a:t>
-            </a:r>
-            <a:endParaRPr lang="en-US" sz="900" dirty="0"/>
-          </a:p>
-        </p:txBody>
-      </p:sp>
-      <p:sp>
-        <p:nvSpPr>
-          <p:cNvPr id="15" name="Shape 13"/>
-          <p:cNvSpPr/>
-          <p:nvPr/>
-        </p:nvSpPr>
-        <p:spPr>
-          <a:xfrm>
-            <a:off x="2743200" y="1965960"/>
-            <a:ext cx="5943600" cy="475488"/>
-          </a:xfrm>
-          <a:prstGeom prst="rect">
-            <a:avLst/>
-          </a:prstGeom>
-          <a:solidFill>
-            <a:srgbClr val="E8F5E9"/>
-          </a:solidFill>
-          <a:ln/>
-        </p:spPr>
-      </p:sp>
-      <p:sp>
-        <p:nvSpPr>
-          <p:cNvPr id="16" name="Text 14"/>
-          <p:cNvSpPr/>
-          <p:nvPr/>
-        </p:nvSpPr>
-        <p:spPr>
-          <a:xfrm>
-            <a:off x="2834640" y="1965960"/>
-            <a:ext cx="5760720" cy="475488"/>
-          </a:xfrm>
-          <a:prstGeom prst="rect">
-            <a:avLst/>
-          </a:prstGeom>
-          <a:noFill/>
-          <a:ln/>
-        </p:spPr>
-        <p:txBody>
-          <a:bodyPr wrap="square" lIns="0" tIns="0" rIns="0" bIns="0" rtlCol="0" anchor="ctr"/>
-          <a:lstStyle/>
-          <a:p>
-            <a:pPr indent="0" marL="0">
-              <a:buNone/>
-            </a:pPr>
-            <a:r>
-              <a:rPr lang="en-US" sz="900" dirty="0">
-                <a:solidFill>
-                  <a:srgbClr val="333333"/>
-                </a:solidFill>
-                <a:latin typeface="Calibri" pitchFamily="34" charset="0"/>
-                <a:ea typeface="Calibri" pitchFamily="34" charset="-122"/>
-                <a:cs typeface="Calibri" pitchFamily="34" charset="-120"/>
-              </a:rPr>
-              <a:t>Pas de DF transitive : clé, toute la clé, rien que la clé</a:t>
-            </a:r>
-            <a:endParaRPr lang="en-US" sz="900" dirty="0"/>
-          </a:p>
-        </p:txBody>
-      </p:sp>
-      <p:sp>
-        <p:nvSpPr>
-          <p:cNvPr id="17" name="Shape 15"/>
-          <p:cNvSpPr/>
-          <p:nvPr/>
-        </p:nvSpPr>
-        <p:spPr>
-          <a:xfrm>
-            <a:off x="457200" y="2468880"/>
-            <a:ext cx="2286000" cy="475488"/>
-          </a:xfrm>
-          <a:prstGeom prst="rect">
-            <a:avLst/>
-          </a:prstGeom>
-          <a:solidFill>
-            <a:srgbClr val="F0F0F0"/>
-          </a:solidFill>
-          <a:ln/>
-        </p:spPr>
-      </p:sp>
-      <p:sp>
-        <p:nvSpPr>
-          <p:cNvPr id="18" name="Text 16"/>
-          <p:cNvSpPr/>
-          <p:nvPr/>
-        </p:nvSpPr>
-        <p:spPr>
-          <a:xfrm>
-            <a:off x="548640" y="2468880"/>
-            <a:ext cx="2103120" cy="475488"/>
-          </a:xfrm>
-          <a:prstGeom prst="rect">
-            <a:avLst/>
-          </a:prstGeom>
-          <a:noFill/>
-          <a:ln/>
-        </p:spPr>
-        <p:txBody>
-          <a:bodyPr wrap="square" lIns="0" tIns="0" rIns="0" bIns="0" rtlCol="0" anchor="ctr"/>
-          <a:lstStyle/>
-          <a:p>
-            <a:pPr indent="0" marL="0">
-              <a:buNone/>
-            </a:pPr>
-            <a:r>
-              <a:rPr lang="en-US" sz="900" b="1" dirty="0">
-                <a:solidFill>
-                  <a:srgbClr val="1B5E20"/>
-                </a:solidFill>
-                <a:latin typeface="Trebuchet MS" pitchFamily="34" charset="0"/>
-                <a:ea typeface="Trebuchet MS" pitchFamily="34" charset="-122"/>
-                <a:cs typeface="Trebuchet MS" pitchFamily="34" charset="-120"/>
-              </a:rPr>
-              <a:t>Anomalies</a:t>
-            </a:r>
-            <a:endParaRPr lang="en-US" sz="900" dirty="0"/>
-          </a:p>
-        </p:txBody>
-      </p:sp>
-      <p:sp>
-        <p:nvSpPr>
-          <p:cNvPr id="19" name="Shape 17"/>
-          <p:cNvSpPr/>
-          <p:nvPr/>
-        </p:nvSpPr>
-        <p:spPr>
-          <a:xfrm>
-            <a:off x="2743200" y="2468880"/>
-            <a:ext cx="5943600" cy="475488"/>
-          </a:xfrm>
-          <a:prstGeom prst="rect">
-            <a:avLst/>
-          </a:prstGeom>
-          <a:solidFill>
-            <a:srgbClr val="F0F0F0"/>
-          </a:solidFill>
-          <a:ln/>
-        </p:spPr>
-      </p:sp>
-      <p:sp>
-        <p:nvSpPr>
-          <p:cNvPr id="20" name="Text 18"/>
-          <p:cNvSpPr/>
-          <p:nvPr/>
-        </p:nvSpPr>
-        <p:spPr>
-          <a:xfrm>
-            <a:off x="2834640" y="2468880"/>
-            <a:ext cx="5760720" cy="475488"/>
-          </a:xfrm>
-          <a:prstGeom prst="rect">
-            <a:avLst/>
-          </a:prstGeom>
-          <a:noFill/>
-          <a:ln/>
-        </p:spPr>
-        <p:txBody>
-          <a:bodyPr wrap="square" lIns="0" tIns="0" rIns="0" bIns="0" rtlCol="0" anchor="ctr"/>
-          <a:lstStyle/>
-          <a:p>
-            <a:pPr indent="0" marL="0">
-              <a:buNone/>
-            </a:pPr>
-            <a:r>
-              <a:rPr lang="en-US" sz="900" dirty="0">
-                <a:solidFill>
-                  <a:srgbClr val="333333"/>
-                </a:solidFill>
-                <a:latin typeface="Calibri" pitchFamily="34" charset="0"/>
-                <a:ea typeface="Calibri" pitchFamily="34" charset="-122"/>
-                <a:cs typeface="Calibri" pitchFamily="34" charset="-120"/>
-              </a:rPr>
-              <a:t>Insertion, mise à jour, suppression — causées par la non-normalisation</a:t>
-            </a:r>
-            <a:endParaRPr lang="en-US" sz="900" dirty="0"/>
-          </a:p>
-        </p:txBody>
-      </p:sp>
-      <p:sp>
-        <p:nvSpPr>
-          <p:cNvPr id="21" name="Shape 19"/>
-          <p:cNvSpPr/>
-          <p:nvPr/>
-        </p:nvSpPr>
-        <p:spPr>
-          <a:xfrm>
-            <a:off x="457200" y="2971800"/>
-            <a:ext cx="2286000" cy="475488"/>
-          </a:xfrm>
-          <a:prstGeom prst="rect">
-            <a:avLst/>
-          </a:prstGeom>
-          <a:solidFill>
-            <a:srgbClr val="E8F5E9"/>
-          </a:solidFill>
-          <a:ln/>
-        </p:spPr>
-      </p:sp>
-      <p:sp>
-        <p:nvSpPr>
-          <p:cNvPr id="22" name="Text 20"/>
-          <p:cNvSpPr/>
-          <p:nvPr/>
-        </p:nvSpPr>
-        <p:spPr>
-          <a:xfrm>
-            <a:off x="548640" y="2971800"/>
-            <a:ext cx="2103120" cy="475488"/>
-          </a:xfrm>
-          <a:prstGeom prst="rect">
-            <a:avLst/>
-          </a:prstGeom>
-          <a:noFill/>
-          <a:ln/>
-        </p:spPr>
-        <p:txBody>
-          <a:bodyPr wrap="square" lIns="0" tIns="0" rIns="0" bIns="0" rtlCol="0" anchor="ctr"/>
-          <a:lstStyle/>
-          <a:p>
-            <a:pPr indent="0" marL="0">
-              <a:buNone/>
-            </a:pPr>
-            <a:r>
-              <a:rPr lang="en-US" sz="900" b="1" dirty="0">
-                <a:solidFill>
-                  <a:srgbClr val="1B5E20"/>
-                </a:solidFill>
-                <a:latin typeface="Trebuchet MS" pitchFamily="34" charset="0"/>
-                <a:ea typeface="Trebuchet MS" pitchFamily="34" charset="-122"/>
-                <a:cs typeface="Trebuchet MS" pitchFamily="34" charset="-120"/>
-              </a:rPr>
-              <a:t>Dénormalisation</a:t>
-            </a:r>
-            <a:endParaRPr lang="en-US" sz="900" dirty="0"/>
-          </a:p>
-        </p:txBody>
-      </p:sp>
-      <p:sp>
-        <p:nvSpPr>
-          <p:cNvPr id="23" name="Shape 21"/>
-          <p:cNvSpPr/>
-          <p:nvPr/>
-        </p:nvSpPr>
-        <p:spPr>
-          <a:xfrm>
-            <a:off x="2743200" y="2971800"/>
-            <a:ext cx="5943600" cy="475488"/>
-          </a:xfrm>
-          <a:prstGeom prst="rect">
-            <a:avLst/>
-          </a:prstGeom>
-          <a:solidFill>
-            <a:srgbClr val="E8F5E9"/>
-          </a:solidFill>
-          <a:ln/>
-        </p:spPr>
-      </p:sp>
-      <p:sp>
-        <p:nvSpPr>
-          <p:cNvPr id="24" name="Text 22"/>
-          <p:cNvSpPr/>
-          <p:nvPr/>
-        </p:nvSpPr>
-        <p:spPr>
-          <a:xfrm>
-            <a:off x="2834640" y="2971800"/>
-            <a:ext cx="5760720" cy="475488"/>
-          </a:xfrm>
-          <a:prstGeom prst="rect">
-            <a:avLst/>
-          </a:prstGeom>
-          <a:noFill/>
-          <a:ln/>
-        </p:spPr>
-        <p:txBody>
-          <a:bodyPr wrap="square" lIns="0" tIns="0" rIns="0" bIns="0" rtlCol="0" anchor="ctr"/>
-          <a:lstStyle/>
-          <a:p>
-            <a:pPr indent="0" marL="0">
-              <a:buNone/>
-            </a:pPr>
-            <a:r>
-              <a:rPr lang="en-US" sz="900" dirty="0">
-                <a:solidFill>
-                  <a:srgbClr val="333333"/>
-                </a:solidFill>
-                <a:latin typeface="Calibri" pitchFamily="34" charset="0"/>
-                <a:ea typeface="Calibri" pitchFamily="34" charset="-122"/>
-                <a:cs typeface="Calibri" pitchFamily="34" charset="-120"/>
-              </a:rPr>
-              <a:t>Violation volontaire pour performance (choix conscient et documenté)</a:t>
-            </a:r>
-            <a:endParaRPr lang="en-US" sz="900" dirty="0"/>
+              <a:t>Nettoyez les tables non normalisees !</a:t>
+            </a:r>
+            <a:endParaRPr lang="en-US" sz="1300" dirty="0"/>
           </a:p>
         </p:txBody>
       </p:sp>
